--- a/presentation/Pulso_Pitch_Deck_AZ.pptx
+++ b/presentation/Pulso_Pitch_Deck_AZ.pptx
@@ -15,9 +15,10 @@
     <p:sldId id="263" r:id="rId9"/>
     <p:sldId id="264" r:id="rId10"/>
     <p:sldId id="265" r:id="rId11"/>
+    <p:sldId id="266" r:id="rId12"/>
   </p:sldIdLst>
   <p:notesMasterIdLst>
-    <p:notesMasterId r:id="rId12"/>
+    <p:notesMasterId r:id="rId13"/>
   </p:notesMasterIdLst>
   <p:sldSz cx="12192000" cy="6858000"/>
   <p:notesSz cx="6858000" cy="12192000"/>
@@ -599,7 +600,7 @@
           <a:p>
             <a:r>
               <a:rPr lang="en-US" dirty="0"/>
-              <a:t>Sualdan əvvəl bir neçə saniyə sükut saxla.</a:t>
+              <a:t>On saniyə, artıq yox. Üzr istəyirmiş kimi yox, inamla de.</a:t>
             </a:r>
             <a:endParaRPr lang="en-US" dirty="0"/>
           </a:p>
@@ -623,6 +624,94 @@
             <a:fld id="{F7021451-1387-4CA6-816F-3879F97B5CBC}" type="slidenum">
               <a:rPr lang="en-US"/>
               <a:t>10</a:t>
+            </a:fld>
+            <a:endParaRPr lang="en-US"/>
+          </a:p>
+        </p:txBody>
+      </p:sp>
+    </p:spTree>
+    <p:extLst>
+      <p:ext uri="{BB962C8B-B14F-4D97-AF65-F5344CB8AC3E}">
+        <p14:creationId xmlns:p14="http://schemas.microsoft.com/office/powerpoint/2010/main" val="1024086991"/>
+      </p:ext>
+    </p:extLst>
+  </p:cSld>
+  <p:clrMapOvr>
+    <a:masterClrMapping/>
+  </p:clrMapOvr>
+</p:notes>
+</file>
+
+<file path=ppt/notesSlides/notesSlide11.xml><?xml version="1.0" encoding="utf-8"?>
+<p:notes xmlns:a="http://schemas.openxmlformats.org/drawingml/2006/main" xmlns:r="http://schemas.openxmlformats.org/officeDocument/2006/relationships" xmlns:p="http://schemas.openxmlformats.org/presentationml/2006/main">
+  <p:cSld>
+    <p:spTree>
+      <p:nvGrpSpPr>
+        <p:cNvPr id="1" name=""/>
+        <p:cNvGrpSpPr/>
+        <p:nvPr/>
+      </p:nvGrpSpPr>
+      <p:grpSpPr>
+        <a:xfrm>
+          <a:off x="0" y="0"/>
+          <a:ext cx="0" cy="0"/>
+          <a:chOff x="0" y="0"/>
+          <a:chExt cx="0" cy="0"/>
+        </a:xfrm>
+      </p:grpSpPr>
+      <p:sp>
+        <p:nvSpPr>
+          <p:cNvPr id="2" name="Slide Image Placeholder 1"/>
+          <p:cNvSpPr>
+            <a:spLocks noGrp="1" noRot="1" noChangeAspect="1"/>
+          </p:cNvSpPr>
+          <p:nvPr>
+            <p:ph type="sldImg"/>
+          </p:nvPr>
+        </p:nvSpPr>
+        <p:spPr/>
+      </p:sp>
+      <p:sp>
+        <p:nvSpPr>
+          <p:cNvPr id="3" name="Notes Placeholder 2"/>
+          <p:cNvSpPr>
+            <a:spLocks noGrp="1"/>
+          </p:cNvSpPr>
+          <p:nvPr>
+            <p:ph type="body" idx="1"/>
+          </p:nvPr>
+        </p:nvSpPr>
+        <p:spPr/>
+        <p:txBody>
+          <a:bodyPr/>
+          <a:lstStyle/>
+          <a:p>
+            <a:r>
+              <a:rPr lang="en-US" dirty="0"/>
+              <a:t>Sualdan əvvəl bir neçə saniyə sükut saxla.</a:t>
+            </a:r>
+            <a:endParaRPr lang="en-US" dirty="0"/>
+          </a:p>
+        </p:txBody>
+      </p:sp>
+      <p:sp>
+        <p:nvSpPr>
+          <p:cNvPr id="4" name="Slide Number Placeholder 3"/>
+          <p:cNvSpPr>
+            <a:spLocks noGrp="1"/>
+          </p:cNvSpPr>
+          <p:nvPr>
+            <p:ph type="sldNum" sz="quarter" idx="10"/>
+          </p:nvPr>
+        </p:nvSpPr>
+        <p:spPr/>
+        <p:txBody>
+          <a:bodyPr/>
+          <a:lstStyle/>
+          <a:p>
+            <a:fld id="{F7021451-1387-4CA6-816F-3879F97B5CBC}" type="slidenum">
+              <a:rPr lang="en-US"/>
+              <a:t>11</a:t>
             </a:fld>
             <a:endParaRPr lang="en-US"/>
           </a:p>
@@ -863,7 +952,7 @@
           <a:p>
             <a:r>
               <a:rPr lang="en-US" dirty="0"/>
-              <a:t>Bağlantı varsa telefona keç. Mikrofon işləməsə, nümunə düyməsini bas, döyüşmə.</a:t>
+              <a:t>Hər addımı bir cümlə ilə de, tələsmə.</a:t>
             </a:r>
             <a:endParaRPr lang="en-US" dirty="0"/>
           </a:p>
@@ -951,7 +1040,7 @@
           <a:p>
             <a:r>
               <a:rPr lang="en-US" dirty="0"/>
-              <a:t>Rəqəm ekranda bir neçə saniyə qalsın, sonra danış. Son cümləni yavaş və inamla de.</a:t>
+              <a:t>Bağlantı varsa telefona keç. Mikrofon işləməsə, nümunə düyməsini bas, döyüşmə.</a:t>
             </a:r>
             <a:endParaRPr lang="en-US" dirty="0"/>
           </a:p>
@@ -1039,7 +1128,7 @@
           <a:p>
             <a:r>
               <a:rPr lang="en-US" dirty="0"/>
-              <a:t>'Eyni beyin' deyib dördünə işarə et. Necə işlədiyini izah etmə.</a:t>
+              <a:t>Rəqəm ekranda bir neçə saniyə qalsın, sonra danış. Son cümləni yavaş və inamla de.</a:t>
             </a:r>
             <a:endParaRPr lang="en-US" dirty="0"/>
           </a:p>
@@ -1127,7 +1216,7 @@
           <a:p>
             <a:r>
               <a:rPr lang="en-US" dirty="0"/>
-              <a:t>Sondakı tənzimləmə cümləsi çoxlarının deyə bilmədiyi şeydir — açıq de, tələsmə.</a:t>
+              <a:t>'Eyni beyin' deyib dördünə işarə et. Necə işlədiyini izah etmə.</a:t>
             </a:r>
             <a:endParaRPr lang="en-US" dirty="0"/>
           </a:p>
@@ -1215,7 +1304,7 @@
           <a:p>
             <a:r>
               <a:rPr lang="en-US" dirty="0"/>
-              <a:t>Bunun plan olduğunu aydın de — hakaton komandasından bazar tərəfindən sınanmış qiymət gözlənilmir.</a:t>
+              <a:t>Sondakı tənzimləmə cümləsi çoxlarının deyə bilmədiyi şeydir — açıq de, tələsmə.</a:t>
             </a:r>
             <a:endParaRPr lang="en-US" dirty="0"/>
           </a:p>
@@ -1303,7 +1392,7 @@
           <a:p>
             <a:r>
               <a:rPr lang="en-US" dirty="0"/>
-              <a:t>On saniyə, artıq yox. Üzr istəyirmiş kimi yox, inamla de.</a:t>
+              <a:t>Bunun plan olduğunu aydın de — hakaton komandasından bazar tərəfindən sınanmış qiymət gözlənilmir.</a:t>
             </a:r>
             <a:endParaRPr lang="en-US" dirty="0"/>
           </a:p>
@@ -1861,6 +1950,452 @@
       </p:grpSpPr>
       <p:sp>
         <p:nvSpPr>
+          <p:cNvPr id="2" name="Text 0"/>
+          <p:cNvSpPr/>
+          <p:nvPr/>
+        </p:nvSpPr>
+        <p:spPr>
+          <a:xfrm>
+            <a:off x="868680" y="777240"/>
+            <a:ext cx="7315200" cy="292608"/>
+          </a:xfrm>
+          <a:prstGeom prst="rect">
+            <a:avLst/>
+          </a:prstGeom>
+          <a:noFill/>
+          <a:ln/>
+        </p:spPr>
+        <p:txBody>
+          <a:bodyPr wrap="square" lIns="0" tIns="0" rIns="0" bIns="0" rtlCol="0" anchor="ctr"/>
+          <a:lstStyle/>
+          <a:p>
+            <a:pPr algn="l" indent="0" marL="0">
+              <a:buNone/>
+            </a:pPr>
+            <a:r>
+              <a:rPr lang="en-US" sz="1200" b="1" spc="220" kern="0" dirty="0">
+                <a:solidFill>
+                  <a:srgbClr val="9AA0A8"/>
+                </a:solidFill>
+                <a:latin typeface="Courier New" pitchFamily="34" charset="0"/>
+                <a:ea typeface="Courier New" pitchFamily="34" charset="-122"/>
+                <a:cs typeface="Courier New" pitchFamily="34" charset="-120"/>
+              </a:rPr>
+              <a:t>BUNDAN SONRA NƏ</a:t>
+            </a:r>
+            <a:endParaRPr lang="en-US" sz="1200" dirty="0"/>
+          </a:p>
+        </p:txBody>
+      </p:sp>
+      <p:sp>
+        <p:nvSpPr>
+          <p:cNvPr id="3" name="Text 1"/>
+          <p:cNvSpPr/>
+          <p:nvPr/>
+        </p:nvSpPr>
+        <p:spPr>
+          <a:xfrm>
+            <a:off x="868680" y="1371600"/>
+            <a:ext cx="9601200" cy="1463040"/>
+          </a:xfrm>
+          <a:prstGeom prst="rect">
+            <a:avLst/>
+          </a:prstGeom>
+          <a:noFill/>
+          <a:ln/>
+        </p:spPr>
+        <p:txBody>
+          <a:bodyPr wrap="square" lIns="0" tIns="0" rIns="0" bIns="0" rtlCol="0" anchor="t"/>
+          <a:lstStyle/>
+          <a:p>
+            <a:pPr indent="0" marL="0">
+              <a:buNone/>
+            </a:pPr>
+            <a:r>
+              <a:rPr lang="en-US" sz="3400" dirty="0">
+                <a:solidFill>
+                  <a:srgbClr val="EDEEF0"/>
+                </a:solidFill>
+                <a:latin typeface="Cambria" pitchFamily="34" charset="0"/>
+                <a:ea typeface="Cambria" pitchFamily="34" charset="-122"/>
+                <a:cs typeface="Cambria" pitchFamily="34" charset="-120"/>
+              </a:rPr>
+              <a:t>İki real addım.</a:t>
+            </a:r>
+            <a:endParaRPr lang="en-US" sz="3400" dirty="0"/>
+          </a:p>
+          <a:p>
+            <a:pPr indent="0" marL="0">
+              <a:buNone/>
+            </a:pPr>
+            <a:r>
+              <a:rPr lang="en-US" sz="3400" dirty="0">
+                <a:solidFill>
+                  <a:srgbClr val="EDEEF0"/>
+                </a:solidFill>
+                <a:latin typeface="Cambria" pitchFamily="34" charset="0"/>
+                <a:ea typeface="Cambria" pitchFamily="34" charset="-122"/>
+                <a:cs typeface="Cambria" pitchFamily="34" charset="-120"/>
+              </a:rPr>
+              <a:t>Yüz ehtimal yox.</a:t>
+            </a:r>
+            <a:endParaRPr lang="en-US" sz="3400" dirty="0"/>
+          </a:p>
+        </p:txBody>
+      </p:sp>
+      <p:sp>
+        <p:nvSpPr>
+          <p:cNvPr id="4" name="Text 2"/>
+          <p:cNvSpPr/>
+          <p:nvPr/>
+        </p:nvSpPr>
+        <p:spPr>
+          <a:xfrm>
+            <a:off x="868680" y="3246120"/>
+            <a:ext cx="1005840" cy="914400"/>
+          </a:xfrm>
+          <a:prstGeom prst="rect">
+            <a:avLst/>
+          </a:prstGeom>
+          <a:noFill/>
+          <a:ln/>
+        </p:spPr>
+        <p:txBody>
+          <a:bodyPr wrap="square" lIns="0" tIns="0" rIns="0" bIns="0" rtlCol="0" anchor="ctr"/>
+          <a:lstStyle/>
+          <a:p>
+            <a:pPr indent="0" marL="0">
+              <a:buNone/>
+            </a:pPr>
+            <a:r>
+              <a:rPr lang="en-US" sz="4000" dirty="0">
+                <a:solidFill>
+                  <a:srgbClr val="FF5A2C"/>
+                </a:solidFill>
+                <a:latin typeface="Cambria" pitchFamily="34" charset="0"/>
+                <a:ea typeface="Cambria" pitchFamily="34" charset="-122"/>
+                <a:cs typeface="Cambria" pitchFamily="34" charset="-120"/>
+              </a:rPr>
+              <a:t>01</a:t>
+            </a:r>
+            <a:endParaRPr lang="en-US" sz="4000" dirty="0"/>
+          </a:p>
+        </p:txBody>
+      </p:sp>
+      <p:sp>
+        <p:nvSpPr>
+          <p:cNvPr id="5" name="Text 3"/>
+          <p:cNvSpPr/>
+          <p:nvPr/>
+        </p:nvSpPr>
+        <p:spPr>
+          <a:xfrm>
+            <a:off x="1920240" y="3246120"/>
+            <a:ext cx="9326880" cy="411480"/>
+          </a:xfrm>
+          <a:prstGeom prst="rect">
+            <a:avLst/>
+          </a:prstGeom>
+          <a:noFill/>
+          <a:ln/>
+        </p:spPr>
+        <p:txBody>
+          <a:bodyPr wrap="square" lIns="0" tIns="0" rIns="0" bIns="0" rtlCol="0" anchor="ctr"/>
+          <a:lstStyle/>
+          <a:p>
+            <a:pPr indent="0" marL="0">
+              <a:buNone/>
+            </a:pPr>
+            <a:r>
+              <a:rPr lang="en-US" sz="1450" b="1" dirty="0">
+                <a:solidFill>
+                  <a:srgbClr val="EDEEF0"/>
+                </a:solidFill>
+                <a:latin typeface="Courier New" pitchFamily="34" charset="0"/>
+                <a:ea typeface="Courier New" pitchFamily="34" charset="-122"/>
+                <a:cs typeface="Courier New" pitchFamily="34" charset="-120"/>
+              </a:rPr>
+              <a:t>Etibarlı tibbi qeydlərlə sınaq</a:t>
+            </a:r>
+            <a:endParaRPr lang="en-US" sz="1450" dirty="0"/>
+          </a:p>
+        </p:txBody>
+      </p:sp>
+      <p:sp>
+        <p:nvSpPr>
+          <p:cNvPr id="6" name="Text 4"/>
+          <p:cNvSpPr/>
+          <p:nvPr/>
+        </p:nvSpPr>
+        <p:spPr>
+          <a:xfrm>
+            <a:off x="1920240" y="3666744"/>
+            <a:ext cx="9326880" cy="457200"/>
+          </a:xfrm>
+          <a:prstGeom prst="rect">
+            <a:avLst/>
+          </a:prstGeom>
+          <a:noFill/>
+          <a:ln/>
+        </p:spPr>
+        <p:txBody>
+          <a:bodyPr wrap="square" lIns="0" tIns="0" rIns="0" bIns="0" rtlCol="0" anchor="t"/>
+          <a:lstStyle/>
+          <a:p>
+            <a:pPr indent="0" marL="0">
+              <a:buNone/>
+            </a:pPr>
+            <a:r>
+              <a:rPr lang="en-US" sz="1250" dirty="0">
+                <a:solidFill>
+                  <a:srgbClr val="9AA0A8"/>
+                </a:solidFill>
+                <a:latin typeface="Calibri" pitchFamily="34" charset="0"/>
+                <a:ea typeface="Calibri" pitchFamily="34" charset="-122"/>
+                <a:cs typeface="Calibri" pitchFamily="34" charset="-120"/>
+              </a:rPr>
+              <a:t>Buna hazırıq — sadəcə bu həftəsonu məlumata çata bilmədik.</a:t>
+            </a:r>
+            <a:endParaRPr lang="en-US" sz="1250" dirty="0"/>
+          </a:p>
+        </p:txBody>
+      </p:sp>
+      <p:sp>
+        <p:nvSpPr>
+          <p:cNvPr id="7" name="Text 5"/>
+          <p:cNvSpPr/>
+          <p:nvPr/>
+        </p:nvSpPr>
+        <p:spPr>
+          <a:xfrm>
+            <a:off x="868680" y="4617720"/>
+            <a:ext cx="1005840" cy="914400"/>
+          </a:xfrm>
+          <a:prstGeom prst="rect">
+            <a:avLst/>
+          </a:prstGeom>
+          <a:noFill/>
+          <a:ln/>
+        </p:spPr>
+        <p:txBody>
+          <a:bodyPr wrap="square" lIns="0" tIns="0" rIns="0" bIns="0" rtlCol="0" anchor="ctr"/>
+          <a:lstStyle/>
+          <a:p>
+            <a:pPr indent="0" marL="0">
+              <a:buNone/>
+            </a:pPr>
+            <a:r>
+              <a:rPr lang="en-US" sz="4000" dirty="0">
+                <a:solidFill>
+                  <a:srgbClr val="FF5A2C"/>
+                </a:solidFill>
+                <a:latin typeface="Cambria" pitchFamily="34" charset="0"/>
+                <a:ea typeface="Cambria" pitchFamily="34" charset="-122"/>
+                <a:cs typeface="Cambria" pitchFamily="34" charset="-120"/>
+              </a:rPr>
+              <a:t>02</a:t>
+            </a:r>
+            <a:endParaRPr lang="en-US" sz="4000" dirty="0"/>
+          </a:p>
+        </p:txBody>
+      </p:sp>
+      <p:sp>
+        <p:nvSpPr>
+          <p:cNvPr id="8" name="Text 6"/>
+          <p:cNvSpPr/>
+          <p:nvPr/>
+        </p:nvSpPr>
+        <p:spPr>
+          <a:xfrm>
+            <a:off x="1920240" y="4617720"/>
+            <a:ext cx="9326880" cy="411480"/>
+          </a:xfrm>
+          <a:prstGeom prst="rect">
+            <a:avLst/>
+          </a:prstGeom>
+          <a:noFill/>
+          <a:ln/>
+        </p:spPr>
+        <p:txBody>
+          <a:bodyPr wrap="square" lIns="0" tIns="0" rIns="0" bIns="0" rtlCol="0" anchor="ctr"/>
+          <a:lstStyle/>
+          <a:p>
+            <a:pPr indent="0" marL="0">
+              <a:buNone/>
+            </a:pPr>
+            <a:r>
+              <a:rPr lang="en-US" sz="1450" b="1" dirty="0">
+                <a:solidFill>
+                  <a:srgbClr val="EDEEF0"/>
+                </a:solidFill>
+                <a:latin typeface="Courier New" pitchFamily="34" charset="0"/>
+                <a:ea typeface="Courier New" pitchFamily="34" charset="-122"/>
+                <a:cs typeface="Courier New" pitchFamily="34" charset="-120"/>
+              </a:rPr>
+              <a:t>Mikrofonu real dəri təması ilə sınaq</a:t>
+            </a:r>
+            <a:endParaRPr lang="en-US" sz="1450" dirty="0"/>
+          </a:p>
+        </p:txBody>
+      </p:sp>
+      <p:sp>
+        <p:nvSpPr>
+          <p:cNvPr id="9" name="Text 7"/>
+          <p:cNvSpPr/>
+          <p:nvPr/>
+        </p:nvSpPr>
+        <p:spPr>
+          <a:xfrm>
+            <a:off x="1920240" y="5038344"/>
+            <a:ext cx="9326880" cy="457200"/>
+          </a:xfrm>
+          <a:prstGeom prst="rect">
+            <a:avLst/>
+          </a:prstGeom>
+          <a:noFill/>
+          <a:ln/>
+        </p:spPr>
+        <p:txBody>
+          <a:bodyPr wrap="square" lIns="0" tIns="0" rIns="0" bIns="0" rtlCol="0" anchor="t"/>
+          <a:lstStyle/>
+          <a:p>
+            <a:pPr indent="0" marL="0">
+              <a:buNone/>
+            </a:pPr>
+            <a:r>
+              <a:rPr lang="en-US" sz="1250" dirty="0">
+                <a:solidFill>
+                  <a:srgbClr val="9AA0A8"/>
+                </a:solidFill>
+                <a:latin typeface="Calibri" pitchFamily="34" charset="0"/>
+                <a:ea typeface="Calibri" pitchFamily="34" charset="-122"/>
+                <a:cs typeface="Calibri" pitchFamily="34" charset="-120"/>
+              </a:rPr>
+              <a:t>Qalan yeganə dürüst naməlumluq. Gizlədilmir, açıq deyilir.</a:t>
+            </a:r>
+            <a:endParaRPr lang="en-US" sz="1250" dirty="0"/>
+          </a:p>
+        </p:txBody>
+      </p:sp>
+      <p:sp>
+        <p:nvSpPr>
+          <p:cNvPr id="10" name="Text 8"/>
+          <p:cNvSpPr/>
+          <p:nvPr/>
+        </p:nvSpPr>
+        <p:spPr>
+          <a:xfrm>
+            <a:off x="502920" y="6400800"/>
+            <a:ext cx="1828800" cy="274320"/>
+          </a:xfrm>
+          <a:prstGeom prst="rect">
+            <a:avLst/>
+          </a:prstGeom>
+          <a:noFill/>
+          <a:ln/>
+        </p:spPr>
+        <p:txBody>
+          <a:bodyPr wrap="square" lIns="0" tIns="0" rIns="0" bIns="0" rtlCol="0" anchor="ctr"/>
+          <a:lstStyle/>
+          <a:p>
+            <a:pPr indent="0" marL="0">
+              <a:buNone/>
+            </a:pPr>
+            <a:r>
+              <a:rPr lang="en-US" sz="900" spc="200" kern="0" dirty="0">
+                <a:solidFill>
+                  <a:srgbClr val="9AA0A8"/>
+                </a:solidFill>
+                <a:latin typeface="Courier New" pitchFamily="34" charset="0"/>
+                <a:ea typeface="Courier New" pitchFamily="34" charset="-122"/>
+                <a:cs typeface="Courier New" pitchFamily="34" charset="-120"/>
+              </a:rPr>
+              <a:t>PULSO</a:t>
+            </a:r>
+            <a:endParaRPr lang="en-US" sz="900" dirty="0"/>
+          </a:p>
+        </p:txBody>
+      </p:sp>
+      <p:sp>
+        <p:nvSpPr>
+          <p:cNvPr id="11" name="Text 9"/>
+          <p:cNvSpPr/>
+          <p:nvPr/>
+        </p:nvSpPr>
+        <p:spPr>
+          <a:xfrm>
+            <a:off x="11185855" y="6400800"/>
+            <a:ext cx="548640" cy="274320"/>
+          </a:xfrm>
+          <a:prstGeom prst="rect">
+            <a:avLst/>
+          </a:prstGeom>
+          <a:noFill/>
+          <a:ln/>
+        </p:spPr>
+        <p:txBody>
+          <a:bodyPr wrap="square" lIns="0" tIns="0" rIns="0" bIns="0" rtlCol="0" anchor="ctr"/>
+          <a:lstStyle/>
+          <a:p>
+            <a:pPr algn="r" indent="0" marL="0">
+              <a:buNone/>
+            </a:pPr>
+            <a:r>
+              <a:rPr lang="en-US" sz="900" dirty="0">
+                <a:solidFill>
+                  <a:srgbClr val="9AA0A8"/>
+                </a:solidFill>
+                <a:latin typeface="Courier New" pitchFamily="34" charset="0"/>
+                <a:ea typeface="Courier New" pitchFamily="34" charset="-122"/>
+                <a:cs typeface="Courier New" pitchFamily="34" charset="-120"/>
+              </a:rPr>
+              <a:t>10</a:t>
+            </a:r>
+            <a:endParaRPr lang="en-US" sz="900" dirty="0"/>
+          </a:p>
+        </p:txBody>
+      </p:sp>
+    </p:spTree>
+  </p:cSld>
+  <p:clrMapOvr>
+    <a:masterClrMapping/>
+  </p:clrMapOvr>
+</p:sld>
+</file>
+
+<file path=ppt/slides/slide11.xml><?xml version="1.0" encoding="utf-8"?>
+<p:sld xmlns:a="http://schemas.openxmlformats.org/drawingml/2006/main" xmlns:r="http://schemas.openxmlformats.org/officeDocument/2006/relationships" xmlns:p="http://schemas.openxmlformats.org/presentationml/2006/main">
+  <p:cSld name="Slide 11">
+    <p:bg>
+      <p:bgPr>
+        <a:blipFill dpi="0" rotWithShape="1">
+          <a:blip r:embed="rId1">
+            <a:lum/>
+          </a:blip>
+          <a:srcRect/>
+          <a:stretch>
+            <a:fillRect/>
+          </a:stretch>
+        </a:blipFill>
+        <a:effectLst/>
+      </p:bgPr>
+    </p:bg>
+    <p:spTree>
+      <p:nvGrpSpPr>
+        <p:cNvPr id="1" name=""/>
+        <p:cNvGrpSpPr/>
+        <p:nvPr/>
+      </p:nvGrpSpPr>
+      <p:grpSpPr>
+        <a:xfrm>
+          <a:off x="0" y="0"/>
+          <a:ext cx="0" cy="0"/>
+          <a:chOff x="0" y="0"/>
+          <a:chExt cx="0" cy="0"/>
+        </a:xfrm>
+      </p:grpSpPr>
+      <p:sp>
+        <p:nvSpPr>
           <p:cNvPr id="2" name="Shape 0"/>
           <p:cNvSpPr/>
           <p:nvPr/>
@@ -2424,7 +2959,7 @@
                 <a:ea typeface="Courier New" pitchFamily="34" charset="-122"/>
                 <a:cs typeface="Courier New" pitchFamily="34" charset="-120"/>
               </a:rPr>
-              <a:t>PULSO NƏ EDIR</a:t>
+              <a:t>HƏLL</a:t>
             </a:r>
             <a:endParaRPr lang="en-US" sz="1200" dirty="0"/>
           </a:p>
@@ -2438,7 +2973,7 @@
         </p:nvSpPr>
         <p:spPr>
           <a:xfrm>
-            <a:off x="868680" y="1188720"/>
+            <a:off x="868680" y="868680"/>
             <a:ext cx="10058400" cy="1463040"/>
           </a:xfrm>
           <a:prstGeom prst="rect">
@@ -2455,7 +2990,7 @@
               <a:buNone/>
             </a:pPr>
             <a:r>
-              <a:rPr lang="en-US" sz="3700" dirty="0">
+              <a:rPr lang="en-US" sz="3400" dirty="0">
                 <a:solidFill>
                   <a:srgbClr val="141619"/>
                 </a:solidFill>
@@ -2463,16 +2998,16 @@
                 <a:ea typeface="Cambria" pitchFamily="34" charset="-122"/>
                 <a:cs typeface="Cambria" pitchFamily="34" charset="-120"/>
               </a:rPr>
-              <a:t>Düz üç cavabdan biri.</a:t>
-            </a:r>
-            <a:endParaRPr lang="en-US" sz="3700" dirty="0"/>
-          </a:p>
-          <a:p>
-            <a:pPr indent="0" marL="0">
-              <a:buNone/>
-            </a:pPr>
-            <a:r>
-              <a:rPr lang="en-US" sz="3700" dirty="0">
+              <a:t>Ucuz rəqəmsal stetoskop.</a:t>
+            </a:r>
+            <a:endParaRPr lang="en-US" sz="3400" dirty="0"/>
+          </a:p>
+          <a:p>
+            <a:pPr indent="0" marL="0">
+              <a:buNone/>
+            </a:pPr>
+            <a:r>
+              <a:rPr lang="en-US" sz="3400" dirty="0">
                 <a:solidFill>
                   <a:srgbClr val="141619"/>
                 </a:solidFill>
@@ -2480,21 +3015,63 @@
                 <a:ea typeface="Cambria" pitchFamily="34" charset="-122"/>
                 <a:cs typeface="Cambria" pitchFamily="34" charset="-120"/>
               </a:rPr>
-              <a:t>Heç vaxt dördüncüsü yox.</a:t>
-            </a:r>
-            <a:endParaRPr lang="en-US" sz="3700" dirty="0"/>
-          </a:p>
-        </p:txBody>
-      </p:sp>
-      <p:sp>
-        <p:nvSpPr>
-          <p:cNvPr id="4" name="Shape 2"/>
-          <p:cNvSpPr/>
-          <p:nvPr/>
-        </p:nvSpPr>
-        <p:spPr>
-          <a:xfrm>
-            <a:off x="868680" y="3017520"/>
+              <a:t>Hər dəfə bir dürüst cavab.</a:t>
+            </a:r>
+            <a:endParaRPr lang="en-US" sz="3400" dirty="0"/>
+          </a:p>
+        </p:txBody>
+      </p:sp>
+      <p:sp>
+        <p:nvSpPr>
+          <p:cNvPr id="4" name="Text 2"/>
+          <p:cNvSpPr/>
+          <p:nvPr/>
+        </p:nvSpPr>
+        <p:spPr>
+          <a:xfrm>
+            <a:off x="868680" y="2148840"/>
+            <a:ext cx="10241280" cy="1051560"/>
+          </a:xfrm>
+          <a:prstGeom prst="rect">
+            <a:avLst/>
+          </a:prstGeom>
+          <a:noFill/>
+          <a:ln/>
+        </p:spPr>
+        <p:txBody>
+          <a:bodyPr wrap="square" lIns="0" tIns="0" rIns="0" bIns="0" rtlCol="0" anchor="ctr"/>
+          <a:lstStyle/>
+          <a:p>
+            <a:pPr indent="0" marL="0">
+              <a:lnSpc>
+                <a:spcPct val="130000"/>
+              </a:lnSpc>
+              <a:buNone/>
+            </a:pPr>
+            <a:r>
+              <a:rPr lang="en-US" sz="1450" dirty="0">
+                <a:solidFill>
+                  <a:srgbClr val="5B6068"/>
+                </a:solidFill>
+                <a:latin typeface="Calibri" pitchFamily="34" charset="0"/>
+                <a:ea typeface="Calibri" pitchFamily="34" charset="-122"/>
+                <a:cs typeface="Calibri" pitchFamily="34" charset="-120"/>
+              </a:rPr>
+              <a:t>Kiçik kontakt mikrofon sinə vasitəsilə ürək döyüntüsünü dinləyir. Pulso bunu bir neçə saniyəyə analiz edir və düz üç cavabdan birini verir — heç vaxt diaqnoz kimi təqdim olunan təxmin deyil.</a:t>
+            </a:r>
+            <a:endParaRPr lang="en-US" sz="1450" dirty="0"/>
+          </a:p>
+        </p:txBody>
+      </p:sp>
+      <p:sp>
+        <p:nvSpPr>
+          <p:cNvPr id="5" name="Shape 3"/>
+          <p:cNvSpPr/>
+          <p:nvPr/>
+        </p:nvSpPr>
+        <p:spPr>
+          <a:xfrm>
+            <a:off x="868680" y="3794760"/>
             <a:ext cx="3017520" cy="438912"/>
           </a:xfrm>
           <a:prstGeom prst="rect">
@@ -2513,13 +3090,13 @@
       </p:sp>
       <p:sp>
         <p:nvSpPr>
-          <p:cNvPr id="5" name="Text 3"/>
-          <p:cNvSpPr/>
-          <p:nvPr/>
-        </p:nvSpPr>
-        <p:spPr>
-          <a:xfrm>
-            <a:off x="868680" y="3017520"/>
+          <p:cNvPr id="6" name="Text 4"/>
+          <p:cNvSpPr/>
+          <p:nvPr/>
+        </p:nvSpPr>
+        <p:spPr>
+          <a:xfrm>
+            <a:off x="868680" y="3794760"/>
             <a:ext cx="3017520" cy="438912"/>
           </a:xfrm>
           <a:prstGeom prst="rect">
@@ -2552,13 +3129,13 @@
       </p:sp>
       <p:sp>
         <p:nvSpPr>
-          <p:cNvPr id="6" name="Shape 4"/>
-          <p:cNvSpPr/>
-          <p:nvPr/>
-        </p:nvSpPr>
-        <p:spPr>
-          <a:xfrm>
-            <a:off x="4023360" y="3017520"/>
+          <p:cNvPr id="7" name="Shape 5"/>
+          <p:cNvSpPr/>
+          <p:nvPr/>
+        </p:nvSpPr>
+        <p:spPr>
+          <a:xfrm>
+            <a:off x="4023360" y="3794760"/>
             <a:ext cx="3657600" cy="438912"/>
           </a:xfrm>
           <a:prstGeom prst="rect">
@@ -2577,13 +3154,13 @@
       </p:sp>
       <p:sp>
         <p:nvSpPr>
-          <p:cNvPr id="7" name="Text 5"/>
-          <p:cNvSpPr/>
-          <p:nvPr/>
-        </p:nvSpPr>
-        <p:spPr>
-          <a:xfrm>
-            <a:off x="4023360" y="3017520"/>
+          <p:cNvPr id="8" name="Text 6"/>
+          <p:cNvSpPr/>
+          <p:nvPr/>
+        </p:nvSpPr>
+        <p:spPr>
+          <a:xfrm>
+            <a:off x="4023360" y="3794760"/>
             <a:ext cx="3657600" cy="438912"/>
           </a:xfrm>
           <a:prstGeom prst="rect">
@@ -2616,13 +3193,13 @@
       </p:sp>
       <p:sp>
         <p:nvSpPr>
-          <p:cNvPr id="8" name="Shape 6"/>
-          <p:cNvSpPr/>
-          <p:nvPr/>
-        </p:nvSpPr>
-        <p:spPr>
-          <a:xfrm>
-            <a:off x="7818120" y="3017520"/>
+          <p:cNvPr id="9" name="Shape 7"/>
+          <p:cNvSpPr/>
+          <p:nvPr/>
+        </p:nvSpPr>
+        <p:spPr>
+          <a:xfrm>
+            <a:off x="7818120" y="3794760"/>
             <a:ext cx="3520440" cy="438912"/>
           </a:xfrm>
           <a:prstGeom prst="rect">
@@ -2641,13 +3218,13 @@
       </p:sp>
       <p:sp>
         <p:nvSpPr>
-          <p:cNvPr id="9" name="Text 7"/>
-          <p:cNvSpPr/>
-          <p:nvPr/>
-        </p:nvSpPr>
-        <p:spPr>
-          <a:xfrm>
-            <a:off x="7818120" y="3017520"/>
+          <p:cNvPr id="10" name="Text 8"/>
+          <p:cNvSpPr/>
+          <p:nvPr/>
+        </p:nvSpPr>
+        <p:spPr>
+          <a:xfrm>
+            <a:off x="7818120" y="3794760"/>
             <a:ext cx="3520440" cy="438912"/>
           </a:xfrm>
           <a:prstGeom prst="rect">
@@ -2680,14 +3257,14 @@
       </p:sp>
       <p:sp>
         <p:nvSpPr>
-          <p:cNvPr id="10" name="Text 8"/>
-          <p:cNvSpPr/>
-          <p:nvPr/>
-        </p:nvSpPr>
-        <p:spPr>
-          <a:xfrm>
-            <a:off x="868680" y="4206240"/>
-            <a:ext cx="10241280" cy="1280160"/>
+          <p:cNvPr id="11" name="Text 9"/>
+          <p:cNvSpPr/>
+          <p:nvPr/>
+        </p:nvSpPr>
+        <p:spPr>
+          <a:xfrm>
+            <a:off x="868680" y="4937760"/>
+            <a:ext cx="10241280" cy="1188720"/>
           </a:xfrm>
           <a:prstGeom prst="rect">
             <a:avLst/>
@@ -2706,9 +3283,9 @@
               <a:buNone/>
             </a:pPr>
             <a:r>
-              <a:rPr lang="en-US" sz="2200" i="1" dirty="0">
-                <a:solidFill>
-                  <a:srgbClr val="141619"/>
+              <a:rPr lang="en-US" sz="1800" i="1" dirty="0">
+                <a:solidFill>
+                  <a:srgbClr val="D6360F"/>
                 </a:solidFill>
                 <a:latin typeface="Cambria" pitchFamily="34" charset="0"/>
                 <a:ea typeface="Cambria" pitchFamily="34" charset="-122"/>
@@ -2716,7 +3293,7 @@
               </a:rPr>
               <a:t>Yoxlanılmamış süni intellektdən gələn səhv “sizdə X var” təhlükəlidir.</a:t>
             </a:r>
-            <a:endParaRPr lang="en-US" sz="2200" dirty="0"/>
+            <a:endParaRPr lang="en-US" sz="1800" dirty="0"/>
           </a:p>
           <a:p>
             <a:pPr indent="0" marL="0">
@@ -2726,9 +3303,9 @@
               <a:buNone/>
             </a:pPr>
             <a:r>
-              <a:rPr lang="en-US" sz="2200" i="1" dirty="0">
-                <a:solidFill>
-                  <a:srgbClr val="141619"/>
+              <a:rPr lang="en-US" sz="1800" i="1" dirty="0">
+                <a:solidFill>
+                  <a:srgbClr val="D6360F"/>
                 </a:solidFill>
                 <a:latin typeface="Cambria" pitchFamily="34" charset="0"/>
                 <a:ea typeface="Cambria" pitchFamily="34" charset="-122"/>
@@ -2736,13 +3313,13 @@
               </a:rPr>
               <a:t>“Təkrar dinləməyə dəyər” isə doğrudur — və faydalıdır.</a:t>
             </a:r>
-            <a:endParaRPr lang="en-US" sz="2200" dirty="0"/>
-          </a:p>
-        </p:txBody>
-      </p:sp>
-      <p:sp>
-        <p:nvSpPr>
-          <p:cNvPr id="11" name="Text 9"/>
+            <a:endParaRPr lang="en-US" sz="1800" dirty="0"/>
+          </a:p>
+        </p:txBody>
+      </p:sp>
+      <p:sp>
+        <p:nvSpPr>
+          <p:cNvPr id="12" name="Text 10"/>
           <p:cNvSpPr/>
           <p:nvPr/>
         </p:nvSpPr>
@@ -2781,7 +3358,7 @@
       </p:sp>
       <p:sp>
         <p:nvSpPr>
-          <p:cNvPr id="12" name="Text 10"/>
+          <p:cNvPr id="13" name="Text 11"/>
           <p:cNvSpPr/>
           <p:nvPr/>
         </p:nvSpPr>
@@ -2865,7 +3442,7 @@
         </p:nvSpPr>
         <p:spPr>
           <a:xfrm>
-            <a:off x="868680" y="548640"/>
+            <a:off x="868680" y="640080"/>
             <a:ext cx="5486400" cy="292608"/>
           </a:xfrm>
           <a:prstGeom prst="rect">
@@ -2890,7 +3467,7 @@
                 <a:ea typeface="Courier New" pitchFamily="34" charset="-122"/>
                 <a:cs typeface="Courier New" pitchFamily="34" charset="-120"/>
               </a:rPr>
-              <a:t>CANLI DEMO</a:t>
+              <a:t>NECƏ IŞLƏYIR</a:t>
             </a:r>
             <a:endParaRPr lang="en-US" sz="1200" dirty="0"/>
           </a:p>
@@ -2904,24 +3481,24 @@
         </p:nvSpPr>
         <p:spPr>
           <a:xfrm>
-            <a:off x="868680" y="914400"/>
-            <a:ext cx="8686800" cy="1188720"/>
-          </a:xfrm>
-          <a:prstGeom prst="rect">
-            <a:avLst/>
-          </a:prstGeom>
-          <a:noFill/>
-          <a:ln/>
-        </p:spPr>
-        <p:txBody>
-          <a:bodyPr wrap="square" lIns="0" tIns="0" rIns="0" bIns="0" rtlCol="0" anchor="ctr"/>
-          <a:lstStyle/>
-          <a:p>
-            <a:pPr indent="0" marL="0">
-              <a:buNone/>
-            </a:pPr>
-            <a:r>
-              <a:rPr lang="en-US" sz="3000" dirty="0">
+            <a:off x="868680" y="1005840"/>
+            <a:ext cx="9601200" cy="914400"/>
+          </a:xfrm>
+          <a:prstGeom prst="rect">
+            <a:avLst/>
+          </a:prstGeom>
+          <a:noFill/>
+          <a:ln/>
+        </p:spPr>
+        <p:txBody>
+          <a:bodyPr wrap="square" lIns="0" tIns="0" rIns="0" bIns="0" rtlCol="0" anchor="ctr"/>
+          <a:lstStyle/>
+          <a:p>
+            <a:pPr indent="0" marL="0">
+              <a:buNone/>
+            </a:pPr>
+            <a:r>
+              <a:rPr lang="en-US" sz="3400" dirty="0">
                 <a:solidFill>
                   <a:srgbClr val="141619"/>
                 </a:solidFill>
@@ -2929,26 +3506,9 @@
                 <a:ea typeface="Cambria" pitchFamily="34" charset="-122"/>
                 <a:cs typeface="Cambria" pitchFamily="34" charset="-120"/>
               </a:rPr>
-              <a:t>Telefonun mikrofonu → canlı</a:t>
-            </a:r>
-            <a:endParaRPr lang="en-US" sz="3000" dirty="0"/>
-          </a:p>
-          <a:p>
-            <a:pPr indent="0" marL="0">
-              <a:buNone/>
-            </a:pPr>
-            <a:r>
-              <a:rPr lang="en-US" sz="3000" dirty="0">
-                <a:solidFill>
-                  <a:srgbClr val="141619"/>
-                </a:solidFill>
-                <a:latin typeface="Cambria" pitchFamily="34" charset="0"/>
-                <a:ea typeface="Cambria" pitchFamily="34" charset="-122"/>
-                <a:cs typeface="Cambria" pitchFamily="34" charset="-120"/>
-              </a:rPr>
-              <a:t>qiymətləndirmə, indi.</a:t>
-            </a:r>
-            <a:endParaRPr lang="en-US" sz="3000" dirty="0"/>
+              <a:t>Dörd addım. Təxmin yox.</a:t>
+            </a:r>
+            <a:endParaRPr lang="en-US" sz="3400" dirty="0"/>
           </a:p>
         </p:txBody>
       </p:sp>
@@ -2960,57 +3520,8 @@
         </p:nvSpPr>
         <p:spPr>
           <a:xfrm>
-            <a:off x="868680" y="2148840"/>
-            <a:ext cx="10469880" cy="2103120"/>
-          </a:xfrm>
-          <a:prstGeom prst="rect">
-            <a:avLst/>
-          </a:prstGeom>
-          <a:solidFill>
-            <a:srgbClr val="F4F4F1"/>
-          </a:solidFill>
-          <a:ln w="12700">
-            <a:solidFill>
-              <a:srgbClr val="DCDBD5"/>
-            </a:solidFill>
-            <a:prstDash val="solid"/>
-          </a:ln>
-        </p:spPr>
-      </p:sp>
-      <p:pic>
-        <p:nvPicPr>
-          <p:cNvPr id="5" name="Image 0" descr="waveform.png">    </p:cNvPr>
-          <p:cNvPicPr>
-            <a:picLocks noChangeAspect="1"/>
-          </p:cNvPicPr>
-          <p:nvPr/>
-        </p:nvPicPr>
-        <p:blipFill>
-          <a:blip r:embed="rId2"/>
-          <a:stretch>
-            <a:fillRect/>
-          </a:stretch>
-        </p:blipFill>
-        <p:spPr>
-          <a:xfrm>
-            <a:off x="1097280" y="2286000"/>
-            <a:ext cx="10012680" cy="1828800"/>
-          </a:xfrm>
-          <a:prstGeom prst="rect">
-            <a:avLst/>
-          </a:prstGeom>
-        </p:spPr>
-      </p:pic>
-      <p:sp>
-        <p:nvSpPr>
-          <p:cNvPr id="6" name="Shape 3"/>
-          <p:cNvSpPr/>
-          <p:nvPr/>
-        </p:nvSpPr>
-        <p:spPr>
-          <a:xfrm>
-            <a:off x="868680" y="4343400"/>
-            <a:ext cx="2507742" cy="960120"/>
+            <a:off x="868680" y="2514600"/>
+            <a:ext cx="2542032" cy="2880360"/>
           </a:xfrm>
           <a:prstGeom prst="rect">
             <a:avLst/>
@@ -3020,7 +3531,7 @@
           </a:solidFill>
           <a:ln w="12700">
             <a:solidFill>
-              <a:srgbClr val="DCDBD5"/>
+              <a:srgbClr val="C3C2BA"/>
             </a:solidFill>
             <a:prstDash val="solid"/>
           </a:ln>
@@ -3028,92 +3539,134 @@
       </p:sp>
       <p:sp>
         <p:nvSpPr>
-          <p:cNvPr id="7" name="Text 4"/>
-          <p:cNvSpPr/>
-          <p:nvPr/>
-        </p:nvSpPr>
-        <p:spPr>
-          <a:xfrm>
-            <a:off x="1014984" y="4471416"/>
-            <a:ext cx="2251710" cy="256032"/>
-          </a:xfrm>
-          <a:prstGeom prst="rect">
-            <a:avLst/>
-          </a:prstGeom>
-          <a:noFill/>
-          <a:ln/>
-        </p:spPr>
-        <p:txBody>
-          <a:bodyPr wrap="square" lIns="0" tIns="0" rIns="0" bIns="0" rtlCol="0" anchor="ctr"/>
-          <a:lstStyle/>
-          <a:p>
-            <a:pPr indent="0" marL="0">
-              <a:buNone/>
-            </a:pPr>
-            <a:r>
-              <a:rPr lang="en-US" sz="950" b="1" spc="100" kern="0" dirty="0">
-                <a:solidFill>
-                  <a:srgbClr val="8E939A"/>
+          <p:cNvPr id="5" name="Text 3"/>
+          <p:cNvSpPr/>
+          <p:nvPr/>
+        </p:nvSpPr>
+        <p:spPr>
+          <a:xfrm>
+            <a:off x="1069848" y="2715768"/>
+            <a:ext cx="2139696" cy="320040"/>
+          </a:xfrm>
+          <a:prstGeom prst="rect">
+            <a:avLst/>
+          </a:prstGeom>
+          <a:noFill/>
+          <a:ln/>
+        </p:spPr>
+        <p:txBody>
+          <a:bodyPr wrap="square" lIns="0" tIns="0" rIns="0" bIns="0" rtlCol="0" anchor="ctr"/>
+          <a:lstStyle/>
+          <a:p>
+            <a:pPr indent="0" marL="0">
+              <a:buNone/>
+            </a:pPr>
+            <a:r>
+              <a:rPr lang="en-US" sz="1500" b="1" dirty="0">
+                <a:solidFill>
+                  <a:srgbClr val="D6360F"/>
                 </a:solidFill>
                 <a:latin typeface="Courier New" pitchFamily="34" charset="0"/>
                 <a:ea typeface="Courier New" pitchFamily="34" charset="-122"/>
                 <a:cs typeface="Courier New" pitchFamily="34" charset="-120"/>
               </a:rPr>
-              <a:t>ÜRƏK TEZLIYI</a:t>
-            </a:r>
-            <a:endParaRPr lang="en-US" sz="950" dirty="0"/>
-          </a:p>
-        </p:txBody>
-      </p:sp>
-      <p:sp>
-        <p:nvSpPr>
-          <p:cNvPr id="8" name="Text 5"/>
-          <p:cNvSpPr/>
-          <p:nvPr/>
-        </p:nvSpPr>
-        <p:spPr>
-          <a:xfrm>
-            <a:off x="1014984" y="4727448"/>
-            <a:ext cx="2251710" cy="457200"/>
-          </a:xfrm>
-          <a:prstGeom prst="rect">
-            <a:avLst/>
-          </a:prstGeom>
-          <a:noFill/>
-          <a:ln/>
-        </p:spPr>
-        <p:txBody>
-          <a:bodyPr wrap="square" lIns="0" tIns="0" rIns="0" bIns="0" rtlCol="0" anchor="ctr"/>
-          <a:lstStyle/>
-          <a:p>
-            <a:pPr indent="0" marL="0">
-              <a:buNone/>
-            </a:pPr>
-            <a:r>
-              <a:rPr lang="en-US" sz="1900" b="1" dirty="0">
+              <a:t>01</a:t>
+            </a:r>
+            <a:endParaRPr lang="en-US" sz="1500" dirty="0"/>
+          </a:p>
+        </p:txBody>
+      </p:sp>
+      <p:sp>
+        <p:nvSpPr>
+          <p:cNvPr id="6" name="Text 4"/>
+          <p:cNvSpPr/>
+          <p:nvPr/>
+        </p:nvSpPr>
+        <p:spPr>
+          <a:xfrm>
+            <a:off x="1069848" y="3063240"/>
+            <a:ext cx="2139696" cy="457200"/>
+          </a:xfrm>
+          <a:prstGeom prst="rect">
+            <a:avLst/>
+          </a:prstGeom>
+          <a:noFill/>
+          <a:ln/>
+        </p:spPr>
+        <p:txBody>
+          <a:bodyPr wrap="square" lIns="0" tIns="0" rIns="0" bIns="0" rtlCol="0" anchor="ctr"/>
+          <a:lstStyle/>
+          <a:p>
+            <a:pPr indent="0" marL="0">
+              <a:buNone/>
+            </a:pPr>
+            <a:r>
+              <a:rPr lang="en-US" sz="2200" dirty="0">
                 <a:solidFill>
                   <a:srgbClr val="141619"/>
                 </a:solidFill>
-                <a:latin typeface="Courier New" pitchFamily="34" charset="0"/>
-                <a:ea typeface="Courier New" pitchFamily="34" charset="-122"/>
-                <a:cs typeface="Courier New" pitchFamily="34" charset="-120"/>
-              </a:rPr>
-              <a:t>68 BPM</a:t>
-            </a:r>
-            <a:endParaRPr lang="en-US" sz="1900" dirty="0"/>
-          </a:p>
-        </p:txBody>
-      </p:sp>
-      <p:sp>
-        <p:nvSpPr>
-          <p:cNvPr id="9" name="Shape 6"/>
-          <p:cNvSpPr/>
-          <p:nvPr/>
-        </p:nvSpPr>
-        <p:spPr>
-          <a:xfrm>
-            <a:off x="3486150" y="4343400"/>
-            <a:ext cx="2507742" cy="960120"/>
+                <a:latin typeface="Cambria" pitchFamily="34" charset="0"/>
+                <a:ea typeface="Cambria" pitchFamily="34" charset="-122"/>
+                <a:cs typeface="Cambria" pitchFamily="34" charset="-120"/>
+              </a:rPr>
+              <a:t>Dinlə</a:t>
+            </a:r>
+            <a:endParaRPr lang="en-US" sz="2200" dirty="0"/>
+          </a:p>
+        </p:txBody>
+      </p:sp>
+      <p:sp>
+        <p:nvSpPr>
+          <p:cNvPr id="7" name="Text 5"/>
+          <p:cNvSpPr/>
+          <p:nvPr/>
+        </p:nvSpPr>
+        <p:spPr>
+          <a:xfrm>
+            <a:off x="1069848" y="3566160"/>
+            <a:ext cx="2139696" cy="1645920"/>
+          </a:xfrm>
+          <a:prstGeom prst="rect">
+            <a:avLst/>
+          </a:prstGeom>
+          <a:noFill/>
+          <a:ln/>
+        </p:spPr>
+        <p:txBody>
+          <a:bodyPr wrap="square" lIns="0" tIns="0" rIns="0" bIns="0" rtlCol="0" anchor="t"/>
+          <a:lstStyle/>
+          <a:p>
+            <a:pPr indent="0" marL="0">
+              <a:lnSpc>
+                <a:spcPct val="130000"/>
+              </a:lnSpc>
+              <a:buNone/>
+            </a:pPr>
+            <a:r>
+              <a:rPr lang="en-US" sz="1150" dirty="0">
+                <a:solidFill>
+                  <a:srgbClr val="5B6068"/>
+                </a:solidFill>
+                <a:latin typeface="Calibri" pitchFamily="34" charset="0"/>
+                <a:ea typeface="Calibri" pitchFamily="34" charset="-122"/>
+                <a:cs typeface="Calibri" pitchFamily="34" charset="-120"/>
+              </a:rPr>
+              <a:t>Sinəyə tutulan ucuz mikrofon ürək döyüntüsünü tutur — stetoskopla eyni fikir, qat-qat ucuz qiymətə.</a:t>
+            </a:r>
+            <a:endParaRPr lang="en-US" sz="1150" dirty="0"/>
+          </a:p>
+        </p:txBody>
+      </p:sp>
+      <p:sp>
+        <p:nvSpPr>
+          <p:cNvPr id="8" name="Shape 6"/>
+          <p:cNvSpPr/>
+          <p:nvPr/>
+        </p:nvSpPr>
+        <p:spPr>
+          <a:xfrm>
+            <a:off x="3579876" y="2514600"/>
+            <a:ext cx="2542032" cy="2880360"/>
           </a:xfrm>
           <a:prstGeom prst="rect">
             <a:avLst/>
@@ -3123,7 +3676,7 @@
           </a:solidFill>
           <a:ln w="12700">
             <a:solidFill>
-              <a:srgbClr val="DCDBD5"/>
+              <a:srgbClr val="C3C2BA"/>
             </a:solidFill>
             <a:prstDash val="solid"/>
           </a:ln>
@@ -3131,92 +3684,134 @@
       </p:sp>
       <p:sp>
         <p:nvSpPr>
-          <p:cNvPr id="10" name="Text 7"/>
-          <p:cNvSpPr/>
-          <p:nvPr/>
-        </p:nvSpPr>
-        <p:spPr>
-          <a:xfrm>
-            <a:off x="3632454" y="4471416"/>
-            <a:ext cx="2251710" cy="256032"/>
-          </a:xfrm>
-          <a:prstGeom prst="rect">
-            <a:avLst/>
-          </a:prstGeom>
-          <a:noFill/>
-          <a:ln/>
-        </p:spPr>
-        <p:txBody>
-          <a:bodyPr wrap="square" lIns="0" tIns="0" rIns="0" bIns="0" rtlCol="0" anchor="ctr"/>
-          <a:lstStyle/>
-          <a:p>
-            <a:pPr indent="0" marL="0">
-              <a:buNone/>
-            </a:pPr>
-            <a:r>
-              <a:rPr lang="en-US" sz="950" b="1" spc="100" kern="0" dirty="0">
-                <a:solidFill>
-                  <a:srgbClr val="8E939A"/>
+          <p:cNvPr id="9" name="Text 7"/>
+          <p:cNvSpPr/>
+          <p:nvPr/>
+        </p:nvSpPr>
+        <p:spPr>
+          <a:xfrm>
+            <a:off x="3781044" y="2715768"/>
+            <a:ext cx="2139696" cy="320040"/>
+          </a:xfrm>
+          <a:prstGeom prst="rect">
+            <a:avLst/>
+          </a:prstGeom>
+          <a:noFill/>
+          <a:ln/>
+        </p:spPr>
+        <p:txBody>
+          <a:bodyPr wrap="square" lIns="0" tIns="0" rIns="0" bIns="0" rtlCol="0" anchor="ctr"/>
+          <a:lstStyle/>
+          <a:p>
+            <a:pPr indent="0" marL="0">
+              <a:buNone/>
+            </a:pPr>
+            <a:r>
+              <a:rPr lang="en-US" sz="1500" b="1" dirty="0">
+                <a:solidFill>
+                  <a:srgbClr val="D6360F"/>
                 </a:solidFill>
                 <a:latin typeface="Courier New" pitchFamily="34" charset="0"/>
                 <a:ea typeface="Courier New" pitchFamily="34" charset="-122"/>
                 <a:cs typeface="Courier New" pitchFamily="34" charset="-120"/>
               </a:rPr>
-              <a:t>AŞKARLANAN VURĞU</a:t>
-            </a:r>
-            <a:endParaRPr lang="en-US" sz="950" dirty="0"/>
-          </a:p>
-        </p:txBody>
-      </p:sp>
-      <p:sp>
-        <p:nvSpPr>
-          <p:cNvPr id="11" name="Text 8"/>
-          <p:cNvSpPr/>
-          <p:nvPr/>
-        </p:nvSpPr>
-        <p:spPr>
-          <a:xfrm>
-            <a:off x="3632454" y="4727448"/>
-            <a:ext cx="2251710" cy="457200"/>
-          </a:xfrm>
-          <a:prstGeom prst="rect">
-            <a:avLst/>
-          </a:prstGeom>
-          <a:noFill/>
-          <a:ln/>
-        </p:spPr>
-        <p:txBody>
-          <a:bodyPr wrap="square" lIns="0" tIns="0" rIns="0" bIns="0" rtlCol="0" anchor="ctr"/>
-          <a:lstStyle/>
-          <a:p>
-            <a:pPr indent="0" marL="0">
-              <a:buNone/>
-            </a:pPr>
-            <a:r>
-              <a:rPr lang="en-US" sz="1900" b="1" dirty="0">
+              <a:t>02</a:t>
+            </a:r>
+            <a:endParaRPr lang="en-US" sz="1500" dirty="0"/>
+          </a:p>
+        </p:txBody>
+      </p:sp>
+      <p:sp>
+        <p:nvSpPr>
+          <p:cNvPr id="10" name="Text 8"/>
+          <p:cNvSpPr/>
+          <p:nvPr/>
+        </p:nvSpPr>
+        <p:spPr>
+          <a:xfrm>
+            <a:off x="3781044" y="3063240"/>
+            <a:ext cx="2139696" cy="457200"/>
+          </a:xfrm>
+          <a:prstGeom prst="rect">
+            <a:avLst/>
+          </a:prstGeom>
+          <a:noFill/>
+          <a:ln/>
+        </p:spPr>
+        <p:txBody>
+          <a:bodyPr wrap="square" lIns="0" tIns="0" rIns="0" bIns="0" rtlCol="0" anchor="ctr"/>
+          <a:lstStyle/>
+          <a:p>
+            <a:pPr indent="0" marL="0">
+              <a:buNone/>
+            </a:pPr>
+            <a:r>
+              <a:rPr lang="en-US" sz="2200" dirty="0">
                 <a:solidFill>
                   <a:srgbClr val="141619"/>
                 </a:solidFill>
-                <a:latin typeface="Courier New" pitchFamily="34" charset="0"/>
-                <a:ea typeface="Courier New" pitchFamily="34" charset="-122"/>
-                <a:cs typeface="Courier New" pitchFamily="34" charset="-120"/>
-              </a:rPr>
-              <a:t>8</a:t>
-            </a:r>
-            <a:endParaRPr lang="en-US" sz="1900" dirty="0"/>
-          </a:p>
-        </p:txBody>
-      </p:sp>
-      <p:sp>
-        <p:nvSpPr>
-          <p:cNvPr id="12" name="Shape 9"/>
-          <p:cNvSpPr/>
-          <p:nvPr/>
-        </p:nvSpPr>
-        <p:spPr>
-          <a:xfrm>
-            <a:off x="6103620" y="4343400"/>
-            <a:ext cx="2507742" cy="960120"/>
+                <a:latin typeface="Cambria" pitchFamily="34" charset="0"/>
+                <a:ea typeface="Cambria" pitchFamily="34" charset="-122"/>
+                <a:cs typeface="Cambria" pitchFamily="34" charset="-120"/>
+              </a:rPr>
+              <a:t>Təmizlə</a:t>
+            </a:r>
+            <a:endParaRPr lang="en-US" sz="2200" dirty="0"/>
+          </a:p>
+        </p:txBody>
+      </p:sp>
+      <p:sp>
+        <p:nvSpPr>
+          <p:cNvPr id="11" name="Text 9"/>
+          <p:cNvSpPr/>
+          <p:nvPr/>
+        </p:nvSpPr>
+        <p:spPr>
+          <a:xfrm>
+            <a:off x="3781044" y="3566160"/>
+            <a:ext cx="2139696" cy="1645920"/>
+          </a:xfrm>
+          <a:prstGeom prst="rect">
+            <a:avLst/>
+          </a:prstGeom>
+          <a:noFill/>
+          <a:ln/>
+        </p:spPr>
+        <p:txBody>
+          <a:bodyPr wrap="square" lIns="0" tIns="0" rIns="0" bIns="0" rtlCol="0" anchor="t"/>
+          <a:lstStyle/>
+          <a:p>
+            <a:pPr indent="0" marL="0">
+              <a:lnSpc>
+                <a:spcPct val="130000"/>
+              </a:lnSpc>
+              <a:buNone/>
+            </a:pPr>
+            <a:r>
+              <a:rPr lang="en-US" sz="1150" dirty="0">
+                <a:solidFill>
+                  <a:srgbClr val="5B6068"/>
+                </a:solidFill>
+                <a:latin typeface="Calibri" pitchFamily="34" charset="0"/>
+                <a:ea typeface="Calibri" pitchFamily="34" charset="-122"/>
+                <a:cs typeface="Calibri" pitchFamily="34" charset="-120"/>
+              </a:rPr>
+              <a:t>Fon küyü avtomatik süzülür, yalnız ürək səsi qalır.</a:t>
+            </a:r>
+            <a:endParaRPr lang="en-US" sz="1150" dirty="0"/>
+          </a:p>
+        </p:txBody>
+      </p:sp>
+      <p:sp>
+        <p:nvSpPr>
+          <p:cNvPr id="12" name="Shape 10"/>
+          <p:cNvSpPr/>
+          <p:nvPr/>
+        </p:nvSpPr>
+        <p:spPr>
+          <a:xfrm>
+            <a:off x="6291072" y="2514600"/>
+            <a:ext cx="2542032" cy="2880360"/>
           </a:xfrm>
           <a:prstGeom prst="rect">
             <a:avLst/>
@@ -3226,7 +3821,7 @@
           </a:solidFill>
           <a:ln w="12700">
             <a:solidFill>
-              <a:srgbClr val="DCDBD5"/>
+              <a:srgbClr val="C3C2BA"/>
             </a:solidFill>
             <a:prstDash val="solid"/>
           </a:ln>
@@ -3234,92 +3829,134 @@
       </p:sp>
       <p:sp>
         <p:nvSpPr>
-          <p:cNvPr id="13" name="Text 10"/>
-          <p:cNvSpPr/>
-          <p:nvPr/>
-        </p:nvSpPr>
-        <p:spPr>
-          <a:xfrm>
-            <a:off x="6249924" y="4471416"/>
-            <a:ext cx="2251710" cy="256032"/>
-          </a:xfrm>
-          <a:prstGeom prst="rect">
-            <a:avLst/>
-          </a:prstGeom>
-          <a:noFill/>
-          <a:ln/>
-        </p:spPr>
-        <p:txBody>
-          <a:bodyPr wrap="square" lIns="0" tIns="0" rIns="0" bIns="0" rtlCol="0" anchor="ctr"/>
-          <a:lstStyle/>
-          <a:p>
-            <a:pPr indent="0" marL="0">
-              <a:buNone/>
-            </a:pPr>
-            <a:r>
-              <a:rPr lang="en-US" sz="950" b="1" spc="100" kern="0" dirty="0">
-                <a:solidFill>
-                  <a:srgbClr val="8E939A"/>
+          <p:cNvPr id="13" name="Text 11"/>
+          <p:cNvSpPr/>
+          <p:nvPr/>
+        </p:nvSpPr>
+        <p:spPr>
+          <a:xfrm>
+            <a:off x="6492240" y="2715768"/>
+            <a:ext cx="2139696" cy="320040"/>
+          </a:xfrm>
+          <a:prstGeom prst="rect">
+            <a:avLst/>
+          </a:prstGeom>
+          <a:noFill/>
+          <a:ln/>
+        </p:spPr>
+        <p:txBody>
+          <a:bodyPr wrap="square" lIns="0" tIns="0" rIns="0" bIns="0" rtlCol="0" anchor="ctr"/>
+          <a:lstStyle/>
+          <a:p>
+            <a:pPr indent="0" marL="0">
+              <a:buNone/>
+            </a:pPr>
+            <a:r>
+              <a:rPr lang="en-US" sz="1500" b="1" dirty="0">
+                <a:solidFill>
+                  <a:srgbClr val="D6360F"/>
                 </a:solidFill>
                 <a:latin typeface="Courier New" pitchFamily="34" charset="0"/>
                 <a:ea typeface="Courier New" pitchFamily="34" charset="-122"/>
                 <a:cs typeface="Courier New" pitchFamily="34" charset="-120"/>
               </a:rPr>
-              <a:t>RITM</a:t>
-            </a:r>
-            <a:endParaRPr lang="en-US" sz="950" dirty="0"/>
-          </a:p>
-        </p:txBody>
-      </p:sp>
-      <p:sp>
-        <p:nvSpPr>
-          <p:cNvPr id="14" name="Text 11"/>
-          <p:cNvSpPr/>
-          <p:nvPr/>
-        </p:nvSpPr>
-        <p:spPr>
-          <a:xfrm>
-            <a:off x="6249924" y="4727448"/>
-            <a:ext cx="2251710" cy="457200"/>
-          </a:xfrm>
-          <a:prstGeom prst="rect">
-            <a:avLst/>
-          </a:prstGeom>
-          <a:noFill/>
-          <a:ln/>
-        </p:spPr>
-        <p:txBody>
-          <a:bodyPr wrap="square" lIns="0" tIns="0" rIns="0" bIns="0" rtlCol="0" anchor="ctr"/>
-          <a:lstStyle/>
-          <a:p>
-            <a:pPr indent="0" marL="0">
-              <a:buNone/>
-            </a:pPr>
-            <a:r>
-              <a:rPr lang="en-US" sz="1900" b="1" dirty="0">
+              <a:t>03</a:t>
+            </a:r>
+            <a:endParaRPr lang="en-US" sz="1500" dirty="0"/>
+          </a:p>
+        </p:txBody>
+      </p:sp>
+      <p:sp>
+        <p:nvSpPr>
+          <p:cNvPr id="14" name="Text 12"/>
+          <p:cNvSpPr/>
+          <p:nvPr/>
+        </p:nvSpPr>
+        <p:spPr>
+          <a:xfrm>
+            <a:off x="6492240" y="3063240"/>
+            <a:ext cx="2139696" cy="457200"/>
+          </a:xfrm>
+          <a:prstGeom prst="rect">
+            <a:avLst/>
+          </a:prstGeom>
+          <a:noFill/>
+          <a:ln/>
+        </p:spPr>
+        <p:txBody>
+          <a:bodyPr wrap="square" lIns="0" tIns="0" rIns="0" bIns="0" rtlCol="0" anchor="ctr"/>
+          <a:lstStyle/>
+          <a:p>
+            <a:pPr indent="0" marL="0">
+              <a:buNone/>
+            </a:pPr>
+            <a:r>
+              <a:rPr lang="en-US" sz="2200" dirty="0">
                 <a:solidFill>
                   <a:srgbClr val="141619"/>
                 </a:solidFill>
-                <a:latin typeface="Courier New" pitchFamily="34" charset="0"/>
-                <a:ea typeface="Courier New" pitchFamily="34" charset="-122"/>
-                <a:cs typeface="Courier New" pitchFamily="34" charset="-120"/>
-              </a:rPr>
-              <a:t>Müntəzəm</a:t>
-            </a:r>
-            <a:endParaRPr lang="en-US" sz="1900" dirty="0"/>
-          </a:p>
-        </p:txBody>
-      </p:sp>
-      <p:sp>
-        <p:nvSpPr>
-          <p:cNvPr id="15" name="Shape 12"/>
-          <p:cNvSpPr/>
-          <p:nvPr/>
-        </p:nvSpPr>
-        <p:spPr>
-          <a:xfrm>
-            <a:off x="8721090" y="4343400"/>
-            <a:ext cx="2507742" cy="960120"/>
+                <a:latin typeface="Cambria" pitchFamily="34" charset="0"/>
+                <a:ea typeface="Cambria" pitchFamily="34" charset="-122"/>
+                <a:cs typeface="Cambria" pitchFamily="34" charset="-120"/>
+              </a:rPr>
+              <a:t>Tap</a:t>
+            </a:r>
+            <a:endParaRPr lang="en-US" sz="2200" dirty="0"/>
+          </a:p>
+        </p:txBody>
+      </p:sp>
+      <p:sp>
+        <p:nvSpPr>
+          <p:cNvPr id="15" name="Text 13"/>
+          <p:cNvSpPr/>
+          <p:nvPr/>
+        </p:nvSpPr>
+        <p:spPr>
+          <a:xfrm>
+            <a:off x="6492240" y="3566160"/>
+            <a:ext cx="2139696" cy="1645920"/>
+          </a:xfrm>
+          <a:prstGeom prst="rect">
+            <a:avLst/>
+          </a:prstGeom>
+          <a:noFill/>
+          <a:ln/>
+        </p:spPr>
+        <p:txBody>
+          <a:bodyPr wrap="square" lIns="0" tIns="0" rIns="0" bIns="0" rtlCol="0" anchor="t"/>
+          <a:lstStyle/>
+          <a:p>
+            <a:pPr indent="0" marL="0">
+              <a:lnSpc>
+                <a:spcPct val="130000"/>
+              </a:lnSpc>
+              <a:buNone/>
+            </a:pPr>
+            <a:r>
+              <a:rPr lang="en-US" sz="1150" dirty="0">
+                <a:solidFill>
+                  <a:srgbClr val="5B6068"/>
+                </a:solidFill>
+                <a:latin typeface="Calibri" pitchFamily="34" charset="0"/>
+                <a:ea typeface="Calibri" pitchFamily="34" charset="-122"/>
+                <a:cs typeface="Calibri" pitchFamily="34" charset="-120"/>
+              </a:rPr>
+              <a:t>Hər döyüntünü zamanlamasına görə tapır — əmin olmadıqda bunu dürüstcə bildirir, təxmin etmək əvəzinə.</a:t>
+            </a:r>
+            <a:endParaRPr lang="en-US" sz="1150" dirty="0"/>
+          </a:p>
+        </p:txBody>
+      </p:sp>
+      <p:sp>
+        <p:nvSpPr>
+          <p:cNvPr id="16" name="Shape 14"/>
+          <p:cNvSpPr/>
+          <p:nvPr/>
+        </p:nvSpPr>
+        <p:spPr>
+          <a:xfrm>
+            <a:off x="9002268" y="2514600"/>
+            <a:ext cx="2542032" cy="2880360"/>
           </a:xfrm>
           <a:prstGeom prst="rect">
             <a:avLst/>
@@ -3329,7 +3966,7 @@
           </a:solidFill>
           <a:ln w="12700">
             <a:solidFill>
-              <a:srgbClr val="DCDBD5"/>
+              <a:srgbClr val="C3C2BA"/>
             </a:solidFill>
             <a:prstDash val="solid"/>
           </a:ln>
@@ -3337,115 +3974,157 @@
       </p:sp>
       <p:sp>
         <p:nvSpPr>
-          <p:cNvPr id="16" name="Text 13"/>
-          <p:cNvSpPr/>
-          <p:nvPr/>
-        </p:nvSpPr>
-        <p:spPr>
-          <a:xfrm>
-            <a:off x="8867394" y="4471416"/>
-            <a:ext cx="2251710" cy="256032"/>
-          </a:xfrm>
-          <a:prstGeom prst="rect">
-            <a:avLst/>
-          </a:prstGeom>
-          <a:noFill/>
-          <a:ln/>
-        </p:spPr>
-        <p:txBody>
-          <a:bodyPr wrap="square" lIns="0" tIns="0" rIns="0" bIns="0" rtlCol="0" anchor="ctr"/>
-          <a:lstStyle/>
-          <a:p>
-            <a:pPr indent="0" marL="0">
-              <a:buNone/>
-            </a:pPr>
-            <a:r>
-              <a:rPr lang="en-US" sz="950" b="1" spc="100" kern="0" dirty="0">
-                <a:solidFill>
-                  <a:srgbClr val="8E939A"/>
+          <p:cNvPr id="17" name="Text 15"/>
+          <p:cNvSpPr/>
+          <p:nvPr/>
+        </p:nvSpPr>
+        <p:spPr>
+          <a:xfrm>
+            <a:off x="9203436" y="2715768"/>
+            <a:ext cx="2139696" cy="320040"/>
+          </a:xfrm>
+          <a:prstGeom prst="rect">
+            <a:avLst/>
+          </a:prstGeom>
+          <a:noFill/>
+          <a:ln/>
+        </p:spPr>
+        <p:txBody>
+          <a:bodyPr wrap="square" lIns="0" tIns="0" rIns="0" bIns="0" rtlCol="0" anchor="ctr"/>
+          <a:lstStyle/>
+          <a:p>
+            <a:pPr indent="0" marL="0">
+              <a:buNone/>
+            </a:pPr>
+            <a:r>
+              <a:rPr lang="en-US" sz="1500" b="1" dirty="0">
+                <a:solidFill>
+                  <a:srgbClr val="D6360F"/>
                 </a:solidFill>
                 <a:latin typeface="Courier New" pitchFamily="34" charset="0"/>
                 <a:ea typeface="Courier New" pitchFamily="34" charset="-122"/>
                 <a:cs typeface="Courier New" pitchFamily="34" charset="-120"/>
               </a:rPr>
-              <a:t>NƏTICƏ</a:t>
-            </a:r>
-            <a:endParaRPr lang="en-US" sz="950" dirty="0"/>
-          </a:p>
-        </p:txBody>
-      </p:sp>
-      <p:sp>
-        <p:nvSpPr>
-          <p:cNvPr id="17" name="Text 14"/>
-          <p:cNvSpPr/>
-          <p:nvPr/>
-        </p:nvSpPr>
-        <p:spPr>
-          <a:xfrm>
-            <a:off x="8867394" y="4727448"/>
-            <a:ext cx="2251710" cy="457200"/>
-          </a:xfrm>
-          <a:prstGeom prst="rect">
-            <a:avLst/>
-          </a:prstGeom>
-          <a:noFill/>
-          <a:ln/>
-        </p:spPr>
-        <p:txBody>
-          <a:bodyPr wrap="square" lIns="0" tIns="0" rIns="0" bIns="0" rtlCol="0" anchor="ctr"/>
-          <a:lstStyle/>
-          <a:p>
-            <a:pPr indent="0" marL="0">
-              <a:buNone/>
-            </a:pPr>
-            <a:r>
-              <a:rPr lang="en-US" sz="1900" b="1" dirty="0">
-                <a:solidFill>
-                  <a:srgbClr val="D6360F"/>
+              <a:t>04</a:t>
+            </a:r>
+            <a:endParaRPr lang="en-US" sz="1500" dirty="0"/>
+          </a:p>
+        </p:txBody>
+      </p:sp>
+      <p:sp>
+        <p:nvSpPr>
+          <p:cNvPr id="18" name="Text 16"/>
+          <p:cNvSpPr/>
+          <p:nvPr/>
+        </p:nvSpPr>
+        <p:spPr>
+          <a:xfrm>
+            <a:off x="9203436" y="3063240"/>
+            <a:ext cx="2139696" cy="457200"/>
+          </a:xfrm>
+          <a:prstGeom prst="rect">
+            <a:avLst/>
+          </a:prstGeom>
+          <a:noFill/>
+          <a:ln/>
+        </p:spPr>
+        <p:txBody>
+          <a:bodyPr wrap="square" lIns="0" tIns="0" rIns="0" bIns="0" rtlCol="0" anchor="ctr"/>
+          <a:lstStyle/>
+          <a:p>
+            <a:pPr indent="0" marL="0">
+              <a:buNone/>
+            </a:pPr>
+            <a:r>
+              <a:rPr lang="en-US" sz="2200" dirty="0">
+                <a:solidFill>
+                  <a:srgbClr val="141619"/>
+                </a:solidFill>
+                <a:latin typeface="Cambria" pitchFamily="34" charset="0"/>
+                <a:ea typeface="Cambria" pitchFamily="34" charset="-122"/>
+                <a:cs typeface="Cambria" pitchFamily="34" charset="-120"/>
+              </a:rPr>
+              <a:t>Qərar ver</a:t>
+            </a:r>
+            <a:endParaRPr lang="en-US" sz="2200" dirty="0"/>
+          </a:p>
+        </p:txBody>
+      </p:sp>
+      <p:sp>
+        <p:nvSpPr>
+          <p:cNvPr id="19" name="Text 17"/>
+          <p:cNvSpPr/>
+          <p:nvPr/>
+        </p:nvSpPr>
+        <p:spPr>
+          <a:xfrm>
+            <a:off x="9203436" y="3566160"/>
+            <a:ext cx="2139696" cy="1645920"/>
+          </a:xfrm>
+          <a:prstGeom prst="rect">
+            <a:avLst/>
+          </a:prstGeom>
+          <a:noFill/>
+          <a:ln/>
+        </p:spPr>
+        <p:txBody>
+          <a:bodyPr wrap="square" lIns="0" tIns="0" rIns="0" bIns="0" rtlCol="0" anchor="t"/>
+          <a:lstStyle/>
+          <a:p>
+            <a:pPr indent="0" marL="0">
+              <a:lnSpc>
+                <a:spcPct val="130000"/>
+              </a:lnSpc>
+              <a:buNone/>
+            </a:pPr>
+            <a:r>
+              <a:rPr lang="en-US" sz="1150" dirty="0">
+                <a:solidFill>
+                  <a:srgbClr val="5B6068"/>
+                </a:solidFill>
+                <a:latin typeface="Calibri" pitchFamily="34" charset="0"/>
+                <a:ea typeface="Calibri" pitchFamily="34" charset="-122"/>
+                <a:cs typeface="Calibri" pitchFamily="34" charset="-120"/>
+              </a:rPr>
+              <a:t>Üç sözdən biri, üstəlik nəsə işarələndikdə sadə növbəti addım. Heç vaxt diaqnoz deyil.</a:t>
+            </a:r>
+            <a:endParaRPr lang="en-US" sz="1150" dirty="0"/>
+          </a:p>
+        </p:txBody>
+      </p:sp>
+      <p:sp>
+        <p:nvSpPr>
+          <p:cNvPr id="20" name="Text 18"/>
+          <p:cNvSpPr/>
+          <p:nvPr/>
+        </p:nvSpPr>
+        <p:spPr>
+          <a:xfrm>
+            <a:off x="502920" y="6400800"/>
+            <a:ext cx="1828800" cy="274320"/>
+          </a:xfrm>
+          <a:prstGeom prst="rect">
+            <a:avLst/>
+          </a:prstGeom>
+          <a:noFill/>
+          <a:ln/>
+        </p:spPr>
+        <p:txBody>
+          <a:bodyPr wrap="square" lIns="0" tIns="0" rIns="0" bIns="0" rtlCol="0" anchor="ctr"/>
+          <a:lstStyle/>
+          <a:p>
+            <a:pPr indent="0" marL="0">
+              <a:buNone/>
+            </a:pPr>
+            <a:r>
+              <a:rPr lang="en-US" sz="900" spc="200" kern="0" dirty="0">
+                <a:solidFill>
+                  <a:srgbClr val="8E939A"/>
                 </a:solidFill>
                 <a:latin typeface="Courier New" pitchFamily="34" charset="0"/>
                 <a:ea typeface="Courier New" pitchFamily="34" charset="-122"/>
                 <a:cs typeface="Courier New" pitchFamily="34" charset="-120"/>
               </a:rPr>
-              <a:t>Normal</a:t>
-            </a:r>
-            <a:endParaRPr lang="en-US" sz="1900" dirty="0"/>
-          </a:p>
-        </p:txBody>
-      </p:sp>
-      <p:sp>
-        <p:nvSpPr>
-          <p:cNvPr id="18" name="Text 15"/>
-          <p:cNvSpPr/>
-          <p:nvPr/>
-        </p:nvSpPr>
-        <p:spPr>
-          <a:xfrm>
-            <a:off x="502920" y="6400800"/>
-            <a:ext cx="1828800" cy="274320"/>
-          </a:xfrm>
-          <a:prstGeom prst="rect">
-            <a:avLst/>
-          </a:prstGeom>
-          <a:noFill/>
-          <a:ln/>
-        </p:spPr>
-        <p:txBody>
-          <a:bodyPr wrap="square" lIns="0" tIns="0" rIns="0" bIns="0" rtlCol="0" anchor="ctr"/>
-          <a:lstStyle/>
-          <a:p>
-            <a:pPr indent="0" marL="0">
-              <a:buNone/>
-            </a:pPr>
-            <a:r>
-              <a:rPr lang="en-US" sz="900" spc="200" kern="0" dirty="0">
-                <a:solidFill>
-                  <a:srgbClr val="8E939A"/>
-                </a:solidFill>
-                <a:latin typeface="Courier New" pitchFamily="34" charset="0"/>
-                <a:ea typeface="Courier New" pitchFamily="34" charset="-122"/>
-                <a:cs typeface="Courier New" pitchFamily="34" charset="-120"/>
-              </a:rPr>
               <a:t>PULSO</a:t>
             </a:r>
             <a:endParaRPr lang="en-US" sz="900" dirty="0"/>
@@ -3454,7 +4133,7 @@
       </p:sp>
       <p:sp>
         <p:nvSpPr>
-          <p:cNvPr id="19" name="Text 16"/>
+          <p:cNvPr id="21" name="Text 19"/>
           <p:cNvSpPr/>
           <p:nvPr/>
         </p:nvSpPr>
@@ -3538,8 +4217,8 @@
         </p:nvSpPr>
         <p:spPr>
           <a:xfrm>
-            <a:off x="868680" y="777240"/>
-            <a:ext cx="7315200" cy="292608"/>
+            <a:off x="868680" y="548640"/>
+            <a:ext cx="5486400" cy="292608"/>
           </a:xfrm>
           <a:prstGeom prst="rect">
             <a:avLst/>
@@ -3557,13 +4236,13 @@
             <a:r>
               <a:rPr lang="en-US" sz="1200" b="1" spc="220" kern="0" dirty="0">
                 <a:solidFill>
-                  <a:srgbClr val="9AA0A8"/>
+                  <a:srgbClr val="8E939A"/>
                 </a:solidFill>
                 <a:latin typeface="Courier New" pitchFamily="34" charset="0"/>
                 <a:ea typeface="Courier New" pitchFamily="34" charset="-122"/>
                 <a:cs typeface="Courier New" pitchFamily="34" charset="-120"/>
               </a:rPr>
-              <a:t>NIYƏ FƏRQLIYIK</a:t>
+              <a:t>CANLI DEMO</a:t>
             </a:r>
             <a:endParaRPr lang="en-US" sz="1200" dirty="0"/>
           </a:p>
@@ -3577,171 +4256,548 @@
         </p:nvSpPr>
         <p:spPr>
           <a:xfrm>
-            <a:off x="777240" y="1371600"/>
-            <a:ext cx="10515600" cy="2834640"/>
-          </a:xfrm>
-          <a:prstGeom prst="rect">
-            <a:avLst/>
-          </a:prstGeom>
-          <a:noFill/>
-          <a:ln/>
-        </p:spPr>
-        <p:txBody>
-          <a:bodyPr wrap="square" lIns="0" tIns="0" rIns="0" bIns="0" rtlCol="0" anchor="t"/>
-          <a:lstStyle/>
-          <a:p>
-            <a:pPr algn="ctr" indent="0" marL="0">
-              <a:buNone/>
-            </a:pPr>
-            <a:r>
-              <a:rPr lang="en-US" sz="17000" dirty="0">
-                <a:solidFill>
-                  <a:srgbClr val="FF5A2C"/>
+            <a:off x="868680" y="914400"/>
+            <a:ext cx="8686800" cy="1188720"/>
+          </a:xfrm>
+          <a:prstGeom prst="rect">
+            <a:avLst/>
+          </a:prstGeom>
+          <a:noFill/>
+          <a:ln/>
+        </p:spPr>
+        <p:txBody>
+          <a:bodyPr wrap="square" lIns="0" tIns="0" rIns="0" bIns="0" rtlCol="0" anchor="ctr"/>
+          <a:lstStyle/>
+          <a:p>
+            <a:pPr indent="0" marL="0">
+              <a:buNone/>
+            </a:pPr>
+            <a:r>
+              <a:rPr lang="en-US" sz="3000" dirty="0">
+                <a:solidFill>
+                  <a:srgbClr val="141619"/>
                 </a:solidFill>
                 <a:latin typeface="Cambria" pitchFamily="34" charset="0"/>
                 <a:ea typeface="Cambria" pitchFamily="34" charset="-122"/>
                 <a:cs typeface="Cambria" pitchFamily="34" charset="-120"/>
               </a:rPr>
-              <a:t>302</a:t>
-            </a:r>
-            <a:endParaRPr lang="en-US" sz="17000" dirty="0"/>
-          </a:p>
-        </p:txBody>
-      </p:sp>
-      <p:sp>
-        <p:nvSpPr>
-          <p:cNvPr id="4" name="Text 2"/>
-          <p:cNvSpPr/>
-          <p:nvPr/>
-        </p:nvSpPr>
-        <p:spPr>
-          <a:xfrm>
-            <a:off x="868680" y="4251960"/>
-            <a:ext cx="10515600" cy="502920"/>
-          </a:xfrm>
-          <a:prstGeom prst="rect">
-            <a:avLst/>
-          </a:prstGeom>
-          <a:noFill/>
-          <a:ln/>
-        </p:spPr>
-        <p:txBody>
-          <a:bodyPr wrap="square" lIns="0" tIns="0" rIns="0" bIns="0" rtlCol="0" anchor="ctr"/>
-          <a:lstStyle/>
-          <a:p>
-            <a:pPr algn="ctr" indent="0" marL="0">
-              <a:buNone/>
-            </a:pPr>
-            <a:r>
-              <a:rPr lang="en-US" sz="1500" b="1" spc="120" kern="0" dirty="0">
-                <a:solidFill>
-                  <a:srgbClr val="EDEEF0"/>
+              <a:t>Telefonun mikrofonu → canlı</a:t>
+            </a:r>
+            <a:endParaRPr lang="en-US" sz="3000" dirty="0"/>
+          </a:p>
+          <a:p>
+            <a:pPr indent="0" marL="0">
+              <a:buNone/>
+            </a:pPr>
+            <a:r>
+              <a:rPr lang="en-US" sz="3000" dirty="0">
+                <a:solidFill>
+                  <a:srgbClr val="141619"/>
+                </a:solidFill>
+                <a:latin typeface="Cambria" pitchFamily="34" charset="0"/>
+                <a:ea typeface="Cambria" pitchFamily="34" charset="-122"/>
+                <a:cs typeface="Cambria" pitchFamily="34" charset="-120"/>
+              </a:rPr>
+              <a:t>qiymətləndirmə, indi.</a:t>
+            </a:r>
+            <a:endParaRPr lang="en-US" sz="3000" dirty="0"/>
+          </a:p>
+        </p:txBody>
+      </p:sp>
+      <p:sp>
+        <p:nvSpPr>
+          <p:cNvPr id="4" name="Shape 2"/>
+          <p:cNvSpPr/>
+          <p:nvPr/>
+        </p:nvSpPr>
+        <p:spPr>
+          <a:xfrm>
+            <a:off x="868680" y="2148840"/>
+            <a:ext cx="10469880" cy="2103120"/>
+          </a:xfrm>
+          <a:prstGeom prst="rect">
+            <a:avLst/>
+          </a:prstGeom>
+          <a:solidFill>
+            <a:srgbClr val="F4F4F1"/>
+          </a:solidFill>
+          <a:ln w="12700">
+            <a:solidFill>
+              <a:srgbClr val="DCDBD5"/>
+            </a:solidFill>
+            <a:prstDash val="solid"/>
+          </a:ln>
+        </p:spPr>
+      </p:sp>
+      <p:pic>
+        <p:nvPicPr>
+          <p:cNvPr id="5" name="Image 0" descr="waveform.png">    </p:cNvPr>
+          <p:cNvPicPr>
+            <a:picLocks noChangeAspect="1"/>
+          </p:cNvPicPr>
+          <p:nvPr/>
+        </p:nvPicPr>
+        <p:blipFill>
+          <a:blip r:embed="rId2"/>
+          <a:stretch>
+            <a:fillRect/>
+          </a:stretch>
+        </p:blipFill>
+        <p:spPr>
+          <a:xfrm>
+            <a:off x="1097280" y="2286000"/>
+            <a:ext cx="10012680" cy="1828800"/>
+          </a:xfrm>
+          <a:prstGeom prst="rect">
+            <a:avLst/>
+          </a:prstGeom>
+        </p:spPr>
+      </p:pic>
+      <p:sp>
+        <p:nvSpPr>
+          <p:cNvPr id="6" name="Shape 3"/>
+          <p:cNvSpPr/>
+          <p:nvPr/>
+        </p:nvSpPr>
+        <p:spPr>
+          <a:xfrm>
+            <a:off x="868680" y="4343400"/>
+            <a:ext cx="2507742" cy="960120"/>
+          </a:xfrm>
+          <a:prstGeom prst="rect">
+            <a:avLst/>
+          </a:prstGeom>
+          <a:solidFill>
+            <a:srgbClr val="FFFFFF"/>
+          </a:solidFill>
+          <a:ln w="12700">
+            <a:solidFill>
+              <a:srgbClr val="DCDBD5"/>
+            </a:solidFill>
+            <a:prstDash val="solid"/>
+          </a:ln>
+        </p:spPr>
+      </p:sp>
+      <p:sp>
+        <p:nvSpPr>
+          <p:cNvPr id="7" name="Text 4"/>
+          <p:cNvSpPr/>
+          <p:nvPr/>
+        </p:nvSpPr>
+        <p:spPr>
+          <a:xfrm>
+            <a:off x="1014984" y="4471416"/>
+            <a:ext cx="2251710" cy="256032"/>
+          </a:xfrm>
+          <a:prstGeom prst="rect">
+            <a:avLst/>
+          </a:prstGeom>
+          <a:noFill/>
+          <a:ln/>
+        </p:spPr>
+        <p:txBody>
+          <a:bodyPr wrap="square" lIns="0" tIns="0" rIns="0" bIns="0" rtlCol="0" anchor="ctr"/>
+          <a:lstStyle/>
+          <a:p>
+            <a:pPr indent="0" marL="0">
+              <a:buNone/>
+            </a:pPr>
+            <a:r>
+              <a:rPr lang="en-US" sz="950" b="1" spc="100" kern="0" dirty="0">
+                <a:solidFill>
+                  <a:srgbClr val="8E939A"/>
                 </a:solidFill>
                 <a:latin typeface="Courier New" pitchFamily="34" charset="0"/>
                 <a:ea typeface="Courier New" pitchFamily="34" charset="-122"/>
                 <a:cs typeface="Courier New" pitchFamily="34" charset="-120"/>
               </a:rPr>
-              <a:t>avtomatik test. Hamısı uğurlu.</a:t>
-            </a:r>
-            <a:endParaRPr lang="en-US" sz="1500" dirty="0"/>
-          </a:p>
-        </p:txBody>
-      </p:sp>
-      <p:sp>
-        <p:nvSpPr>
-          <p:cNvPr id="5" name="Text 3"/>
-          <p:cNvSpPr/>
-          <p:nvPr/>
-        </p:nvSpPr>
-        <p:spPr>
-          <a:xfrm>
-            <a:off x="1188720" y="5029200"/>
-            <a:ext cx="9784080" cy="1097280"/>
-          </a:xfrm>
-          <a:prstGeom prst="rect">
-            <a:avLst/>
-          </a:prstGeom>
-          <a:noFill/>
-          <a:ln/>
-        </p:spPr>
-        <p:txBody>
-          <a:bodyPr wrap="square" lIns="0" tIns="0" rIns="0" bIns="0" rtlCol="0" anchor="ctr"/>
-          <a:lstStyle/>
-          <a:p>
-            <a:pPr algn="ctr" indent="0" marL="0">
-              <a:lnSpc>
-                <a:spcPct val="130000"/>
-              </a:lnSpc>
-              <a:buNone/>
-            </a:pPr>
-            <a:r>
-              <a:rPr lang="en-US" sz="1650" i="1" dirty="0">
-                <a:solidFill>
-                  <a:srgbClr val="9AA0A8"/>
-                </a:solidFill>
-                <a:latin typeface="Cambria" pitchFamily="34" charset="0"/>
-                <a:ea typeface="Cambria" pitchFamily="34" charset="-122"/>
-                <a:cs typeface="Cambria" pitchFamily="34" charset="-120"/>
-              </a:rPr>
-              <a:t>İstifadəçiyə çatmazdan əvvəl tapılan iki real xəta. Yeni avadanlıq qoşduq — heç nə sınmadı.</a:t>
-            </a:r>
-            <a:endParaRPr lang="en-US" sz="1650" dirty="0"/>
-          </a:p>
-          <a:p>
-            <a:pPr algn="ctr" indent="0" marL="0">
-              <a:lnSpc>
-                <a:spcPct val="130000"/>
-              </a:lnSpc>
-              <a:buNone/>
-            </a:pPr>
-            <a:r>
-              <a:rPr lang="en-US" sz="1650" i="1" dirty="0">
-                <a:solidFill>
-                  <a:srgbClr val="9AA0A8"/>
-                </a:solidFill>
-                <a:latin typeface="Cambria" pitchFamily="34" charset="0"/>
-                <a:ea typeface="Cambria" pitchFamily="34" charset="-122"/>
-                <a:cs typeface="Cambria" pitchFamily="34" charset="-120"/>
-              </a:rPr>
-              <a:t>Hakaton demolarının çoxunda bu yoxdur. Biz onu işləməli olduğu kimi qurduq.</a:t>
-            </a:r>
-            <a:endParaRPr lang="en-US" sz="1650" dirty="0"/>
-          </a:p>
-        </p:txBody>
-      </p:sp>
-      <p:sp>
-        <p:nvSpPr>
-          <p:cNvPr id="6" name="Text 4"/>
-          <p:cNvSpPr/>
-          <p:nvPr/>
-        </p:nvSpPr>
-        <p:spPr>
-          <a:xfrm>
-            <a:off x="502920" y="6400800"/>
-            <a:ext cx="1828800" cy="274320"/>
-          </a:xfrm>
-          <a:prstGeom prst="rect">
-            <a:avLst/>
-          </a:prstGeom>
-          <a:noFill/>
-          <a:ln/>
-        </p:spPr>
-        <p:txBody>
-          <a:bodyPr wrap="square" lIns="0" tIns="0" rIns="0" bIns="0" rtlCol="0" anchor="ctr"/>
-          <a:lstStyle/>
-          <a:p>
-            <a:pPr indent="0" marL="0">
-              <a:buNone/>
-            </a:pPr>
-            <a:r>
-              <a:rPr lang="en-US" sz="900" spc="200" kern="0" dirty="0">
-                <a:solidFill>
-                  <a:srgbClr val="9AA0A8"/>
+              <a:t>ÜRƏK TEZLIYI</a:t>
+            </a:r>
+            <a:endParaRPr lang="en-US" sz="950" dirty="0"/>
+          </a:p>
+        </p:txBody>
+      </p:sp>
+      <p:sp>
+        <p:nvSpPr>
+          <p:cNvPr id="8" name="Text 5"/>
+          <p:cNvSpPr/>
+          <p:nvPr/>
+        </p:nvSpPr>
+        <p:spPr>
+          <a:xfrm>
+            <a:off x="1014984" y="4727448"/>
+            <a:ext cx="2251710" cy="457200"/>
+          </a:xfrm>
+          <a:prstGeom prst="rect">
+            <a:avLst/>
+          </a:prstGeom>
+          <a:noFill/>
+          <a:ln/>
+        </p:spPr>
+        <p:txBody>
+          <a:bodyPr wrap="square" lIns="0" tIns="0" rIns="0" bIns="0" rtlCol="0" anchor="ctr"/>
+          <a:lstStyle/>
+          <a:p>
+            <a:pPr indent="0" marL="0">
+              <a:buNone/>
+            </a:pPr>
+            <a:r>
+              <a:rPr lang="en-US" sz="1900" b="1" dirty="0">
+                <a:solidFill>
+                  <a:srgbClr val="141619"/>
                 </a:solidFill>
                 <a:latin typeface="Courier New" pitchFamily="34" charset="0"/>
                 <a:ea typeface="Courier New" pitchFamily="34" charset="-122"/>
                 <a:cs typeface="Courier New" pitchFamily="34" charset="-120"/>
               </a:rPr>
+              <a:t>68 BPM</a:t>
+            </a:r>
+            <a:endParaRPr lang="en-US" sz="1900" dirty="0"/>
+          </a:p>
+        </p:txBody>
+      </p:sp>
+      <p:sp>
+        <p:nvSpPr>
+          <p:cNvPr id="9" name="Shape 6"/>
+          <p:cNvSpPr/>
+          <p:nvPr/>
+        </p:nvSpPr>
+        <p:spPr>
+          <a:xfrm>
+            <a:off x="3486150" y="4343400"/>
+            <a:ext cx="2507742" cy="960120"/>
+          </a:xfrm>
+          <a:prstGeom prst="rect">
+            <a:avLst/>
+          </a:prstGeom>
+          <a:solidFill>
+            <a:srgbClr val="FFFFFF"/>
+          </a:solidFill>
+          <a:ln w="12700">
+            <a:solidFill>
+              <a:srgbClr val="DCDBD5"/>
+            </a:solidFill>
+            <a:prstDash val="solid"/>
+          </a:ln>
+        </p:spPr>
+      </p:sp>
+      <p:sp>
+        <p:nvSpPr>
+          <p:cNvPr id="10" name="Text 7"/>
+          <p:cNvSpPr/>
+          <p:nvPr/>
+        </p:nvSpPr>
+        <p:spPr>
+          <a:xfrm>
+            <a:off x="3632454" y="4471416"/>
+            <a:ext cx="2251710" cy="256032"/>
+          </a:xfrm>
+          <a:prstGeom prst="rect">
+            <a:avLst/>
+          </a:prstGeom>
+          <a:noFill/>
+          <a:ln/>
+        </p:spPr>
+        <p:txBody>
+          <a:bodyPr wrap="square" lIns="0" tIns="0" rIns="0" bIns="0" rtlCol="0" anchor="ctr"/>
+          <a:lstStyle/>
+          <a:p>
+            <a:pPr indent="0" marL="0">
+              <a:buNone/>
+            </a:pPr>
+            <a:r>
+              <a:rPr lang="en-US" sz="950" b="1" spc="100" kern="0" dirty="0">
+                <a:solidFill>
+                  <a:srgbClr val="8E939A"/>
+                </a:solidFill>
+                <a:latin typeface="Courier New" pitchFamily="34" charset="0"/>
+                <a:ea typeface="Courier New" pitchFamily="34" charset="-122"/>
+                <a:cs typeface="Courier New" pitchFamily="34" charset="-120"/>
+              </a:rPr>
+              <a:t>AŞKARLANAN VURĞU</a:t>
+            </a:r>
+            <a:endParaRPr lang="en-US" sz="950" dirty="0"/>
+          </a:p>
+        </p:txBody>
+      </p:sp>
+      <p:sp>
+        <p:nvSpPr>
+          <p:cNvPr id="11" name="Text 8"/>
+          <p:cNvSpPr/>
+          <p:nvPr/>
+        </p:nvSpPr>
+        <p:spPr>
+          <a:xfrm>
+            <a:off x="3632454" y="4727448"/>
+            <a:ext cx="2251710" cy="457200"/>
+          </a:xfrm>
+          <a:prstGeom prst="rect">
+            <a:avLst/>
+          </a:prstGeom>
+          <a:noFill/>
+          <a:ln/>
+        </p:spPr>
+        <p:txBody>
+          <a:bodyPr wrap="square" lIns="0" tIns="0" rIns="0" bIns="0" rtlCol="0" anchor="ctr"/>
+          <a:lstStyle/>
+          <a:p>
+            <a:pPr indent="0" marL="0">
+              <a:buNone/>
+            </a:pPr>
+            <a:r>
+              <a:rPr lang="en-US" sz="1900" b="1" dirty="0">
+                <a:solidFill>
+                  <a:srgbClr val="141619"/>
+                </a:solidFill>
+                <a:latin typeface="Courier New" pitchFamily="34" charset="0"/>
+                <a:ea typeface="Courier New" pitchFamily="34" charset="-122"/>
+                <a:cs typeface="Courier New" pitchFamily="34" charset="-120"/>
+              </a:rPr>
+              <a:t>8</a:t>
+            </a:r>
+            <a:endParaRPr lang="en-US" sz="1900" dirty="0"/>
+          </a:p>
+        </p:txBody>
+      </p:sp>
+      <p:sp>
+        <p:nvSpPr>
+          <p:cNvPr id="12" name="Shape 9"/>
+          <p:cNvSpPr/>
+          <p:nvPr/>
+        </p:nvSpPr>
+        <p:spPr>
+          <a:xfrm>
+            <a:off x="6103620" y="4343400"/>
+            <a:ext cx="2507742" cy="960120"/>
+          </a:xfrm>
+          <a:prstGeom prst="rect">
+            <a:avLst/>
+          </a:prstGeom>
+          <a:solidFill>
+            <a:srgbClr val="FFFFFF"/>
+          </a:solidFill>
+          <a:ln w="12700">
+            <a:solidFill>
+              <a:srgbClr val="DCDBD5"/>
+            </a:solidFill>
+            <a:prstDash val="solid"/>
+          </a:ln>
+        </p:spPr>
+      </p:sp>
+      <p:sp>
+        <p:nvSpPr>
+          <p:cNvPr id="13" name="Text 10"/>
+          <p:cNvSpPr/>
+          <p:nvPr/>
+        </p:nvSpPr>
+        <p:spPr>
+          <a:xfrm>
+            <a:off x="6249924" y="4471416"/>
+            <a:ext cx="2251710" cy="256032"/>
+          </a:xfrm>
+          <a:prstGeom prst="rect">
+            <a:avLst/>
+          </a:prstGeom>
+          <a:noFill/>
+          <a:ln/>
+        </p:spPr>
+        <p:txBody>
+          <a:bodyPr wrap="square" lIns="0" tIns="0" rIns="0" bIns="0" rtlCol="0" anchor="ctr"/>
+          <a:lstStyle/>
+          <a:p>
+            <a:pPr indent="0" marL="0">
+              <a:buNone/>
+            </a:pPr>
+            <a:r>
+              <a:rPr lang="en-US" sz="950" b="1" spc="100" kern="0" dirty="0">
+                <a:solidFill>
+                  <a:srgbClr val="8E939A"/>
+                </a:solidFill>
+                <a:latin typeface="Courier New" pitchFamily="34" charset="0"/>
+                <a:ea typeface="Courier New" pitchFamily="34" charset="-122"/>
+                <a:cs typeface="Courier New" pitchFamily="34" charset="-120"/>
+              </a:rPr>
+              <a:t>RITM</a:t>
+            </a:r>
+            <a:endParaRPr lang="en-US" sz="950" dirty="0"/>
+          </a:p>
+        </p:txBody>
+      </p:sp>
+      <p:sp>
+        <p:nvSpPr>
+          <p:cNvPr id="14" name="Text 11"/>
+          <p:cNvSpPr/>
+          <p:nvPr/>
+        </p:nvSpPr>
+        <p:spPr>
+          <a:xfrm>
+            <a:off x="6249924" y="4727448"/>
+            <a:ext cx="2251710" cy="457200"/>
+          </a:xfrm>
+          <a:prstGeom prst="rect">
+            <a:avLst/>
+          </a:prstGeom>
+          <a:noFill/>
+          <a:ln/>
+        </p:spPr>
+        <p:txBody>
+          <a:bodyPr wrap="square" lIns="0" tIns="0" rIns="0" bIns="0" rtlCol="0" anchor="ctr"/>
+          <a:lstStyle/>
+          <a:p>
+            <a:pPr indent="0" marL="0">
+              <a:buNone/>
+            </a:pPr>
+            <a:r>
+              <a:rPr lang="en-US" sz="1900" b="1" dirty="0">
+                <a:solidFill>
+                  <a:srgbClr val="141619"/>
+                </a:solidFill>
+                <a:latin typeface="Courier New" pitchFamily="34" charset="0"/>
+                <a:ea typeface="Courier New" pitchFamily="34" charset="-122"/>
+                <a:cs typeface="Courier New" pitchFamily="34" charset="-120"/>
+              </a:rPr>
+              <a:t>Müntəzəm</a:t>
+            </a:r>
+            <a:endParaRPr lang="en-US" sz="1900" dirty="0"/>
+          </a:p>
+        </p:txBody>
+      </p:sp>
+      <p:sp>
+        <p:nvSpPr>
+          <p:cNvPr id="15" name="Shape 12"/>
+          <p:cNvSpPr/>
+          <p:nvPr/>
+        </p:nvSpPr>
+        <p:spPr>
+          <a:xfrm>
+            <a:off x="8721090" y="4343400"/>
+            <a:ext cx="2507742" cy="960120"/>
+          </a:xfrm>
+          <a:prstGeom prst="rect">
+            <a:avLst/>
+          </a:prstGeom>
+          <a:solidFill>
+            <a:srgbClr val="FFFFFF"/>
+          </a:solidFill>
+          <a:ln w="12700">
+            <a:solidFill>
+              <a:srgbClr val="DCDBD5"/>
+            </a:solidFill>
+            <a:prstDash val="solid"/>
+          </a:ln>
+        </p:spPr>
+      </p:sp>
+      <p:sp>
+        <p:nvSpPr>
+          <p:cNvPr id="16" name="Text 13"/>
+          <p:cNvSpPr/>
+          <p:nvPr/>
+        </p:nvSpPr>
+        <p:spPr>
+          <a:xfrm>
+            <a:off x="8867394" y="4471416"/>
+            <a:ext cx="2251710" cy="256032"/>
+          </a:xfrm>
+          <a:prstGeom prst="rect">
+            <a:avLst/>
+          </a:prstGeom>
+          <a:noFill/>
+          <a:ln/>
+        </p:spPr>
+        <p:txBody>
+          <a:bodyPr wrap="square" lIns="0" tIns="0" rIns="0" bIns="0" rtlCol="0" anchor="ctr"/>
+          <a:lstStyle/>
+          <a:p>
+            <a:pPr indent="0" marL="0">
+              <a:buNone/>
+            </a:pPr>
+            <a:r>
+              <a:rPr lang="en-US" sz="950" b="1" spc="100" kern="0" dirty="0">
+                <a:solidFill>
+                  <a:srgbClr val="8E939A"/>
+                </a:solidFill>
+                <a:latin typeface="Courier New" pitchFamily="34" charset="0"/>
+                <a:ea typeface="Courier New" pitchFamily="34" charset="-122"/>
+                <a:cs typeface="Courier New" pitchFamily="34" charset="-120"/>
+              </a:rPr>
+              <a:t>NƏTICƏ</a:t>
+            </a:r>
+            <a:endParaRPr lang="en-US" sz="950" dirty="0"/>
+          </a:p>
+        </p:txBody>
+      </p:sp>
+      <p:sp>
+        <p:nvSpPr>
+          <p:cNvPr id="17" name="Text 14"/>
+          <p:cNvSpPr/>
+          <p:nvPr/>
+        </p:nvSpPr>
+        <p:spPr>
+          <a:xfrm>
+            <a:off x="8867394" y="4727448"/>
+            <a:ext cx="2251710" cy="457200"/>
+          </a:xfrm>
+          <a:prstGeom prst="rect">
+            <a:avLst/>
+          </a:prstGeom>
+          <a:noFill/>
+          <a:ln/>
+        </p:spPr>
+        <p:txBody>
+          <a:bodyPr wrap="square" lIns="0" tIns="0" rIns="0" bIns="0" rtlCol="0" anchor="ctr"/>
+          <a:lstStyle/>
+          <a:p>
+            <a:pPr indent="0" marL="0">
+              <a:buNone/>
+            </a:pPr>
+            <a:r>
+              <a:rPr lang="en-US" sz="1900" b="1" dirty="0">
+                <a:solidFill>
+                  <a:srgbClr val="D6360F"/>
+                </a:solidFill>
+                <a:latin typeface="Courier New" pitchFamily="34" charset="0"/>
+                <a:ea typeface="Courier New" pitchFamily="34" charset="-122"/>
+                <a:cs typeface="Courier New" pitchFamily="34" charset="-120"/>
+              </a:rPr>
+              <a:t>Normal</a:t>
+            </a:r>
+            <a:endParaRPr lang="en-US" sz="1900" dirty="0"/>
+          </a:p>
+        </p:txBody>
+      </p:sp>
+      <p:sp>
+        <p:nvSpPr>
+          <p:cNvPr id="18" name="Text 15"/>
+          <p:cNvSpPr/>
+          <p:nvPr/>
+        </p:nvSpPr>
+        <p:spPr>
+          <a:xfrm>
+            <a:off x="502920" y="6400800"/>
+            <a:ext cx="1828800" cy="274320"/>
+          </a:xfrm>
+          <a:prstGeom prst="rect">
+            <a:avLst/>
+          </a:prstGeom>
+          <a:noFill/>
+          <a:ln/>
+        </p:spPr>
+        <p:txBody>
+          <a:bodyPr wrap="square" lIns="0" tIns="0" rIns="0" bIns="0" rtlCol="0" anchor="ctr"/>
+          <a:lstStyle/>
+          <a:p>
+            <a:pPr indent="0" marL="0">
+              <a:buNone/>
+            </a:pPr>
+            <a:r>
+              <a:rPr lang="en-US" sz="900" spc="200" kern="0" dirty="0">
+                <a:solidFill>
+                  <a:srgbClr val="8E939A"/>
+                </a:solidFill>
+                <a:latin typeface="Courier New" pitchFamily="34" charset="0"/>
+                <a:ea typeface="Courier New" pitchFamily="34" charset="-122"/>
+                <a:cs typeface="Courier New" pitchFamily="34" charset="-120"/>
+              </a:rPr>
               <a:t>PULSO</a:t>
             </a:r>
             <a:endParaRPr lang="en-US" sz="900" dirty="0"/>
@@ -3750,7 +4806,7 @@
       </p:sp>
       <p:sp>
         <p:nvSpPr>
-          <p:cNvPr id="7" name="Text 5"/>
+          <p:cNvPr id="19" name="Text 16"/>
           <p:cNvSpPr/>
           <p:nvPr/>
         </p:nvSpPr>
@@ -3775,7 +4831,7 @@
             <a:r>
               <a:rPr lang="en-US" sz="900" dirty="0">
                 <a:solidFill>
-                  <a:srgbClr val="9AA0A8"/>
+                  <a:srgbClr val="8E939A"/>
                 </a:solidFill>
                 <a:latin typeface="Courier New" pitchFamily="34" charset="0"/>
                 <a:ea typeface="Courier New" pitchFamily="34" charset="-122"/>
@@ -3834,8 +4890,8 @@
         </p:nvSpPr>
         <p:spPr>
           <a:xfrm>
-            <a:off x="868680" y="640080"/>
-            <a:ext cx="5486400" cy="292608"/>
+            <a:off x="868680" y="777240"/>
+            <a:ext cx="7315200" cy="292608"/>
           </a:xfrm>
           <a:prstGeom prst="rect">
             <a:avLst/>
@@ -3853,13 +4909,13 @@
             <a:r>
               <a:rPr lang="en-US" sz="1200" b="1" spc="220" kern="0" dirty="0">
                 <a:solidFill>
-                  <a:srgbClr val="8E939A"/>
+                  <a:srgbClr val="9AA0A8"/>
                 </a:solidFill>
                 <a:latin typeface="Courier New" pitchFamily="34" charset="0"/>
                 <a:ea typeface="Courier New" pitchFamily="34" charset="-122"/>
                 <a:cs typeface="Courier New" pitchFamily="34" charset="-120"/>
               </a:rPr>
-              <a:t>AVADANLIQ</a:t>
+              <a:t>NIYƏ FƏRQLIYIK</a:t>
             </a:r>
             <a:endParaRPr lang="en-US" sz="1200" dirty="0"/>
           </a:p>
@@ -3873,8 +4929,8 @@
         </p:nvSpPr>
         <p:spPr>
           <a:xfrm>
-            <a:off x="868680" y="1188720"/>
-            <a:ext cx="9601200" cy="1463040"/>
+            <a:off x="777240" y="1371600"/>
+            <a:ext cx="10515600" cy="2834640"/>
           </a:xfrm>
           <a:prstGeom prst="rect">
             <a:avLst/>
@@ -3886,107 +4942,124 @@
           <a:bodyPr wrap="square" lIns="0" tIns="0" rIns="0" bIns="0" rtlCol="0" anchor="t"/>
           <a:lstStyle/>
           <a:p>
-            <a:pPr indent="0" marL="0">
-              <a:buNone/>
-            </a:pPr>
-            <a:r>
-              <a:rPr lang="en-US" sz="3600" dirty="0">
-                <a:solidFill>
-                  <a:srgbClr val="141619"/>
+            <a:pPr algn="ctr" indent="0" marL="0">
+              <a:buNone/>
+            </a:pPr>
+            <a:r>
+              <a:rPr lang="en-US" sz="17000" dirty="0">
+                <a:solidFill>
+                  <a:srgbClr val="FF5A2C"/>
                 </a:solidFill>
                 <a:latin typeface="Cambria" pitchFamily="34" charset="0"/>
                 <a:ea typeface="Cambria" pitchFamily="34" charset="-122"/>
                 <a:cs typeface="Cambria" pitchFamily="34" charset="-120"/>
               </a:rPr>
-              <a:t>20 dollardan az hissə.</a:t>
-            </a:r>
-            <a:endParaRPr lang="en-US" sz="3600" dirty="0"/>
-          </a:p>
-          <a:p>
-            <a:pPr indent="0" marL="0">
-              <a:buNone/>
-            </a:pPr>
-            <a:r>
-              <a:rPr lang="en-US" sz="3600" dirty="0">
-                <a:solidFill>
-                  <a:srgbClr val="141619"/>
+              <a:t>302</a:t>
+            </a:r>
+            <a:endParaRPr lang="en-US" sz="17000" dirty="0"/>
+          </a:p>
+        </p:txBody>
+      </p:sp>
+      <p:sp>
+        <p:nvSpPr>
+          <p:cNvPr id="4" name="Text 2"/>
+          <p:cNvSpPr/>
+          <p:nvPr/>
+        </p:nvSpPr>
+        <p:spPr>
+          <a:xfrm>
+            <a:off x="868680" y="4251960"/>
+            <a:ext cx="10515600" cy="502920"/>
+          </a:xfrm>
+          <a:prstGeom prst="rect">
+            <a:avLst/>
+          </a:prstGeom>
+          <a:noFill/>
+          <a:ln/>
+        </p:spPr>
+        <p:txBody>
+          <a:bodyPr wrap="square" lIns="0" tIns="0" rIns="0" bIns="0" rtlCol="0" anchor="ctr"/>
+          <a:lstStyle/>
+          <a:p>
+            <a:pPr algn="ctr" indent="0" marL="0">
+              <a:buNone/>
+            </a:pPr>
+            <a:r>
+              <a:rPr lang="en-US" sz="1500" b="1" spc="120" kern="0" dirty="0">
+                <a:solidFill>
+                  <a:srgbClr val="EDEEF0"/>
+                </a:solidFill>
+                <a:latin typeface="Courier New" pitchFamily="34" charset="0"/>
+                <a:ea typeface="Courier New" pitchFamily="34" charset="-122"/>
+                <a:cs typeface="Courier New" pitchFamily="34" charset="-120"/>
+              </a:rPr>
+              <a:t>avtomatik test. Hamısı uğurlu.</a:t>
+            </a:r>
+            <a:endParaRPr lang="en-US" sz="1500" dirty="0"/>
+          </a:p>
+        </p:txBody>
+      </p:sp>
+      <p:sp>
+        <p:nvSpPr>
+          <p:cNvPr id="5" name="Text 3"/>
+          <p:cNvSpPr/>
+          <p:nvPr/>
+        </p:nvSpPr>
+        <p:spPr>
+          <a:xfrm>
+            <a:off x="1188720" y="5029200"/>
+            <a:ext cx="9784080" cy="1097280"/>
+          </a:xfrm>
+          <a:prstGeom prst="rect">
+            <a:avLst/>
+          </a:prstGeom>
+          <a:noFill/>
+          <a:ln/>
+        </p:spPr>
+        <p:txBody>
+          <a:bodyPr wrap="square" lIns="0" tIns="0" rIns="0" bIns="0" rtlCol="0" anchor="ctr"/>
+          <a:lstStyle/>
+          <a:p>
+            <a:pPr algn="ctr" indent="0" marL="0">
+              <a:lnSpc>
+                <a:spcPct val="130000"/>
+              </a:lnSpc>
+              <a:buNone/>
+            </a:pPr>
+            <a:r>
+              <a:rPr lang="en-US" sz="1650" i="1" dirty="0">
+                <a:solidFill>
+                  <a:srgbClr val="9AA0A8"/>
                 </a:solidFill>
                 <a:latin typeface="Cambria" pitchFamily="34" charset="0"/>
                 <a:ea typeface="Cambria" pitchFamily="34" charset="-122"/>
                 <a:cs typeface="Cambria" pitchFamily="34" charset="-120"/>
               </a:rPr>
-              <a:t>Proqramla eyni beyin.</a:t>
-            </a:r>
-            <a:endParaRPr lang="en-US" sz="3600" dirty="0"/>
-          </a:p>
-        </p:txBody>
-      </p:sp>
-      <p:sp>
-        <p:nvSpPr>
-          <p:cNvPr id="4" name="Text 2"/>
-          <p:cNvSpPr/>
-          <p:nvPr/>
-        </p:nvSpPr>
-        <p:spPr>
-          <a:xfrm>
-            <a:off x="868680" y="2788920"/>
-            <a:ext cx="10058400" cy="914400"/>
-          </a:xfrm>
-          <a:prstGeom prst="rect">
-            <a:avLst/>
-          </a:prstGeom>
-          <a:noFill/>
-          <a:ln/>
-        </p:spPr>
-        <p:txBody>
-          <a:bodyPr wrap="square" lIns="0" tIns="0" rIns="0" bIns="0" rtlCol="0" anchor="ctr"/>
-          <a:lstStyle/>
-          <a:p>
-            <a:pPr indent="0" marL="0">
+              <a:t>İstifadəçiyə çatmazdan əvvəl tapılan iki real xəta. Yeni avadanlıq qoşduq — heç nə sınmadı.</a:t>
+            </a:r>
+            <a:endParaRPr lang="en-US" sz="1650" dirty="0"/>
+          </a:p>
+          <a:p>
+            <a:pPr algn="ctr" indent="0" marL="0">
               <a:lnSpc>
                 <a:spcPct val="130000"/>
               </a:lnSpc>
               <a:buNone/>
             </a:pPr>
             <a:r>
-              <a:rPr lang="en-US" sz="1500" dirty="0">
-                <a:solidFill>
-                  <a:srgbClr val="5B6068"/>
-                </a:solidFill>
-                <a:latin typeface="Calibri" pitchFamily="34" charset="0"/>
-                <a:ea typeface="Calibri" pitchFamily="34" charset="-122"/>
-                <a:cs typeface="Calibri" pitchFamily="34" charset="-120"/>
-              </a:rPr>
-              <a:t>Ucuz mikrofon çipi səsi tutur. Onun yerinə telefon, noutbuk və ya qeydə alınmış fayl qoşun — qalan hər şey tamamilə eyni qalır.</a:t>
-            </a:r>
-            <a:endParaRPr lang="en-US" sz="1500" dirty="0"/>
-          </a:p>
-        </p:txBody>
-      </p:sp>
-      <p:sp>
-        <p:nvSpPr>
-          <p:cNvPr id="5" name="Shape 3"/>
-          <p:cNvSpPr/>
-          <p:nvPr/>
-        </p:nvSpPr>
-        <p:spPr>
-          <a:xfrm>
-            <a:off x="868680" y="4114800"/>
-            <a:ext cx="2514600" cy="438912"/>
-          </a:xfrm>
-          <a:prstGeom prst="rect">
-            <a:avLst/>
-          </a:prstGeom>
-          <a:solidFill>
-            <a:srgbClr val="FFFFFF"/>
-          </a:solidFill>
-          <a:ln w="12700">
-            <a:solidFill>
-              <a:srgbClr val="C3C2BA"/>
-            </a:solidFill>
-            <a:prstDash val="solid"/>
-          </a:ln>
-        </p:spPr>
+              <a:rPr lang="en-US" sz="1650" i="1" dirty="0">
+                <a:solidFill>
+                  <a:srgbClr val="9AA0A8"/>
+                </a:solidFill>
+                <a:latin typeface="Cambria" pitchFamily="34" charset="0"/>
+                <a:ea typeface="Cambria" pitchFamily="34" charset="-122"/>
+                <a:cs typeface="Cambria" pitchFamily="34" charset="-120"/>
+              </a:rPr>
+              <a:t>Hakaton demolarının çoxunda bu yoxdur. Biz onu işləməli olduğu kimi qurduq.</a:t>
+            </a:r>
+            <a:endParaRPr lang="en-US" sz="1650" dirty="0"/>
+          </a:p>
+        </p:txBody>
       </p:sp>
       <p:sp>
         <p:nvSpPr>
@@ -3996,262 +5069,31 @@
         </p:nvSpPr>
         <p:spPr>
           <a:xfrm>
-            <a:off x="868680" y="4114800"/>
-            <a:ext cx="2514600" cy="438912"/>
-          </a:xfrm>
-          <a:prstGeom prst="rect">
-            <a:avLst/>
-          </a:prstGeom>
-          <a:noFill/>
-          <a:ln/>
-        </p:spPr>
-        <p:txBody>
-          <a:bodyPr wrap="square" lIns="0" tIns="0" rIns="0" bIns="0" rtlCol="0" anchor="ctr"/>
-          <a:lstStyle/>
-          <a:p>
-            <a:pPr algn="ctr" indent="0" marL="0">
-              <a:buNone/>
-            </a:pPr>
-            <a:r>
-              <a:rPr lang="en-US" sz="1250" b="1" dirty="0">
-                <a:solidFill>
-                  <a:srgbClr val="141619"/>
+            <a:off x="502920" y="6400800"/>
+            <a:ext cx="1828800" cy="274320"/>
+          </a:xfrm>
+          <a:prstGeom prst="rect">
+            <a:avLst/>
+          </a:prstGeom>
+          <a:noFill/>
+          <a:ln/>
+        </p:spPr>
+        <p:txBody>
+          <a:bodyPr wrap="square" lIns="0" tIns="0" rIns="0" bIns="0" rtlCol="0" anchor="ctr"/>
+          <a:lstStyle/>
+          <a:p>
+            <a:pPr indent="0" marL="0">
+              <a:buNone/>
+            </a:pPr>
+            <a:r>
+              <a:rPr lang="en-US" sz="900" spc="200" kern="0" dirty="0">
+                <a:solidFill>
+                  <a:srgbClr val="9AA0A8"/>
                 </a:solidFill>
                 <a:latin typeface="Courier New" pitchFamily="34" charset="0"/>
                 <a:ea typeface="Courier New" pitchFamily="34" charset="-122"/>
                 <a:cs typeface="Courier New" pitchFamily="34" charset="-120"/>
               </a:rPr>
-              <a:t>Qeydə alınmış fayl</a:t>
-            </a:r>
-            <a:endParaRPr lang="en-US" sz="1250" dirty="0"/>
-          </a:p>
-        </p:txBody>
-      </p:sp>
-      <p:sp>
-        <p:nvSpPr>
-          <p:cNvPr id="7" name="Shape 5"/>
-          <p:cNvSpPr/>
-          <p:nvPr/>
-        </p:nvSpPr>
-        <p:spPr>
-          <a:xfrm>
-            <a:off x="3566160" y="4114800"/>
-            <a:ext cx="2514600" cy="438912"/>
-          </a:xfrm>
-          <a:prstGeom prst="rect">
-            <a:avLst/>
-          </a:prstGeom>
-          <a:solidFill>
-            <a:srgbClr val="FFFFFF"/>
-          </a:solidFill>
-          <a:ln w="12700">
-            <a:solidFill>
-              <a:srgbClr val="C3C2BA"/>
-            </a:solidFill>
-            <a:prstDash val="solid"/>
-          </a:ln>
-        </p:spPr>
-      </p:sp>
-      <p:sp>
-        <p:nvSpPr>
-          <p:cNvPr id="8" name="Text 6"/>
-          <p:cNvSpPr/>
-          <p:nvPr/>
-        </p:nvSpPr>
-        <p:spPr>
-          <a:xfrm>
-            <a:off x="3566160" y="4114800"/>
-            <a:ext cx="2514600" cy="438912"/>
-          </a:xfrm>
-          <a:prstGeom prst="rect">
-            <a:avLst/>
-          </a:prstGeom>
-          <a:noFill/>
-          <a:ln/>
-        </p:spPr>
-        <p:txBody>
-          <a:bodyPr wrap="square" lIns="0" tIns="0" rIns="0" bIns="0" rtlCol="0" anchor="ctr"/>
-          <a:lstStyle/>
-          <a:p>
-            <a:pPr algn="ctr" indent="0" marL="0">
-              <a:buNone/>
-            </a:pPr>
-            <a:r>
-              <a:rPr lang="en-US" sz="1250" b="1" dirty="0">
-                <a:solidFill>
-                  <a:srgbClr val="141619"/>
-                </a:solidFill>
-                <a:latin typeface="Courier New" pitchFamily="34" charset="0"/>
-                <a:ea typeface="Courier New" pitchFamily="34" charset="-122"/>
-                <a:cs typeface="Courier New" pitchFamily="34" charset="-120"/>
-              </a:rPr>
-              <a:t>Noutbuk mikrofonu</a:t>
-            </a:r>
-            <a:endParaRPr lang="en-US" sz="1250" dirty="0"/>
-          </a:p>
-        </p:txBody>
-      </p:sp>
-      <p:sp>
-        <p:nvSpPr>
-          <p:cNvPr id="9" name="Shape 7"/>
-          <p:cNvSpPr/>
-          <p:nvPr/>
-        </p:nvSpPr>
-        <p:spPr>
-          <a:xfrm>
-            <a:off x="6263640" y="4114800"/>
-            <a:ext cx="2514600" cy="438912"/>
-          </a:xfrm>
-          <a:prstGeom prst="rect">
-            <a:avLst/>
-          </a:prstGeom>
-          <a:solidFill>
-            <a:srgbClr val="FFFFFF"/>
-          </a:solidFill>
-          <a:ln w="12700">
-            <a:solidFill>
-              <a:srgbClr val="D6360F"/>
-            </a:solidFill>
-            <a:prstDash val="solid"/>
-          </a:ln>
-        </p:spPr>
-      </p:sp>
-      <p:sp>
-        <p:nvSpPr>
-          <p:cNvPr id="10" name="Text 8"/>
-          <p:cNvSpPr/>
-          <p:nvPr/>
-        </p:nvSpPr>
-        <p:spPr>
-          <a:xfrm>
-            <a:off x="6263640" y="4114800"/>
-            <a:ext cx="2514600" cy="438912"/>
-          </a:xfrm>
-          <a:prstGeom prst="rect">
-            <a:avLst/>
-          </a:prstGeom>
-          <a:noFill/>
-          <a:ln/>
-        </p:spPr>
-        <p:txBody>
-          <a:bodyPr wrap="square" lIns="0" tIns="0" rIns="0" bIns="0" rtlCol="0" anchor="ctr"/>
-          <a:lstStyle/>
-          <a:p>
-            <a:pPr algn="ctr" indent="0" marL="0">
-              <a:buNone/>
-            </a:pPr>
-            <a:r>
-              <a:rPr lang="en-US" sz="1250" b="1" dirty="0">
-                <a:solidFill>
-                  <a:srgbClr val="D6360F"/>
-                </a:solidFill>
-                <a:latin typeface="Courier New" pitchFamily="34" charset="0"/>
-                <a:ea typeface="Courier New" pitchFamily="34" charset="-122"/>
-                <a:cs typeface="Courier New" pitchFamily="34" charset="-120"/>
-              </a:rPr>
-              <a:t>Xüsusi avadanlıq</a:t>
-            </a:r>
-            <a:endParaRPr lang="en-US" sz="1250" dirty="0"/>
-          </a:p>
-        </p:txBody>
-      </p:sp>
-      <p:sp>
-        <p:nvSpPr>
-          <p:cNvPr id="11" name="Shape 9"/>
-          <p:cNvSpPr/>
-          <p:nvPr/>
-        </p:nvSpPr>
-        <p:spPr>
-          <a:xfrm>
-            <a:off x="8961120" y="4114800"/>
-            <a:ext cx="2514600" cy="438912"/>
-          </a:xfrm>
-          <a:prstGeom prst="rect">
-            <a:avLst/>
-          </a:prstGeom>
-          <a:solidFill>
-            <a:srgbClr val="FFFFFF"/>
-          </a:solidFill>
-          <a:ln w="12700">
-            <a:solidFill>
-              <a:srgbClr val="C3C2BA"/>
-            </a:solidFill>
-            <a:prstDash val="solid"/>
-          </a:ln>
-        </p:spPr>
-      </p:sp>
-      <p:sp>
-        <p:nvSpPr>
-          <p:cNvPr id="12" name="Text 10"/>
-          <p:cNvSpPr/>
-          <p:nvPr/>
-        </p:nvSpPr>
-        <p:spPr>
-          <a:xfrm>
-            <a:off x="8961120" y="4114800"/>
-            <a:ext cx="2514600" cy="438912"/>
-          </a:xfrm>
-          <a:prstGeom prst="rect">
-            <a:avLst/>
-          </a:prstGeom>
-          <a:noFill/>
-          <a:ln/>
-        </p:spPr>
-        <p:txBody>
-          <a:bodyPr wrap="square" lIns="0" tIns="0" rIns="0" bIns="0" rtlCol="0" anchor="ctr"/>
-          <a:lstStyle/>
-          <a:p>
-            <a:pPr algn="ctr" indent="0" marL="0">
-              <a:buNone/>
-            </a:pPr>
-            <a:r>
-              <a:rPr lang="en-US" sz="1250" b="1" dirty="0">
-                <a:solidFill>
-                  <a:srgbClr val="141619"/>
-                </a:solidFill>
-                <a:latin typeface="Courier New" pitchFamily="34" charset="0"/>
-                <a:ea typeface="Courier New" pitchFamily="34" charset="-122"/>
-                <a:cs typeface="Courier New" pitchFamily="34" charset="-120"/>
-              </a:rPr>
-              <a:t>Telefon (WiFi)</a:t>
-            </a:r>
-            <a:endParaRPr lang="en-US" sz="1250" dirty="0"/>
-          </a:p>
-        </p:txBody>
-      </p:sp>
-      <p:sp>
-        <p:nvSpPr>
-          <p:cNvPr id="13" name="Text 11"/>
-          <p:cNvSpPr/>
-          <p:nvPr/>
-        </p:nvSpPr>
-        <p:spPr>
-          <a:xfrm>
-            <a:off x="502920" y="6400800"/>
-            <a:ext cx="1828800" cy="274320"/>
-          </a:xfrm>
-          <a:prstGeom prst="rect">
-            <a:avLst/>
-          </a:prstGeom>
-          <a:noFill/>
-          <a:ln/>
-        </p:spPr>
-        <p:txBody>
-          <a:bodyPr wrap="square" lIns="0" tIns="0" rIns="0" bIns="0" rtlCol="0" anchor="ctr"/>
-          <a:lstStyle/>
-          <a:p>
-            <a:pPr indent="0" marL="0">
-              <a:buNone/>
-            </a:pPr>
-            <a:r>
-              <a:rPr lang="en-US" sz="900" spc="200" kern="0" dirty="0">
-                <a:solidFill>
-                  <a:srgbClr val="8E939A"/>
-                </a:solidFill>
-                <a:latin typeface="Courier New" pitchFamily="34" charset="0"/>
-                <a:ea typeface="Courier New" pitchFamily="34" charset="-122"/>
-                <a:cs typeface="Courier New" pitchFamily="34" charset="-120"/>
-              </a:rPr>
               <a:t>PULSO</a:t>
             </a:r>
             <a:endParaRPr lang="en-US" sz="900" dirty="0"/>
@@ -4260,7 +5102,7 @@
       </p:sp>
       <p:sp>
         <p:nvSpPr>
-          <p:cNvPr id="14" name="Text 12"/>
+          <p:cNvPr id="7" name="Text 5"/>
           <p:cNvSpPr/>
           <p:nvPr/>
         </p:nvSpPr>
@@ -4285,7 +5127,7 @@
             <a:r>
               <a:rPr lang="en-US" sz="900" dirty="0">
                 <a:solidFill>
-                  <a:srgbClr val="8E939A"/>
+                  <a:srgbClr val="9AA0A8"/>
                 </a:solidFill>
                 <a:latin typeface="Courier New" pitchFamily="34" charset="0"/>
                 <a:ea typeface="Courier New" pitchFamily="34" charset="-122"/>
@@ -4369,7 +5211,7 @@
                 <a:ea typeface="Courier New" pitchFamily="34" charset="-122"/>
                 <a:cs typeface="Courier New" pitchFamily="34" charset="-120"/>
               </a:rPr>
-              <a:t>BIZNES MODELI</a:t>
+              <a:t>AVADANLIQ</a:t>
             </a:r>
             <a:endParaRPr lang="en-US" sz="1200" dirty="0"/>
           </a:p>
@@ -4384,7 +5226,7 @@
         <p:spPr>
           <a:xfrm>
             <a:off x="868680" y="1188720"/>
-            <a:ext cx="10058400" cy="1371600"/>
+            <a:ext cx="9601200" cy="1463040"/>
           </a:xfrm>
           <a:prstGeom prst="rect">
             <a:avLst/>
@@ -4400,7 +5242,7 @@
               <a:buNone/>
             </a:pPr>
             <a:r>
-              <a:rPr lang="en-US" sz="2900" dirty="0">
+              <a:rPr lang="en-US" sz="3600" dirty="0">
                 <a:solidFill>
                   <a:srgbClr val="141619"/>
                 </a:solidFill>
@@ -4408,16 +5250,16 @@
                 <a:ea typeface="Cambria" pitchFamily="34" charset="-122"/>
                 <a:cs typeface="Cambria" pitchFamily="34" charset="-120"/>
               </a:rPr>
-              <a:t>Avadanlığı maya dəyərinə sat.</a:t>
-            </a:r>
-            <a:endParaRPr lang="en-US" sz="2900" dirty="0"/>
-          </a:p>
-          <a:p>
-            <a:pPr indent="0" marL="0">
-              <a:buNone/>
-            </a:pPr>
-            <a:r>
-              <a:rPr lang="en-US" sz="2900" dirty="0">
+              <a:t>20 dollardan az hissə.</a:t>
+            </a:r>
+            <a:endParaRPr lang="en-US" sz="3600" dirty="0"/>
+          </a:p>
+          <a:p>
+            <a:pPr indent="0" marL="0">
+              <a:buNone/>
+            </a:pPr>
+            <a:r>
+              <a:rPr lang="en-US" sz="3600" dirty="0">
                 <a:solidFill>
                   <a:srgbClr val="141619"/>
                 </a:solidFill>
@@ -4425,22 +5267,64 @@
                 <a:ea typeface="Cambria" pitchFamily="34" charset="-122"/>
                 <a:cs typeface="Cambria" pitchFamily="34" charset="-120"/>
               </a:rPr>
-              <a:t>İşçidən yox, proqramdan pul al.</a:t>
-            </a:r>
-            <a:endParaRPr lang="en-US" sz="2900" dirty="0"/>
-          </a:p>
-        </p:txBody>
-      </p:sp>
-      <p:sp>
-        <p:nvSpPr>
-          <p:cNvPr id="4" name="Shape 2"/>
-          <p:cNvSpPr/>
-          <p:nvPr/>
-        </p:nvSpPr>
-        <p:spPr>
-          <a:xfrm>
-            <a:off x="868680" y="2880360"/>
-            <a:ext cx="5120640" cy="1691640"/>
+              <a:t>Proqramla eyni beyin.</a:t>
+            </a:r>
+            <a:endParaRPr lang="en-US" sz="3600" dirty="0"/>
+          </a:p>
+        </p:txBody>
+      </p:sp>
+      <p:sp>
+        <p:nvSpPr>
+          <p:cNvPr id="4" name="Text 2"/>
+          <p:cNvSpPr/>
+          <p:nvPr/>
+        </p:nvSpPr>
+        <p:spPr>
+          <a:xfrm>
+            <a:off x="868680" y="2788920"/>
+            <a:ext cx="10058400" cy="914400"/>
+          </a:xfrm>
+          <a:prstGeom prst="rect">
+            <a:avLst/>
+          </a:prstGeom>
+          <a:noFill/>
+          <a:ln/>
+        </p:spPr>
+        <p:txBody>
+          <a:bodyPr wrap="square" lIns="0" tIns="0" rIns="0" bIns="0" rtlCol="0" anchor="ctr"/>
+          <a:lstStyle/>
+          <a:p>
+            <a:pPr indent="0" marL="0">
+              <a:lnSpc>
+                <a:spcPct val="130000"/>
+              </a:lnSpc>
+              <a:buNone/>
+            </a:pPr>
+            <a:r>
+              <a:rPr lang="en-US" sz="1500" dirty="0">
+                <a:solidFill>
+                  <a:srgbClr val="5B6068"/>
+                </a:solidFill>
+                <a:latin typeface="Calibri" pitchFamily="34" charset="0"/>
+                <a:ea typeface="Calibri" pitchFamily="34" charset="-122"/>
+                <a:cs typeface="Calibri" pitchFamily="34" charset="-120"/>
+              </a:rPr>
+              <a:t>Ucuz mikrofon çipi səsi tutur. Onun yerinə telefon, noutbuk və ya qeydə alınmış fayl qoşun — qalan hər şey tamamilə eyni qalır.</a:t>
+            </a:r>
+            <a:endParaRPr lang="en-US" sz="1500" dirty="0"/>
+          </a:p>
+        </p:txBody>
+      </p:sp>
+      <p:sp>
+        <p:nvSpPr>
+          <p:cNvPr id="5" name="Shape 3"/>
+          <p:cNvSpPr/>
+          <p:nvPr/>
+        </p:nvSpPr>
+        <p:spPr>
+          <a:xfrm>
+            <a:off x="868680" y="4114800"/>
+            <a:ext cx="2514600" cy="438912"/>
           </a:xfrm>
           <a:prstGeom prst="rect">
             <a:avLst/>
@@ -4458,82 +5342,40 @@
       </p:sp>
       <p:sp>
         <p:nvSpPr>
-          <p:cNvPr id="5" name="Text 3"/>
-          <p:cNvSpPr/>
-          <p:nvPr/>
-        </p:nvSpPr>
-        <p:spPr>
-          <a:xfrm>
-            <a:off x="1078992" y="3081528"/>
-            <a:ext cx="4572000" cy="256032"/>
-          </a:xfrm>
-          <a:prstGeom prst="rect">
-            <a:avLst/>
-          </a:prstGeom>
-          <a:noFill/>
-          <a:ln/>
-        </p:spPr>
-        <p:txBody>
-          <a:bodyPr wrap="square" lIns="0" tIns="0" rIns="0" bIns="0" rtlCol="0" anchor="ctr"/>
-          <a:lstStyle/>
-          <a:p>
-            <a:pPr indent="0" marL="0">
-              <a:buNone/>
-            </a:pPr>
-            <a:r>
-              <a:rPr lang="en-US" sz="1050" b="1" spc="120" kern="0" dirty="0">
-                <a:solidFill>
-                  <a:srgbClr val="8E939A"/>
+          <p:cNvPr id="6" name="Text 4"/>
+          <p:cNvSpPr/>
+          <p:nvPr/>
+        </p:nvSpPr>
+        <p:spPr>
+          <a:xfrm>
+            <a:off x="868680" y="4114800"/>
+            <a:ext cx="2514600" cy="438912"/>
+          </a:xfrm>
+          <a:prstGeom prst="rect">
+            <a:avLst/>
+          </a:prstGeom>
+          <a:noFill/>
+          <a:ln/>
+        </p:spPr>
+        <p:txBody>
+          <a:bodyPr wrap="square" lIns="0" tIns="0" rIns="0" bIns="0" rtlCol="0" anchor="ctr"/>
+          <a:lstStyle/>
+          <a:p>
+            <a:pPr algn="ctr" indent="0" marL="0">
+              <a:buNone/>
+            </a:pPr>
+            <a:r>
+              <a:rPr lang="en-US" sz="1250" b="1" dirty="0">
+                <a:solidFill>
+                  <a:srgbClr val="141619"/>
                 </a:solidFill>
                 <a:latin typeface="Courier New" pitchFamily="34" charset="0"/>
                 <a:ea typeface="Courier New" pitchFamily="34" charset="-122"/>
                 <a:cs typeface="Courier New" pitchFamily="34" charset="-120"/>
               </a:rPr>
-              <a:t>KİM ÖDƏYİR</a:t>
-            </a:r>
-            <a:endParaRPr lang="en-US" sz="1050" dirty="0"/>
-          </a:p>
-        </p:txBody>
-      </p:sp>
-      <p:sp>
-        <p:nvSpPr>
-          <p:cNvPr id="6" name="Text 4"/>
-          <p:cNvSpPr/>
-          <p:nvPr/>
-        </p:nvSpPr>
-        <p:spPr>
-          <a:xfrm>
-            <a:off x="1078992" y="3410712"/>
-            <a:ext cx="4709160" cy="1051560"/>
-          </a:xfrm>
-          <a:prstGeom prst="rect">
-            <a:avLst/>
-          </a:prstGeom>
-          <a:noFill/>
-          <a:ln/>
-        </p:spPr>
-        <p:txBody>
-          <a:bodyPr wrap="square" lIns="0" tIns="0" rIns="0" bIns="0" rtlCol="0" anchor="t"/>
-          <a:lstStyle/>
-          <a:p>
-            <a:pPr indent="0" marL="0">
-              <a:lnSpc>
-                <a:spcPct val="130000"/>
-              </a:lnSpc>
-              <a:buNone/>
-            </a:pPr>
-            <a:r>
-              <a:rPr lang="en-US" sz="1300" dirty="0">
-                <a:solidFill>
-                  <a:srgbClr val="141619"/>
-                </a:solidFill>
-                <a:latin typeface="Calibri" pitchFamily="34" charset="0"/>
-                <a:ea typeface="Calibri" pitchFamily="34" charset="-122"/>
-                <a:cs typeface="Calibri" pitchFamily="34" charset="-120"/>
-              </a:rPr>
-              <a:t>Səhiyyə işçisi yox — onların büdcəsi yoxdur. Alıcı onları artıq maliyyələşdirən QHT və ya nazirlikdir.</a:t>
-            </a:r>
-            <a:endParaRPr lang="en-US" sz="1300" dirty="0"/>
+              <a:t>Qeydə alınmış fayl</a:t>
+            </a:r>
+            <a:endParaRPr lang="en-US" sz="1250" dirty="0"/>
           </a:p>
         </p:txBody>
       </p:sp>
@@ -4545,8 +5387,8 @@
         </p:nvSpPr>
         <p:spPr>
           <a:xfrm>
-            <a:off x="6217920" y="2880360"/>
-            <a:ext cx="5120640" cy="1691640"/>
+            <a:off x="3566160" y="4114800"/>
+            <a:ext cx="2514600" cy="438912"/>
           </a:xfrm>
           <a:prstGeom prst="rect">
             <a:avLst/>
@@ -4554,7 +5396,71 @@
           <a:solidFill>
             <a:srgbClr val="FFFFFF"/>
           </a:solidFill>
-          <a:ln w="19050">
+          <a:ln w="12700">
+            <a:solidFill>
+              <a:srgbClr val="C3C2BA"/>
+            </a:solidFill>
+            <a:prstDash val="solid"/>
+          </a:ln>
+        </p:spPr>
+      </p:sp>
+      <p:sp>
+        <p:nvSpPr>
+          <p:cNvPr id="8" name="Text 6"/>
+          <p:cNvSpPr/>
+          <p:nvPr/>
+        </p:nvSpPr>
+        <p:spPr>
+          <a:xfrm>
+            <a:off x="3566160" y="4114800"/>
+            <a:ext cx="2514600" cy="438912"/>
+          </a:xfrm>
+          <a:prstGeom prst="rect">
+            <a:avLst/>
+          </a:prstGeom>
+          <a:noFill/>
+          <a:ln/>
+        </p:spPr>
+        <p:txBody>
+          <a:bodyPr wrap="square" lIns="0" tIns="0" rIns="0" bIns="0" rtlCol="0" anchor="ctr"/>
+          <a:lstStyle/>
+          <a:p>
+            <a:pPr algn="ctr" indent="0" marL="0">
+              <a:buNone/>
+            </a:pPr>
+            <a:r>
+              <a:rPr lang="en-US" sz="1250" b="1" dirty="0">
+                <a:solidFill>
+                  <a:srgbClr val="141619"/>
+                </a:solidFill>
+                <a:latin typeface="Courier New" pitchFamily="34" charset="0"/>
+                <a:ea typeface="Courier New" pitchFamily="34" charset="-122"/>
+                <a:cs typeface="Courier New" pitchFamily="34" charset="-120"/>
+              </a:rPr>
+              <a:t>Noutbuk mikrofonu</a:t>
+            </a:r>
+            <a:endParaRPr lang="en-US" sz="1250" dirty="0"/>
+          </a:p>
+        </p:txBody>
+      </p:sp>
+      <p:sp>
+        <p:nvSpPr>
+          <p:cNvPr id="9" name="Shape 7"/>
+          <p:cNvSpPr/>
+          <p:nvPr/>
+        </p:nvSpPr>
+        <p:spPr>
+          <a:xfrm>
+            <a:off x="6263640" y="4114800"/>
+            <a:ext cx="2514600" cy="438912"/>
+          </a:xfrm>
+          <a:prstGeom prst="rect">
+            <a:avLst/>
+          </a:prstGeom>
+          <a:solidFill>
+            <a:srgbClr val="FFFFFF"/>
+          </a:solidFill>
+          <a:ln w="12700">
             <a:solidFill>
               <a:srgbClr val="D6360F"/>
             </a:solidFill>
@@ -4564,30 +5470,30 @@
       </p:sp>
       <p:sp>
         <p:nvSpPr>
-          <p:cNvPr id="8" name="Text 6"/>
-          <p:cNvSpPr/>
-          <p:nvPr/>
-        </p:nvSpPr>
-        <p:spPr>
-          <a:xfrm>
-            <a:off x="6428232" y="3081528"/>
-            <a:ext cx="4572000" cy="256032"/>
-          </a:xfrm>
-          <a:prstGeom prst="rect">
-            <a:avLst/>
-          </a:prstGeom>
-          <a:noFill/>
-          <a:ln/>
-        </p:spPr>
-        <p:txBody>
-          <a:bodyPr wrap="square" lIns="0" tIns="0" rIns="0" bIns="0" rtlCol="0" anchor="ctr"/>
-          <a:lstStyle/>
-          <a:p>
-            <a:pPr indent="0" marL="0">
-              <a:buNone/>
-            </a:pPr>
-            <a:r>
-              <a:rPr lang="en-US" sz="1050" b="1" spc="120" kern="0" dirty="0">
+          <p:cNvPr id="10" name="Text 8"/>
+          <p:cNvSpPr/>
+          <p:nvPr/>
+        </p:nvSpPr>
+        <p:spPr>
+          <a:xfrm>
+            <a:off x="6263640" y="4114800"/>
+            <a:ext cx="2514600" cy="438912"/>
+          </a:xfrm>
+          <a:prstGeom prst="rect">
+            <a:avLst/>
+          </a:prstGeom>
+          <a:noFill/>
+          <a:ln/>
+        </p:spPr>
+        <p:txBody>
+          <a:bodyPr wrap="square" lIns="0" tIns="0" rIns="0" bIns="0" rtlCol="0" anchor="ctr"/>
+          <a:lstStyle/>
+          <a:p>
+            <a:pPr algn="ctr" indent="0" marL="0">
+              <a:buNone/>
+            </a:pPr>
+            <a:r>
+              <a:rPr lang="en-US" sz="1250" b="1" dirty="0">
                 <a:solidFill>
                   <a:srgbClr val="D6360F"/>
                 </a:solidFill>
@@ -4595,129 +5501,109 @@
                 <a:ea typeface="Courier New" pitchFamily="34" charset="-122"/>
                 <a:cs typeface="Courier New" pitchFamily="34" charset="-120"/>
               </a:rPr>
-              <a:t>NECƏ PUL QAZANIRIQ</a:t>
-            </a:r>
-            <a:endParaRPr lang="en-US" sz="1050" dirty="0"/>
-          </a:p>
-        </p:txBody>
-      </p:sp>
-      <p:sp>
-        <p:nvSpPr>
-          <p:cNvPr id="9" name="Text 7"/>
-          <p:cNvSpPr/>
-          <p:nvPr/>
-        </p:nvSpPr>
-        <p:spPr>
-          <a:xfrm>
-            <a:off x="6428232" y="3410712"/>
-            <a:ext cx="4709160" cy="1051560"/>
-          </a:xfrm>
-          <a:prstGeom prst="rect">
-            <a:avLst/>
-          </a:prstGeom>
-          <a:noFill/>
-          <a:ln/>
-        </p:spPr>
-        <p:txBody>
-          <a:bodyPr wrap="square" lIns="0" tIns="0" rIns="0" bIns="0" rtlCol="0" anchor="t"/>
-          <a:lstStyle/>
-          <a:p>
-            <a:pPr indent="0" marL="0">
-              <a:lnSpc>
-                <a:spcPct val="130000"/>
-              </a:lnSpc>
-              <a:buNone/>
-            </a:pPr>
-            <a:r>
-              <a:rPr lang="en-US" sz="1300" dirty="0">
+              <a:t>Xüsusi avadanlıq</a:t>
+            </a:r>
+            <a:endParaRPr lang="en-US" sz="1250" dirty="0"/>
+          </a:p>
+        </p:txBody>
+      </p:sp>
+      <p:sp>
+        <p:nvSpPr>
+          <p:cNvPr id="11" name="Shape 9"/>
+          <p:cNvSpPr/>
+          <p:nvPr/>
+        </p:nvSpPr>
+        <p:spPr>
+          <a:xfrm>
+            <a:off x="8961120" y="4114800"/>
+            <a:ext cx="2514600" cy="438912"/>
+          </a:xfrm>
+          <a:prstGeom prst="rect">
+            <a:avLst/>
+          </a:prstGeom>
+          <a:solidFill>
+            <a:srgbClr val="FFFFFF"/>
+          </a:solidFill>
+          <a:ln w="12700">
+            <a:solidFill>
+              <a:srgbClr val="C3C2BA"/>
+            </a:solidFill>
+            <a:prstDash val="solid"/>
+          </a:ln>
+        </p:spPr>
+      </p:sp>
+      <p:sp>
+        <p:nvSpPr>
+          <p:cNvPr id="12" name="Text 10"/>
+          <p:cNvSpPr/>
+          <p:nvPr/>
+        </p:nvSpPr>
+        <p:spPr>
+          <a:xfrm>
+            <a:off x="8961120" y="4114800"/>
+            <a:ext cx="2514600" cy="438912"/>
+          </a:xfrm>
+          <a:prstGeom prst="rect">
+            <a:avLst/>
+          </a:prstGeom>
+          <a:noFill/>
+          <a:ln/>
+        </p:spPr>
+        <p:txBody>
+          <a:bodyPr wrap="square" lIns="0" tIns="0" rIns="0" bIns="0" rtlCol="0" anchor="ctr"/>
+          <a:lstStyle/>
+          <a:p>
+            <a:pPr algn="ctr" indent="0" marL="0">
+              <a:buNone/>
+            </a:pPr>
+            <a:r>
+              <a:rPr lang="en-US" sz="1250" b="1" dirty="0">
                 <a:solidFill>
                   <a:srgbClr val="141619"/>
-                </a:solidFill>
-                <a:latin typeface="Calibri" pitchFamily="34" charset="0"/>
-                <a:ea typeface="Calibri" pitchFamily="34" charset="-122"/>
-                <a:cs typeface="Calibri" pitchFamily="34" charset="-120"/>
-              </a:rPr>
-              <a:t>Maya dəyərinə yaxın avadanlıq, geniş əhatə. QHT və ya nazirliyə hesablanan proqram səviyyəli abunəlik.</a:t>
-            </a:r>
-            <a:endParaRPr lang="en-US" sz="1300" dirty="0"/>
-          </a:p>
-        </p:txBody>
-      </p:sp>
-      <p:sp>
-        <p:nvSpPr>
-          <p:cNvPr id="10" name="Text 8"/>
-          <p:cNvSpPr/>
-          <p:nvPr/>
-        </p:nvSpPr>
-        <p:spPr>
-          <a:xfrm>
-            <a:off x="868680" y="4892040"/>
-            <a:ext cx="10469880" cy="731520"/>
-          </a:xfrm>
-          <a:prstGeom prst="rect">
-            <a:avLst/>
-          </a:prstGeom>
-          <a:noFill/>
-          <a:ln/>
-        </p:spPr>
-        <p:txBody>
-          <a:bodyPr wrap="square" lIns="0" tIns="0" rIns="0" bIns="0" rtlCol="0" anchor="ctr"/>
-          <a:lstStyle/>
-          <a:p>
-            <a:pPr indent="0" marL="0">
-              <a:lnSpc>
-                <a:spcPct val="130000"/>
-              </a:lnSpc>
-              <a:buNone/>
-            </a:pPr>
-            <a:r>
-              <a:rPr lang="en-US" sz="1450" i="1" dirty="0">
-                <a:solidFill>
-                  <a:srgbClr val="141619"/>
-                </a:solidFill>
-                <a:latin typeface="Cambria" pitchFamily="34" charset="0"/>
-                <a:ea typeface="Cambria" pitchFamily="34" charset="-122"/>
-                <a:cs typeface="Cambria" pitchFamily="34" charset="-120"/>
-              </a:rPr>
-              <a:t>3,8 milyon icma səhiyyə işçisi, 98+ ölkə (ÜST) — “tibbi cihaz deyil” statusu bizə onlara indi çatmaq imkanı verir, üç ildən sonra yox.</a:t>
-            </a:r>
-            <a:endParaRPr lang="en-US" sz="1450" dirty="0"/>
-          </a:p>
-        </p:txBody>
-      </p:sp>
-      <p:sp>
-        <p:nvSpPr>
-          <p:cNvPr id="11" name="Text 9"/>
-          <p:cNvSpPr/>
-          <p:nvPr/>
-        </p:nvSpPr>
-        <p:spPr>
-          <a:xfrm>
-            <a:off x="502920" y="6400800"/>
-            <a:ext cx="1828800" cy="274320"/>
-          </a:xfrm>
-          <a:prstGeom prst="rect">
-            <a:avLst/>
-          </a:prstGeom>
-          <a:noFill/>
-          <a:ln/>
-        </p:spPr>
-        <p:txBody>
-          <a:bodyPr wrap="square" lIns="0" tIns="0" rIns="0" bIns="0" rtlCol="0" anchor="ctr"/>
-          <a:lstStyle/>
-          <a:p>
-            <a:pPr indent="0" marL="0">
-              <a:buNone/>
-            </a:pPr>
-            <a:r>
-              <a:rPr lang="en-US" sz="900" spc="200" kern="0" dirty="0">
-                <a:solidFill>
-                  <a:srgbClr val="8E939A"/>
                 </a:solidFill>
                 <a:latin typeface="Courier New" pitchFamily="34" charset="0"/>
                 <a:ea typeface="Courier New" pitchFamily="34" charset="-122"/>
                 <a:cs typeface="Courier New" pitchFamily="34" charset="-120"/>
               </a:rPr>
+              <a:t>Telefon (WiFi)</a:t>
+            </a:r>
+            <a:endParaRPr lang="en-US" sz="1250" dirty="0"/>
+          </a:p>
+        </p:txBody>
+      </p:sp>
+      <p:sp>
+        <p:nvSpPr>
+          <p:cNvPr id="13" name="Text 11"/>
+          <p:cNvSpPr/>
+          <p:nvPr/>
+        </p:nvSpPr>
+        <p:spPr>
+          <a:xfrm>
+            <a:off x="502920" y="6400800"/>
+            <a:ext cx="1828800" cy="274320"/>
+          </a:xfrm>
+          <a:prstGeom prst="rect">
+            <a:avLst/>
+          </a:prstGeom>
+          <a:noFill/>
+          <a:ln/>
+        </p:spPr>
+        <p:txBody>
+          <a:bodyPr wrap="square" lIns="0" tIns="0" rIns="0" bIns="0" rtlCol="0" anchor="ctr"/>
+          <a:lstStyle/>
+          <a:p>
+            <a:pPr indent="0" marL="0">
+              <a:buNone/>
+            </a:pPr>
+            <a:r>
+              <a:rPr lang="en-US" sz="900" spc="200" kern="0" dirty="0">
+                <a:solidFill>
+                  <a:srgbClr val="8E939A"/>
+                </a:solidFill>
+                <a:latin typeface="Courier New" pitchFamily="34" charset="0"/>
+                <a:ea typeface="Courier New" pitchFamily="34" charset="-122"/>
+                <a:cs typeface="Courier New" pitchFamily="34" charset="-120"/>
+              </a:rPr>
               <a:t>PULSO</a:t>
             </a:r>
             <a:endParaRPr lang="en-US" sz="900" dirty="0"/>
@@ -4726,7 +5612,7 @@
       </p:sp>
       <p:sp>
         <p:nvSpPr>
-          <p:cNvPr id="12" name="Text 10"/>
+          <p:cNvPr id="14" name="Text 12"/>
           <p:cNvSpPr/>
           <p:nvPr/>
         </p:nvSpPr>
@@ -4811,7 +5697,7 @@
         <p:spPr>
           <a:xfrm>
             <a:off x="868680" y="640080"/>
-            <a:ext cx="8229600" cy="292608"/>
+            <a:ext cx="5486400" cy="292608"/>
           </a:xfrm>
           <a:prstGeom prst="rect">
             <a:avLst/>
@@ -4835,7 +5721,7 @@
                 <a:ea typeface="Courier New" pitchFamily="34" charset="-122"/>
                 <a:cs typeface="Courier New" pitchFamily="34" charset="-120"/>
               </a:rPr>
-              <a:t>QIYMƏT — PLANDIR, CANLI ÖDƏNIŞ DEYIL</a:t>
+              <a:t>BIZNES MODELI</a:t>
             </a:r>
             <a:endParaRPr lang="en-US" sz="1200" dirty="0"/>
           </a:p>
@@ -4850,7 +5736,7 @@
         <p:spPr>
           <a:xfrm>
             <a:off x="868680" y="1188720"/>
-            <a:ext cx="8229600" cy="1371600"/>
+            <a:ext cx="10058400" cy="1371600"/>
           </a:xfrm>
           <a:prstGeom prst="rect">
             <a:avLst/>
@@ -4866,7 +5752,7 @@
               <a:buNone/>
             </a:pPr>
             <a:r>
-              <a:rPr lang="en-US" sz="3000" dirty="0">
+              <a:rPr lang="en-US" sz="2900" dirty="0">
                 <a:solidFill>
                   <a:srgbClr val="141619"/>
                 </a:solidFill>
@@ -4874,16 +5760,16 @@
                 <a:ea typeface="Cambria" pitchFamily="34" charset="-122"/>
                 <a:cs typeface="Cambria" pitchFamily="34" charset="-120"/>
               </a:rPr>
-              <a:t>Marja üçün yox,</a:t>
-            </a:r>
-            <a:endParaRPr lang="en-US" sz="3000" dirty="0"/>
-          </a:p>
-          <a:p>
-            <a:pPr indent="0" marL="0">
-              <a:buNone/>
-            </a:pPr>
-            <a:r>
-              <a:rPr lang="en-US" sz="3000" dirty="0">
+              <a:t>Avadanlığı maya dəyərinə sat.</a:t>
+            </a:r>
+            <a:endParaRPr lang="en-US" sz="2900" dirty="0"/>
+          </a:p>
+          <a:p>
+            <a:pPr indent="0" marL="0">
+              <a:buNone/>
+            </a:pPr>
+            <a:r>
+              <a:rPr lang="en-US" sz="2900" dirty="0">
                 <a:solidFill>
                   <a:srgbClr val="141619"/>
                 </a:solidFill>
@@ -4891,9 +5777,9 @@
                 <a:ea typeface="Cambria" pitchFamily="34" charset="-122"/>
                 <a:cs typeface="Cambria" pitchFamily="34" charset="-120"/>
               </a:rPr>
-              <a:t>qəbul üçün qiymətləndirilib.</a:t>
-            </a:r>
-            <a:endParaRPr lang="en-US" sz="3000" dirty="0"/>
+              <a:t>İşçidən yox, proqramdan pul al.</a:t>
+            </a:r>
+            <a:endParaRPr lang="en-US" sz="2900" dirty="0"/>
           </a:p>
         </p:txBody>
       </p:sp>
@@ -4906,7 +5792,7 @@
         <p:spPr>
           <a:xfrm>
             <a:off x="868680" y="2880360"/>
-            <a:ext cx="3364992" cy="2743200"/>
+            <a:ext cx="5120640" cy="1691640"/>
           </a:xfrm>
           <a:prstGeom prst="rect">
             <a:avLst/>
@@ -4930,24 +5816,24 @@
         </p:nvSpPr>
         <p:spPr>
           <a:xfrm>
-            <a:off x="1069848" y="3063240"/>
-            <a:ext cx="2962656" cy="256032"/>
-          </a:xfrm>
-          <a:prstGeom prst="rect">
-            <a:avLst/>
-          </a:prstGeom>
-          <a:noFill/>
-          <a:ln/>
-        </p:spPr>
-        <p:txBody>
-          <a:bodyPr wrap="square" lIns="0" tIns="0" rIns="0" bIns="0" rtlCol="0" anchor="ctr"/>
-          <a:lstStyle/>
-          <a:p>
-            <a:pPr indent="0" marL="0">
-              <a:buNone/>
-            </a:pPr>
-            <a:r>
-              <a:rPr lang="en-US" sz="1100" b="1" spc="100" kern="0" dirty="0">
+            <a:off x="1078992" y="3081528"/>
+            <a:ext cx="4572000" cy="256032"/>
+          </a:xfrm>
+          <a:prstGeom prst="rect">
+            <a:avLst/>
+          </a:prstGeom>
+          <a:noFill/>
+          <a:ln/>
+        </p:spPr>
+        <p:txBody>
+          <a:bodyPr wrap="square" lIns="0" tIns="0" rIns="0" bIns="0" rtlCol="0" anchor="ctr"/>
+          <a:lstStyle/>
+          <a:p>
+            <a:pPr indent="0" marL="0">
+              <a:buNone/>
+            </a:pPr>
+            <a:r>
+              <a:rPr lang="en-US" sz="1050" b="1" spc="120" kern="0" dirty="0">
                 <a:solidFill>
                   <a:srgbClr val="8E939A"/>
                 </a:solidFill>
@@ -4955,9 +5841,9 @@
                 <a:ea typeface="Courier New" pitchFamily="34" charset="-122"/>
                 <a:cs typeface="Courier New" pitchFamily="34" charset="-120"/>
               </a:rPr>
-              <a:t>PILOT</a:t>
-            </a:r>
-            <a:endParaRPr lang="en-US" sz="1100" dirty="0"/>
+              <a:t>KİM ÖDƏYİR</a:t>
+            </a:r>
+            <a:endParaRPr lang="en-US" sz="1050" dirty="0"/>
           </a:p>
         </p:txBody>
       </p:sp>
@@ -4969,156 +5855,50 @@
         </p:nvSpPr>
         <p:spPr>
           <a:xfrm>
-            <a:off x="1069848" y="3374136"/>
-            <a:ext cx="2962656" cy="457200"/>
-          </a:xfrm>
-          <a:prstGeom prst="rect">
-            <a:avLst/>
-          </a:prstGeom>
-          <a:noFill/>
-          <a:ln/>
-        </p:spPr>
-        <p:txBody>
-          <a:bodyPr wrap="square" lIns="0" tIns="0" rIns="0" bIns="0" rtlCol="0" anchor="ctr"/>
-          <a:lstStyle/>
-          <a:p>
-            <a:pPr indent="0" marL="0">
-              <a:buNone/>
-            </a:pPr>
-            <a:r>
-              <a:rPr lang="en-US" sz="2300" dirty="0">
+            <a:off x="1078992" y="3410712"/>
+            <a:ext cx="4709160" cy="1051560"/>
+          </a:xfrm>
+          <a:prstGeom prst="rect">
+            <a:avLst/>
+          </a:prstGeom>
+          <a:noFill/>
+          <a:ln/>
+        </p:spPr>
+        <p:txBody>
+          <a:bodyPr wrap="square" lIns="0" tIns="0" rIns="0" bIns="0" rtlCol="0" anchor="t"/>
+          <a:lstStyle/>
+          <a:p>
+            <a:pPr indent="0" marL="0">
+              <a:lnSpc>
+                <a:spcPct val="130000"/>
+              </a:lnSpc>
+              <a:buNone/>
+            </a:pPr>
+            <a:r>
+              <a:rPr lang="en-US" sz="1300" dirty="0">
                 <a:solidFill>
                   <a:srgbClr val="141619"/>
-                </a:solidFill>
-                <a:latin typeface="Cambria" pitchFamily="34" charset="0"/>
-                <a:ea typeface="Cambria" pitchFamily="34" charset="-122"/>
-                <a:cs typeface="Cambria" pitchFamily="34" charset="-120"/>
-              </a:rPr>
-              <a:t>~45–60 $</a:t>
-            </a:r>
-            <a:endParaRPr lang="en-US" sz="2300" dirty="0"/>
-          </a:p>
-        </p:txBody>
-      </p:sp>
-      <p:sp>
-        <p:nvSpPr>
-          <p:cNvPr id="7" name="Text 5"/>
-          <p:cNvSpPr/>
-          <p:nvPr/>
-        </p:nvSpPr>
-        <p:spPr>
-          <a:xfrm>
-            <a:off x="1069848" y="3831336"/>
-            <a:ext cx="2962656" cy="320040"/>
-          </a:xfrm>
-          <a:prstGeom prst="rect">
-            <a:avLst/>
-          </a:prstGeom>
-          <a:noFill/>
-          <a:ln/>
-        </p:spPr>
-        <p:txBody>
-          <a:bodyPr wrap="square" lIns="0" tIns="0" rIns="0" bIns="0" rtlCol="0" anchor="t"/>
-          <a:lstStyle/>
-          <a:p>
-            <a:pPr indent="0" marL="0">
-              <a:buNone/>
-            </a:pPr>
-            <a:r>
-              <a:rPr lang="en-US" sz="1000" i="1" dirty="0">
-                <a:solidFill>
-                  <a:srgbClr val="5B6068"/>
                 </a:solidFill>
                 <a:latin typeface="Calibri" pitchFamily="34" charset="0"/>
                 <a:ea typeface="Calibri" pitchFamily="34" charset="-122"/>
                 <a:cs typeface="Calibri" pitchFamily="34" charset="-120"/>
               </a:rPr>
-              <a:t>hər dəst, maya dəyərinə yaxın</a:t>
-            </a:r>
-            <a:endParaRPr lang="en-US" sz="1000" dirty="0"/>
-          </a:p>
-        </p:txBody>
-      </p:sp>
-      <p:sp>
-        <p:nvSpPr>
-          <p:cNvPr id="8" name="Text 6"/>
-          <p:cNvSpPr/>
-          <p:nvPr/>
-        </p:nvSpPr>
-        <p:spPr>
-          <a:xfrm>
-            <a:off x="1069848" y="4297680"/>
-            <a:ext cx="2962656" cy="1188720"/>
-          </a:xfrm>
-          <a:prstGeom prst="rect">
-            <a:avLst/>
-          </a:prstGeom>
-          <a:noFill/>
-          <a:ln/>
-        </p:spPr>
-        <p:txBody>
-          <a:bodyPr wrap="square" lIns="0" tIns="0" rIns="0" bIns="0" rtlCol="0" anchor="t"/>
-          <a:lstStyle/>
-          <a:p>
-            <a:pPr marL="342900" indent="-342900">
-              <a:lnSpc>
-                <a:spcPct val="120000"/>
-              </a:lnSpc>
-              <a:spcAft>
-                <a:spcPts val="800"/>
-              </a:spcAft>
-              <a:buSzPct val="100000"/>
-              <a:buChar char="•"/>
-            </a:pPr>
-            <a:r>
-              <a:rPr lang="en-US" sz="1100" dirty="0">
-                <a:solidFill>
-                  <a:srgbClr val="141619"/>
-                </a:solidFill>
-                <a:latin typeface="Calibri" pitchFamily="34" charset="0"/>
-                <a:ea typeface="Calibri" pitchFamily="34" charset="-122"/>
-                <a:cs typeface="Calibri" pitchFamily="34" charset="-120"/>
-              </a:rPr>
-              <a:t>Bir avadanlıq dəsti</a:t>
-            </a:r>
-            <a:endParaRPr lang="en-US" sz="1100" dirty="0"/>
-          </a:p>
-          <a:p>
-            <a:pPr marL="342900" indent="-342900">
-              <a:lnSpc>
-                <a:spcPct val="120000"/>
-              </a:lnSpc>
-              <a:spcAft>
-                <a:spcPts val="800"/>
-              </a:spcAft>
-              <a:buSzPct val="100000"/>
-              <a:buChar char="•"/>
-            </a:pPr>
-            <a:r>
-              <a:rPr lang="en-US" sz="1100" dirty="0">
-                <a:solidFill>
-                  <a:srgbClr val="141619"/>
-                </a:solidFill>
-                <a:latin typeface="Calibri" pitchFamily="34" charset="0"/>
-                <a:ea typeface="Calibri" pitchFamily="34" charset="-122"/>
-                <a:cs typeface="Calibri" pitchFamily="34" charset="-120"/>
-              </a:rPr>
-              <a:t>Bir məntəqə sınamaq üçün</a:t>
-            </a:r>
-            <a:endParaRPr lang="en-US" sz="1100" dirty="0"/>
-          </a:p>
-        </p:txBody>
-      </p:sp>
-      <p:sp>
-        <p:nvSpPr>
-          <p:cNvPr id="9" name="Shape 7"/>
-          <p:cNvSpPr/>
-          <p:nvPr/>
-        </p:nvSpPr>
-        <p:spPr>
-          <a:xfrm>
-            <a:off x="4480560" y="2880360"/>
-            <a:ext cx="3364992" cy="2743200"/>
+              <a:t>Səhiyyə işçisi yox — onların büdcəsi yoxdur. Alıcı onları artıq maliyyələşdirən QHT və ya nazirlikdir.</a:t>
+            </a:r>
+            <a:endParaRPr lang="en-US" sz="1300" dirty="0"/>
+          </a:p>
+        </p:txBody>
+      </p:sp>
+      <p:sp>
+        <p:nvSpPr>
+          <p:cNvPr id="7" name="Shape 5"/>
+          <p:cNvSpPr/>
+          <p:nvPr/>
+        </p:nvSpPr>
+        <p:spPr>
+          <a:xfrm>
+            <a:off x="6217920" y="2880360"/>
+            <a:ext cx="5120640" cy="1691640"/>
           </a:xfrm>
           <a:prstGeom prst="rect">
             <a:avLst/>
@@ -5136,30 +5916,30 @@
       </p:sp>
       <p:sp>
         <p:nvSpPr>
-          <p:cNvPr id="10" name="Text 8"/>
-          <p:cNvSpPr/>
-          <p:nvPr/>
-        </p:nvSpPr>
-        <p:spPr>
-          <a:xfrm>
-            <a:off x="4681728" y="3063240"/>
-            <a:ext cx="2962656" cy="256032"/>
-          </a:xfrm>
-          <a:prstGeom prst="rect">
-            <a:avLst/>
-          </a:prstGeom>
-          <a:noFill/>
-          <a:ln/>
-        </p:spPr>
-        <p:txBody>
-          <a:bodyPr wrap="square" lIns="0" tIns="0" rIns="0" bIns="0" rtlCol="0" anchor="ctr"/>
-          <a:lstStyle/>
-          <a:p>
-            <a:pPr indent="0" marL="0">
-              <a:buNone/>
-            </a:pPr>
-            <a:r>
-              <a:rPr lang="en-US" sz="1100" b="1" spc="100" kern="0" dirty="0">
+          <p:cNvPr id="8" name="Text 6"/>
+          <p:cNvSpPr/>
+          <p:nvPr/>
+        </p:nvSpPr>
+        <p:spPr>
+          <a:xfrm>
+            <a:off x="6428232" y="3081528"/>
+            <a:ext cx="4572000" cy="256032"/>
+          </a:xfrm>
+          <a:prstGeom prst="rect">
+            <a:avLst/>
+          </a:prstGeom>
+          <a:noFill/>
+          <a:ln/>
+        </p:spPr>
+        <p:txBody>
+          <a:bodyPr wrap="square" lIns="0" tIns="0" rIns="0" bIns="0" rtlCol="0" anchor="ctr"/>
+          <a:lstStyle/>
+          <a:p>
+            <a:pPr indent="0" marL="0">
+              <a:buNone/>
+            </a:pPr>
+            <a:r>
+              <a:rPr lang="en-US" sz="1050" b="1" spc="120" kern="0" dirty="0">
                 <a:solidFill>
                   <a:srgbClr val="D6360F"/>
                 </a:solidFill>
@@ -5167,38 +5947,83 @@
                 <a:ea typeface="Courier New" pitchFamily="34" charset="-122"/>
                 <a:cs typeface="Courier New" pitchFamily="34" charset="-120"/>
               </a:rPr>
-              <a:t>PROQRAM</a:t>
-            </a:r>
-            <a:endParaRPr lang="en-US" sz="1100" dirty="0"/>
-          </a:p>
-        </p:txBody>
-      </p:sp>
-      <p:sp>
-        <p:nvSpPr>
-          <p:cNvPr id="11" name="Text 9"/>
-          <p:cNvSpPr/>
-          <p:nvPr/>
-        </p:nvSpPr>
-        <p:spPr>
-          <a:xfrm>
-            <a:off x="4681728" y="3374136"/>
-            <a:ext cx="2962656" cy="457200"/>
-          </a:xfrm>
-          <a:prstGeom prst="rect">
-            <a:avLst/>
-          </a:prstGeom>
-          <a:noFill/>
-          <a:ln/>
-        </p:spPr>
-        <p:txBody>
-          <a:bodyPr wrap="square" lIns="0" tIns="0" rIns="0" bIns="0" rtlCol="0" anchor="ctr"/>
-          <a:lstStyle/>
-          <a:p>
-            <a:pPr indent="0" marL="0">
-              <a:buNone/>
-            </a:pPr>
-            <a:r>
-              <a:rPr lang="en-US" sz="2300" dirty="0">
+              <a:t>NECƏ PUL QAZANIRIQ</a:t>
+            </a:r>
+            <a:endParaRPr lang="en-US" sz="1050" dirty="0"/>
+          </a:p>
+        </p:txBody>
+      </p:sp>
+      <p:sp>
+        <p:nvSpPr>
+          <p:cNvPr id="9" name="Text 7"/>
+          <p:cNvSpPr/>
+          <p:nvPr/>
+        </p:nvSpPr>
+        <p:spPr>
+          <a:xfrm>
+            <a:off x="6428232" y="3410712"/>
+            <a:ext cx="4709160" cy="1051560"/>
+          </a:xfrm>
+          <a:prstGeom prst="rect">
+            <a:avLst/>
+          </a:prstGeom>
+          <a:noFill/>
+          <a:ln/>
+        </p:spPr>
+        <p:txBody>
+          <a:bodyPr wrap="square" lIns="0" tIns="0" rIns="0" bIns="0" rtlCol="0" anchor="t"/>
+          <a:lstStyle/>
+          <a:p>
+            <a:pPr indent="0" marL="0">
+              <a:lnSpc>
+                <a:spcPct val="130000"/>
+              </a:lnSpc>
+              <a:buNone/>
+            </a:pPr>
+            <a:r>
+              <a:rPr lang="en-US" sz="1300" dirty="0">
+                <a:solidFill>
+                  <a:srgbClr val="141619"/>
+                </a:solidFill>
+                <a:latin typeface="Calibri" pitchFamily="34" charset="0"/>
+                <a:ea typeface="Calibri" pitchFamily="34" charset="-122"/>
+                <a:cs typeface="Calibri" pitchFamily="34" charset="-120"/>
+              </a:rPr>
+              <a:t>Maya dəyərinə yaxın avadanlıq, geniş əhatə. QHT və ya nazirliyə hesablanan proqram səviyyəli abunəlik.</a:t>
+            </a:r>
+            <a:endParaRPr lang="en-US" sz="1300" dirty="0"/>
+          </a:p>
+        </p:txBody>
+      </p:sp>
+      <p:sp>
+        <p:nvSpPr>
+          <p:cNvPr id="10" name="Text 8"/>
+          <p:cNvSpPr/>
+          <p:nvPr/>
+        </p:nvSpPr>
+        <p:spPr>
+          <a:xfrm>
+            <a:off x="868680" y="4892040"/>
+            <a:ext cx="10469880" cy="731520"/>
+          </a:xfrm>
+          <a:prstGeom prst="rect">
+            <a:avLst/>
+          </a:prstGeom>
+          <a:noFill/>
+          <a:ln/>
+        </p:spPr>
+        <p:txBody>
+          <a:bodyPr wrap="square" lIns="0" tIns="0" rIns="0" bIns="0" rtlCol="0" anchor="ctr"/>
+          <a:lstStyle/>
+          <a:p>
+            <a:pPr indent="0" marL="0">
+              <a:lnSpc>
+                <a:spcPct val="130000"/>
+              </a:lnSpc>
+              <a:buNone/>
+            </a:pPr>
+            <a:r>
+              <a:rPr lang="en-US" sz="1450" i="1" dirty="0">
                 <a:solidFill>
                   <a:srgbClr val="141619"/>
                 </a:solidFill>
@@ -5206,172 +6031,38 @@
                 <a:ea typeface="Cambria" pitchFamily="34" charset="-122"/>
                 <a:cs typeface="Cambria" pitchFamily="34" charset="-120"/>
               </a:rPr>
-              <a:t>Fərdi / regional</a:t>
-            </a:r>
-            <a:endParaRPr lang="en-US" sz="2300" dirty="0"/>
-          </a:p>
-        </p:txBody>
-      </p:sp>
-      <p:sp>
-        <p:nvSpPr>
-          <p:cNvPr id="12" name="Text 10"/>
-          <p:cNvSpPr/>
-          <p:nvPr/>
-        </p:nvSpPr>
-        <p:spPr>
-          <a:xfrm>
-            <a:off x="4681728" y="3831336"/>
-            <a:ext cx="2962656" cy="320040"/>
-          </a:xfrm>
-          <a:prstGeom prst="rect">
-            <a:avLst/>
-          </a:prstGeom>
-          <a:noFill/>
-          <a:ln/>
-        </p:spPr>
-        <p:txBody>
-          <a:bodyPr wrap="square" lIns="0" tIns="0" rIns="0" bIns="0" rtlCol="0" anchor="t"/>
-          <a:lstStyle/>
-          <a:p>
-            <a:pPr indent="0" marL="0">
-              <a:buNone/>
-            </a:pPr>
-            <a:r>
-              <a:rPr lang="en-US" sz="1000" i="1" dirty="0">
-                <a:solidFill>
-                  <a:srgbClr val="5B6068"/>
-                </a:solidFill>
-                <a:latin typeface="Calibri" pitchFamily="34" charset="0"/>
-                <a:ea typeface="Calibri" pitchFamily="34" charset="-122"/>
-                <a:cs typeface="Calibri" pitchFamily="34" charset="-120"/>
-              </a:rPr>
-              <a:t>illik, QHT-yə hesablanır</a:t>
-            </a:r>
-            <a:endParaRPr lang="en-US" sz="1000" dirty="0"/>
-          </a:p>
-        </p:txBody>
-      </p:sp>
-      <p:sp>
-        <p:nvSpPr>
-          <p:cNvPr id="13" name="Text 11"/>
-          <p:cNvSpPr/>
-          <p:nvPr/>
-        </p:nvSpPr>
-        <p:spPr>
-          <a:xfrm>
-            <a:off x="4681728" y="4297680"/>
-            <a:ext cx="2962656" cy="1188720"/>
-          </a:xfrm>
-          <a:prstGeom prst="rect">
-            <a:avLst/>
-          </a:prstGeom>
-          <a:noFill/>
-          <a:ln/>
-        </p:spPr>
-        <p:txBody>
-          <a:bodyPr wrap="square" lIns="0" tIns="0" rIns="0" bIns="0" rtlCol="0" anchor="t"/>
-          <a:lstStyle/>
-          <a:p>
-            <a:pPr marL="342900" indent="-342900">
-              <a:lnSpc>
-                <a:spcPct val="120000"/>
-              </a:lnSpc>
-              <a:spcAft>
-                <a:spcPts val="800"/>
-              </a:spcAft>
-              <a:buSzPct val="100000"/>
-              <a:buChar char="•"/>
-            </a:pPr>
-            <a:r>
-              <a:rPr lang="en-US" sz="1100" dirty="0">
-                <a:solidFill>
-                  <a:srgbClr val="141619"/>
-                </a:solidFill>
-                <a:latin typeface="Calibri" pitchFamily="34" charset="0"/>
-                <a:ea typeface="Calibri" pitchFamily="34" charset="-122"/>
-                <a:cs typeface="Calibri" pitchFamily="34" charset="-120"/>
-              </a:rPr>
-              <a:t>Toplu dəst + panel</a:t>
-            </a:r>
-            <a:endParaRPr lang="en-US" sz="1100" dirty="0"/>
-          </a:p>
-          <a:p>
-            <a:pPr marL="342900" indent="-342900">
-              <a:lnSpc>
-                <a:spcPct val="120000"/>
-              </a:lnSpc>
-              <a:spcAft>
-                <a:spcPts val="800"/>
-              </a:spcAft>
-              <a:buSzPct val="100000"/>
-              <a:buChar char="•"/>
-            </a:pPr>
-            <a:r>
-              <a:rPr lang="en-US" sz="1100" dirty="0">
-                <a:solidFill>
-                  <a:srgbClr val="141619"/>
-                </a:solidFill>
-                <a:latin typeface="Calibri" pitchFamily="34" charset="0"/>
-                <a:ea typeface="Calibri" pitchFamily="34" charset="-122"/>
-                <a:cs typeface="Calibri" pitchFamily="34" charset="-120"/>
-              </a:rPr>
-              <a:t>Əhatə hesabatı</a:t>
-            </a:r>
-            <a:endParaRPr lang="en-US" sz="1100" dirty="0"/>
-          </a:p>
-        </p:txBody>
-      </p:sp>
-      <p:sp>
-        <p:nvSpPr>
-          <p:cNvPr id="14" name="Shape 12"/>
-          <p:cNvSpPr/>
-          <p:nvPr/>
-        </p:nvSpPr>
-        <p:spPr>
-          <a:xfrm>
-            <a:off x="8092440" y="2880360"/>
-            <a:ext cx="3364992" cy="2743200"/>
-          </a:xfrm>
-          <a:prstGeom prst="rect">
-            <a:avLst/>
-          </a:prstGeom>
-          <a:solidFill>
-            <a:srgbClr val="FFFFFF"/>
-          </a:solidFill>
-          <a:ln w="12700">
-            <a:solidFill>
-              <a:srgbClr val="C3C2BA"/>
-            </a:solidFill>
-            <a:prstDash val="solid"/>
-          </a:ln>
-        </p:spPr>
-      </p:sp>
-      <p:sp>
-        <p:nvSpPr>
-          <p:cNvPr id="15" name="Text 13"/>
-          <p:cNvSpPr/>
-          <p:nvPr/>
-        </p:nvSpPr>
-        <p:spPr>
-          <a:xfrm>
-            <a:off x="8293608" y="3063240"/>
-            <a:ext cx="2962656" cy="256032"/>
-          </a:xfrm>
-          <a:prstGeom prst="rect">
-            <a:avLst/>
-          </a:prstGeom>
-          <a:noFill/>
-          <a:ln/>
-        </p:spPr>
-        <p:txBody>
-          <a:bodyPr wrap="square" lIns="0" tIns="0" rIns="0" bIns="0" rtlCol="0" anchor="ctr"/>
-          <a:lstStyle/>
-          <a:p>
-            <a:pPr indent="0" marL="0">
-              <a:buNone/>
-            </a:pPr>
-            <a:r>
-              <a:rPr lang="en-US" sz="1100" b="1" spc="100" kern="0" dirty="0">
+              <a:t>3,8 milyon icma səhiyyə işçisi, 98+ ölkə (ÜST) — “tibbi cihaz deyil” statusu bizə onlara indi çatmaq imkanı verir, üç ildən sonra yox.</a:t>
+            </a:r>
+            <a:endParaRPr lang="en-US" sz="1450" dirty="0"/>
+          </a:p>
+        </p:txBody>
+      </p:sp>
+      <p:sp>
+        <p:nvSpPr>
+          <p:cNvPr id="11" name="Text 9"/>
+          <p:cNvSpPr/>
+          <p:nvPr/>
+        </p:nvSpPr>
+        <p:spPr>
+          <a:xfrm>
+            <a:off x="502920" y="6400800"/>
+            <a:ext cx="1828800" cy="274320"/>
+          </a:xfrm>
+          <a:prstGeom prst="rect">
+            <a:avLst/>
+          </a:prstGeom>
+          <a:noFill/>
+          <a:ln/>
+        </p:spPr>
+        <p:txBody>
+          <a:bodyPr wrap="square" lIns="0" tIns="0" rIns="0" bIns="0" rtlCol="0" anchor="ctr"/>
+          <a:lstStyle/>
+          <a:p>
+            <a:pPr indent="0" marL="0">
+              <a:buNone/>
+            </a:pPr>
+            <a:r>
+              <a:rPr lang="en-US" sz="900" spc="200" kern="0" dirty="0">
                 <a:solidFill>
                   <a:srgbClr val="8E939A"/>
                 </a:solidFill>
@@ -5379,232 +6070,6 @@
                 <a:ea typeface="Courier New" pitchFamily="34" charset="-122"/>
                 <a:cs typeface="Courier New" pitchFamily="34" charset="-120"/>
               </a:rPr>
-              <a:t>KORPORATIV</a:t>
-            </a:r>
-            <a:endParaRPr lang="en-US" sz="1100" dirty="0"/>
-          </a:p>
-        </p:txBody>
-      </p:sp>
-      <p:sp>
-        <p:nvSpPr>
-          <p:cNvPr id="16" name="Text 14"/>
-          <p:cNvSpPr/>
-          <p:nvPr/>
-        </p:nvSpPr>
-        <p:spPr>
-          <a:xfrm>
-            <a:off x="8293608" y="3374136"/>
-            <a:ext cx="2962656" cy="457200"/>
-          </a:xfrm>
-          <a:prstGeom prst="rect">
-            <a:avLst/>
-          </a:prstGeom>
-          <a:noFill/>
-          <a:ln/>
-        </p:spPr>
-        <p:txBody>
-          <a:bodyPr wrap="square" lIns="0" tIns="0" rIns="0" bIns="0" rtlCol="0" anchor="ctr"/>
-          <a:lstStyle/>
-          <a:p>
-            <a:pPr indent="0" marL="0">
-              <a:buNone/>
-            </a:pPr>
-            <a:r>
-              <a:rPr lang="en-US" sz="2300" dirty="0">
-                <a:solidFill>
-                  <a:srgbClr val="141619"/>
-                </a:solidFill>
-                <a:latin typeface="Cambria" pitchFamily="34" charset="0"/>
-                <a:ea typeface="Cambria" pitchFamily="34" charset="-122"/>
-                <a:cs typeface="Cambria" pitchFamily="34" charset="-120"/>
-              </a:rPr>
-              <a:t>Fərdi</a:t>
-            </a:r>
-            <a:endParaRPr lang="en-US" sz="2300" dirty="0"/>
-          </a:p>
-        </p:txBody>
-      </p:sp>
-      <p:sp>
-        <p:nvSpPr>
-          <p:cNvPr id="17" name="Text 15"/>
-          <p:cNvSpPr/>
-          <p:nvPr/>
-        </p:nvSpPr>
-        <p:spPr>
-          <a:xfrm>
-            <a:off x="8293608" y="3831336"/>
-            <a:ext cx="2962656" cy="320040"/>
-          </a:xfrm>
-          <a:prstGeom prst="rect">
-            <a:avLst/>
-          </a:prstGeom>
-          <a:noFill/>
-          <a:ln/>
-        </p:spPr>
-        <p:txBody>
-          <a:bodyPr wrap="square" lIns="0" tIns="0" rIns="0" bIns="0" rtlCol="0" anchor="t"/>
-          <a:lstStyle/>
-          <a:p>
-            <a:pPr indent="0" marL="0">
-              <a:buNone/>
-            </a:pPr>
-            <a:r>
-              <a:rPr lang="en-US" sz="1000" i="1" dirty="0">
-                <a:solidFill>
-                  <a:srgbClr val="5B6068"/>
-                </a:solidFill>
-                <a:latin typeface="Calibri" pitchFamily="34" charset="0"/>
-                <a:ea typeface="Calibri" pitchFamily="34" charset="-122"/>
-                <a:cs typeface="Calibri" pitchFamily="34" charset="-120"/>
-              </a:rPr>
-              <a:t>quraşdırma + dəstək</a:t>
-            </a:r>
-            <a:endParaRPr lang="en-US" sz="1000" dirty="0"/>
-          </a:p>
-        </p:txBody>
-      </p:sp>
-      <p:sp>
-        <p:nvSpPr>
-          <p:cNvPr id="18" name="Text 16"/>
-          <p:cNvSpPr/>
-          <p:nvPr/>
-        </p:nvSpPr>
-        <p:spPr>
-          <a:xfrm>
-            <a:off x="8293608" y="4297680"/>
-            <a:ext cx="2962656" cy="1188720"/>
-          </a:xfrm>
-          <a:prstGeom prst="rect">
-            <a:avLst/>
-          </a:prstGeom>
-          <a:noFill/>
-          <a:ln/>
-        </p:spPr>
-        <p:txBody>
-          <a:bodyPr wrap="square" lIns="0" tIns="0" rIns="0" bIns="0" rtlCol="0" anchor="t"/>
-          <a:lstStyle/>
-          <a:p>
-            <a:pPr marL="342900" indent="-342900">
-              <a:lnSpc>
-                <a:spcPct val="120000"/>
-              </a:lnSpc>
-              <a:spcAft>
-                <a:spcPts val="800"/>
-              </a:spcAft>
-              <a:buSzPct val="100000"/>
-              <a:buChar char="•"/>
-            </a:pPr>
-            <a:r>
-              <a:rPr lang="en-US" sz="1100" dirty="0">
-                <a:solidFill>
-                  <a:srgbClr val="141619"/>
-                </a:solidFill>
-                <a:latin typeface="Calibri" pitchFamily="34" charset="0"/>
-                <a:ea typeface="Calibri" pitchFamily="34" charset="-122"/>
-                <a:cs typeface="Calibri" pitchFamily="34" charset="-120"/>
-              </a:rPr>
-              <a:t>Tətbiq və təlim</a:t>
-            </a:r>
-            <a:endParaRPr lang="en-US" sz="1100" dirty="0"/>
-          </a:p>
-          <a:p>
-            <a:pPr marL="342900" indent="-342900">
-              <a:lnSpc>
-                <a:spcPct val="120000"/>
-              </a:lnSpc>
-              <a:spcAft>
-                <a:spcPts val="800"/>
-              </a:spcAft>
-              <a:buSzPct val="100000"/>
-              <a:buChar char="•"/>
-            </a:pPr>
-            <a:r>
-              <a:rPr lang="en-US" sz="1100" dirty="0">
-                <a:solidFill>
-                  <a:srgbClr val="141619"/>
-                </a:solidFill>
-                <a:latin typeface="Calibri" pitchFamily="34" charset="0"/>
-                <a:ea typeface="Calibri" pitchFamily="34" charset="-122"/>
-                <a:cs typeface="Calibri" pitchFamily="34" charset="-120"/>
-              </a:rPr>
-              <a:t>Səhiyyə sistemi inteqrasiyası</a:t>
-            </a:r>
-            <a:endParaRPr lang="en-US" sz="1100" dirty="0"/>
-          </a:p>
-        </p:txBody>
-      </p:sp>
-      <p:sp>
-        <p:nvSpPr>
-          <p:cNvPr id="19" name="Text 17"/>
-          <p:cNvSpPr/>
-          <p:nvPr/>
-        </p:nvSpPr>
-        <p:spPr>
-          <a:xfrm>
-            <a:off x="868680" y="5806440"/>
-            <a:ext cx="10469880" cy="365760"/>
-          </a:xfrm>
-          <a:prstGeom prst="rect">
-            <a:avLst/>
-          </a:prstGeom>
-          <a:noFill/>
-          <a:ln/>
-        </p:spPr>
-        <p:txBody>
-          <a:bodyPr wrap="square" lIns="0" tIns="0" rIns="0" bIns="0" rtlCol="0" anchor="ctr"/>
-          <a:lstStyle/>
-          <a:p>
-            <a:pPr indent="0" marL="0">
-              <a:buNone/>
-            </a:pPr>
-            <a:r>
-              <a:rPr lang="en-US" sz="1150" i="1" dirty="0">
-                <a:solidFill>
-                  <a:srgbClr val="5B6068"/>
-                </a:solidFill>
-                <a:latin typeface="Calibri" pitchFamily="34" charset="0"/>
-                <a:ea typeface="Calibri" pitchFamily="34" charset="-122"/>
-                <a:cs typeface="Calibri" pitchFamily="34" charset="-120"/>
-              </a:rPr>
-              <a:t>Müqayisə üçün: Eko-nun CORE 500 modeli 379 $ + ildə 119,99 $ — həkimlər üçün, bu işçilər üçün yox.</a:t>
-            </a:r>
-            <a:endParaRPr lang="en-US" sz="1150" dirty="0"/>
-          </a:p>
-        </p:txBody>
-      </p:sp>
-      <p:sp>
-        <p:nvSpPr>
-          <p:cNvPr id="20" name="Text 18"/>
-          <p:cNvSpPr/>
-          <p:nvPr/>
-        </p:nvSpPr>
-        <p:spPr>
-          <a:xfrm>
-            <a:off x="502920" y="6400800"/>
-            <a:ext cx="1828800" cy="274320"/>
-          </a:xfrm>
-          <a:prstGeom prst="rect">
-            <a:avLst/>
-          </a:prstGeom>
-          <a:noFill/>
-          <a:ln/>
-        </p:spPr>
-        <p:txBody>
-          <a:bodyPr wrap="square" lIns="0" tIns="0" rIns="0" bIns="0" rtlCol="0" anchor="ctr"/>
-          <a:lstStyle/>
-          <a:p>
-            <a:pPr indent="0" marL="0">
-              <a:buNone/>
-            </a:pPr>
-            <a:r>
-              <a:rPr lang="en-US" sz="900" spc="200" kern="0" dirty="0">
-                <a:solidFill>
-                  <a:srgbClr val="8E939A"/>
-                </a:solidFill>
-                <a:latin typeface="Courier New" pitchFamily="34" charset="0"/>
-                <a:ea typeface="Courier New" pitchFamily="34" charset="-122"/>
-                <a:cs typeface="Courier New" pitchFamily="34" charset="-120"/>
-              </a:rPr>
               <a:t>PULSO</a:t>
             </a:r>
             <a:endParaRPr lang="en-US" sz="900" dirty="0"/>
@@ -5613,7 +6078,7 @@
       </p:sp>
       <p:sp>
         <p:nvSpPr>
-          <p:cNvPr id="21" name="Text 19"/>
+          <p:cNvPr id="12" name="Text 10"/>
           <p:cNvSpPr/>
           <p:nvPr/>
         </p:nvSpPr>
@@ -5697,8 +6162,8 @@
         </p:nvSpPr>
         <p:spPr>
           <a:xfrm>
-            <a:off x="868680" y="777240"/>
-            <a:ext cx="7315200" cy="292608"/>
+            <a:off x="868680" y="640080"/>
+            <a:ext cx="8229600" cy="292608"/>
           </a:xfrm>
           <a:prstGeom prst="rect">
             <a:avLst/>
@@ -5716,13 +6181,13 @@
             <a:r>
               <a:rPr lang="en-US" sz="1200" b="1" spc="220" kern="0" dirty="0">
                 <a:solidFill>
-                  <a:srgbClr val="9AA0A8"/>
+                  <a:srgbClr val="8E939A"/>
                 </a:solidFill>
                 <a:latin typeface="Courier New" pitchFamily="34" charset="0"/>
                 <a:ea typeface="Courier New" pitchFamily="34" charset="-122"/>
                 <a:cs typeface="Courier New" pitchFamily="34" charset="-120"/>
               </a:rPr>
-              <a:t>BUNDAN SONRA NƏ</a:t>
+              <a:t>QIYMƏT — PLANDIR, CANLI ÖDƏNIŞ DEYIL</a:t>
             </a:r>
             <a:endParaRPr lang="en-US" sz="1200" dirty="0"/>
           </a:p>
@@ -5736,8 +6201,8 @@
         </p:nvSpPr>
         <p:spPr>
           <a:xfrm>
-            <a:off x="868680" y="1371600"/>
-            <a:ext cx="9601200" cy="1463040"/>
+            <a:off x="868680" y="1188720"/>
+            <a:ext cx="8229600" cy="1371600"/>
           </a:xfrm>
           <a:prstGeom prst="rect">
             <a:avLst/>
@@ -5753,125 +6218,362 @@
               <a:buNone/>
             </a:pPr>
             <a:r>
-              <a:rPr lang="en-US" sz="3400" dirty="0">
-                <a:solidFill>
-                  <a:srgbClr val="EDEEF0"/>
+              <a:rPr lang="en-US" sz="3000" dirty="0">
+                <a:solidFill>
+                  <a:srgbClr val="141619"/>
                 </a:solidFill>
                 <a:latin typeface="Cambria" pitchFamily="34" charset="0"/>
                 <a:ea typeface="Cambria" pitchFamily="34" charset="-122"/>
                 <a:cs typeface="Cambria" pitchFamily="34" charset="-120"/>
               </a:rPr>
-              <a:t>İki real addım.</a:t>
-            </a:r>
-            <a:endParaRPr lang="en-US" sz="3400" dirty="0"/>
-          </a:p>
-          <a:p>
-            <a:pPr indent="0" marL="0">
-              <a:buNone/>
-            </a:pPr>
-            <a:r>
-              <a:rPr lang="en-US" sz="3400" dirty="0">
-                <a:solidFill>
-                  <a:srgbClr val="EDEEF0"/>
+              <a:t>Marja üçün yox,</a:t>
+            </a:r>
+            <a:endParaRPr lang="en-US" sz="3000" dirty="0"/>
+          </a:p>
+          <a:p>
+            <a:pPr indent="0" marL="0">
+              <a:buNone/>
+            </a:pPr>
+            <a:r>
+              <a:rPr lang="en-US" sz="3000" dirty="0">
+                <a:solidFill>
+                  <a:srgbClr val="141619"/>
                 </a:solidFill>
                 <a:latin typeface="Cambria" pitchFamily="34" charset="0"/>
                 <a:ea typeface="Cambria" pitchFamily="34" charset="-122"/>
                 <a:cs typeface="Cambria" pitchFamily="34" charset="-120"/>
               </a:rPr>
-              <a:t>Yüz ehtimal yox.</a:t>
-            </a:r>
-            <a:endParaRPr lang="en-US" sz="3400" dirty="0"/>
-          </a:p>
-        </p:txBody>
-      </p:sp>
-      <p:sp>
-        <p:nvSpPr>
-          <p:cNvPr id="4" name="Text 2"/>
-          <p:cNvSpPr/>
-          <p:nvPr/>
-        </p:nvSpPr>
-        <p:spPr>
-          <a:xfrm>
-            <a:off x="868680" y="3246120"/>
-            <a:ext cx="1005840" cy="914400"/>
-          </a:xfrm>
-          <a:prstGeom prst="rect">
-            <a:avLst/>
-          </a:prstGeom>
-          <a:noFill/>
-          <a:ln/>
-        </p:spPr>
-        <p:txBody>
-          <a:bodyPr wrap="square" lIns="0" tIns="0" rIns="0" bIns="0" rtlCol="0" anchor="ctr"/>
-          <a:lstStyle/>
-          <a:p>
-            <a:pPr indent="0" marL="0">
-              <a:buNone/>
-            </a:pPr>
-            <a:r>
-              <a:rPr lang="en-US" sz="4000" dirty="0">
-                <a:solidFill>
-                  <a:srgbClr val="FF5A2C"/>
+              <a:t>qəbul üçün qiymətləndirilib.</a:t>
+            </a:r>
+            <a:endParaRPr lang="en-US" sz="3000" dirty="0"/>
+          </a:p>
+        </p:txBody>
+      </p:sp>
+      <p:sp>
+        <p:nvSpPr>
+          <p:cNvPr id="4" name="Shape 2"/>
+          <p:cNvSpPr/>
+          <p:nvPr/>
+        </p:nvSpPr>
+        <p:spPr>
+          <a:xfrm>
+            <a:off x="868680" y="2880360"/>
+            <a:ext cx="3364992" cy="2743200"/>
+          </a:xfrm>
+          <a:prstGeom prst="rect">
+            <a:avLst/>
+          </a:prstGeom>
+          <a:solidFill>
+            <a:srgbClr val="FFFFFF"/>
+          </a:solidFill>
+          <a:ln w="12700">
+            <a:solidFill>
+              <a:srgbClr val="C3C2BA"/>
+            </a:solidFill>
+            <a:prstDash val="solid"/>
+          </a:ln>
+        </p:spPr>
+      </p:sp>
+      <p:sp>
+        <p:nvSpPr>
+          <p:cNvPr id="5" name="Text 3"/>
+          <p:cNvSpPr/>
+          <p:nvPr/>
+        </p:nvSpPr>
+        <p:spPr>
+          <a:xfrm>
+            <a:off x="1069848" y="3063240"/>
+            <a:ext cx="2962656" cy="256032"/>
+          </a:xfrm>
+          <a:prstGeom prst="rect">
+            <a:avLst/>
+          </a:prstGeom>
+          <a:noFill/>
+          <a:ln/>
+        </p:spPr>
+        <p:txBody>
+          <a:bodyPr wrap="square" lIns="0" tIns="0" rIns="0" bIns="0" rtlCol="0" anchor="ctr"/>
+          <a:lstStyle/>
+          <a:p>
+            <a:pPr indent="0" marL="0">
+              <a:buNone/>
+            </a:pPr>
+            <a:r>
+              <a:rPr lang="en-US" sz="1100" b="1" spc="100" kern="0" dirty="0">
+                <a:solidFill>
+                  <a:srgbClr val="8E939A"/>
+                </a:solidFill>
+                <a:latin typeface="Courier New" pitchFamily="34" charset="0"/>
+                <a:ea typeface="Courier New" pitchFamily="34" charset="-122"/>
+                <a:cs typeface="Courier New" pitchFamily="34" charset="-120"/>
+              </a:rPr>
+              <a:t>PILOT</a:t>
+            </a:r>
+            <a:endParaRPr lang="en-US" sz="1100" dirty="0"/>
+          </a:p>
+        </p:txBody>
+      </p:sp>
+      <p:sp>
+        <p:nvSpPr>
+          <p:cNvPr id="6" name="Text 4"/>
+          <p:cNvSpPr/>
+          <p:nvPr/>
+        </p:nvSpPr>
+        <p:spPr>
+          <a:xfrm>
+            <a:off x="1069848" y="3374136"/>
+            <a:ext cx="2962656" cy="457200"/>
+          </a:xfrm>
+          <a:prstGeom prst="rect">
+            <a:avLst/>
+          </a:prstGeom>
+          <a:noFill/>
+          <a:ln/>
+        </p:spPr>
+        <p:txBody>
+          <a:bodyPr wrap="square" lIns="0" tIns="0" rIns="0" bIns="0" rtlCol="0" anchor="ctr"/>
+          <a:lstStyle/>
+          <a:p>
+            <a:pPr indent="0" marL="0">
+              <a:buNone/>
+            </a:pPr>
+            <a:r>
+              <a:rPr lang="en-US" sz="2300" dirty="0">
+                <a:solidFill>
+                  <a:srgbClr val="141619"/>
                 </a:solidFill>
                 <a:latin typeface="Cambria" pitchFamily="34" charset="0"/>
                 <a:ea typeface="Cambria" pitchFamily="34" charset="-122"/>
                 <a:cs typeface="Cambria" pitchFamily="34" charset="-120"/>
               </a:rPr>
-              <a:t>01</a:t>
-            </a:r>
-            <a:endParaRPr lang="en-US" sz="4000" dirty="0"/>
-          </a:p>
-        </p:txBody>
-      </p:sp>
-      <p:sp>
-        <p:nvSpPr>
-          <p:cNvPr id="5" name="Text 3"/>
-          <p:cNvSpPr/>
-          <p:nvPr/>
-        </p:nvSpPr>
-        <p:spPr>
-          <a:xfrm>
-            <a:off x="1920240" y="3246120"/>
-            <a:ext cx="9326880" cy="411480"/>
-          </a:xfrm>
-          <a:prstGeom prst="rect">
-            <a:avLst/>
-          </a:prstGeom>
-          <a:noFill/>
-          <a:ln/>
-        </p:spPr>
-        <p:txBody>
-          <a:bodyPr wrap="square" lIns="0" tIns="0" rIns="0" bIns="0" rtlCol="0" anchor="ctr"/>
-          <a:lstStyle/>
-          <a:p>
-            <a:pPr indent="0" marL="0">
-              <a:buNone/>
-            </a:pPr>
-            <a:r>
-              <a:rPr lang="en-US" sz="1450" b="1" dirty="0">
-                <a:solidFill>
-                  <a:srgbClr val="EDEEF0"/>
+              <a:t>~45–60 $</a:t>
+            </a:r>
+            <a:endParaRPr lang="en-US" sz="2300" dirty="0"/>
+          </a:p>
+        </p:txBody>
+      </p:sp>
+      <p:sp>
+        <p:nvSpPr>
+          <p:cNvPr id="7" name="Text 5"/>
+          <p:cNvSpPr/>
+          <p:nvPr/>
+        </p:nvSpPr>
+        <p:spPr>
+          <a:xfrm>
+            <a:off x="1069848" y="3831336"/>
+            <a:ext cx="2962656" cy="320040"/>
+          </a:xfrm>
+          <a:prstGeom prst="rect">
+            <a:avLst/>
+          </a:prstGeom>
+          <a:noFill/>
+          <a:ln/>
+        </p:spPr>
+        <p:txBody>
+          <a:bodyPr wrap="square" lIns="0" tIns="0" rIns="0" bIns="0" rtlCol="0" anchor="t"/>
+          <a:lstStyle/>
+          <a:p>
+            <a:pPr indent="0" marL="0">
+              <a:buNone/>
+            </a:pPr>
+            <a:r>
+              <a:rPr lang="en-US" sz="1000" i="1" dirty="0">
+                <a:solidFill>
+                  <a:srgbClr val="5B6068"/>
+                </a:solidFill>
+                <a:latin typeface="Calibri" pitchFamily="34" charset="0"/>
+                <a:ea typeface="Calibri" pitchFamily="34" charset="-122"/>
+                <a:cs typeface="Calibri" pitchFamily="34" charset="-120"/>
+              </a:rPr>
+              <a:t>hər dəst, maya dəyərinə yaxın</a:t>
+            </a:r>
+            <a:endParaRPr lang="en-US" sz="1000" dirty="0"/>
+          </a:p>
+        </p:txBody>
+      </p:sp>
+      <p:sp>
+        <p:nvSpPr>
+          <p:cNvPr id="8" name="Text 6"/>
+          <p:cNvSpPr/>
+          <p:nvPr/>
+        </p:nvSpPr>
+        <p:spPr>
+          <a:xfrm>
+            <a:off x="1069848" y="4297680"/>
+            <a:ext cx="2962656" cy="1188720"/>
+          </a:xfrm>
+          <a:prstGeom prst="rect">
+            <a:avLst/>
+          </a:prstGeom>
+          <a:noFill/>
+          <a:ln/>
+        </p:spPr>
+        <p:txBody>
+          <a:bodyPr wrap="square" lIns="0" tIns="0" rIns="0" bIns="0" rtlCol="0" anchor="t"/>
+          <a:lstStyle/>
+          <a:p>
+            <a:pPr marL="342900" indent="-342900">
+              <a:lnSpc>
+                <a:spcPct val="120000"/>
+              </a:lnSpc>
+              <a:spcAft>
+                <a:spcPts val="800"/>
+              </a:spcAft>
+              <a:buSzPct val="100000"/>
+              <a:buChar char="•"/>
+            </a:pPr>
+            <a:r>
+              <a:rPr lang="en-US" sz="1100" dirty="0">
+                <a:solidFill>
+                  <a:srgbClr val="141619"/>
+                </a:solidFill>
+                <a:latin typeface="Calibri" pitchFamily="34" charset="0"/>
+                <a:ea typeface="Calibri" pitchFamily="34" charset="-122"/>
+                <a:cs typeface="Calibri" pitchFamily="34" charset="-120"/>
+              </a:rPr>
+              <a:t>Bir avadanlıq dəsti</a:t>
+            </a:r>
+            <a:endParaRPr lang="en-US" sz="1100" dirty="0"/>
+          </a:p>
+          <a:p>
+            <a:pPr marL="342900" indent="-342900">
+              <a:lnSpc>
+                <a:spcPct val="120000"/>
+              </a:lnSpc>
+              <a:spcAft>
+                <a:spcPts val="800"/>
+              </a:spcAft>
+              <a:buSzPct val="100000"/>
+              <a:buChar char="•"/>
+            </a:pPr>
+            <a:r>
+              <a:rPr lang="en-US" sz="1100" dirty="0">
+                <a:solidFill>
+                  <a:srgbClr val="141619"/>
+                </a:solidFill>
+                <a:latin typeface="Calibri" pitchFamily="34" charset="0"/>
+                <a:ea typeface="Calibri" pitchFamily="34" charset="-122"/>
+                <a:cs typeface="Calibri" pitchFamily="34" charset="-120"/>
+              </a:rPr>
+              <a:t>Bir məntəqə sınamaq üçün</a:t>
+            </a:r>
+            <a:endParaRPr lang="en-US" sz="1100" dirty="0"/>
+          </a:p>
+        </p:txBody>
+      </p:sp>
+      <p:sp>
+        <p:nvSpPr>
+          <p:cNvPr id="9" name="Shape 7"/>
+          <p:cNvSpPr/>
+          <p:nvPr/>
+        </p:nvSpPr>
+        <p:spPr>
+          <a:xfrm>
+            <a:off x="4480560" y="2880360"/>
+            <a:ext cx="3364992" cy="2743200"/>
+          </a:xfrm>
+          <a:prstGeom prst="rect">
+            <a:avLst/>
+          </a:prstGeom>
+          <a:solidFill>
+            <a:srgbClr val="FFFFFF"/>
+          </a:solidFill>
+          <a:ln w="19050">
+            <a:solidFill>
+              <a:srgbClr val="D6360F"/>
+            </a:solidFill>
+            <a:prstDash val="solid"/>
+          </a:ln>
+        </p:spPr>
+      </p:sp>
+      <p:sp>
+        <p:nvSpPr>
+          <p:cNvPr id="10" name="Text 8"/>
+          <p:cNvSpPr/>
+          <p:nvPr/>
+        </p:nvSpPr>
+        <p:spPr>
+          <a:xfrm>
+            <a:off x="4681728" y="3063240"/>
+            <a:ext cx="2962656" cy="256032"/>
+          </a:xfrm>
+          <a:prstGeom prst="rect">
+            <a:avLst/>
+          </a:prstGeom>
+          <a:noFill/>
+          <a:ln/>
+        </p:spPr>
+        <p:txBody>
+          <a:bodyPr wrap="square" lIns="0" tIns="0" rIns="0" bIns="0" rtlCol="0" anchor="ctr"/>
+          <a:lstStyle/>
+          <a:p>
+            <a:pPr indent="0" marL="0">
+              <a:buNone/>
+            </a:pPr>
+            <a:r>
+              <a:rPr lang="en-US" sz="1100" b="1" spc="100" kern="0" dirty="0">
+                <a:solidFill>
+                  <a:srgbClr val="D6360F"/>
                 </a:solidFill>
                 <a:latin typeface="Courier New" pitchFamily="34" charset="0"/>
                 <a:ea typeface="Courier New" pitchFamily="34" charset="-122"/>
                 <a:cs typeface="Courier New" pitchFamily="34" charset="-120"/>
               </a:rPr>
-              <a:t>Etibarlı tibbi qeydlərlə sınaq</a:t>
-            </a:r>
-            <a:endParaRPr lang="en-US" sz="1450" dirty="0"/>
-          </a:p>
-        </p:txBody>
-      </p:sp>
-      <p:sp>
-        <p:nvSpPr>
-          <p:cNvPr id="6" name="Text 4"/>
-          <p:cNvSpPr/>
-          <p:nvPr/>
-        </p:nvSpPr>
-        <p:spPr>
-          <a:xfrm>
-            <a:off x="1920240" y="3666744"/>
-            <a:ext cx="9326880" cy="457200"/>
+              <a:t>PROQRAM</a:t>
+            </a:r>
+            <a:endParaRPr lang="en-US" sz="1100" dirty="0"/>
+          </a:p>
+        </p:txBody>
+      </p:sp>
+      <p:sp>
+        <p:nvSpPr>
+          <p:cNvPr id="11" name="Text 9"/>
+          <p:cNvSpPr/>
+          <p:nvPr/>
+        </p:nvSpPr>
+        <p:spPr>
+          <a:xfrm>
+            <a:off x="4681728" y="3374136"/>
+            <a:ext cx="2962656" cy="457200"/>
+          </a:xfrm>
+          <a:prstGeom prst="rect">
+            <a:avLst/>
+          </a:prstGeom>
+          <a:noFill/>
+          <a:ln/>
+        </p:spPr>
+        <p:txBody>
+          <a:bodyPr wrap="square" lIns="0" tIns="0" rIns="0" bIns="0" rtlCol="0" anchor="ctr"/>
+          <a:lstStyle/>
+          <a:p>
+            <a:pPr indent="0" marL="0">
+              <a:buNone/>
+            </a:pPr>
+            <a:r>
+              <a:rPr lang="en-US" sz="2300" dirty="0">
+                <a:solidFill>
+                  <a:srgbClr val="141619"/>
+                </a:solidFill>
+                <a:latin typeface="Cambria" pitchFamily="34" charset="0"/>
+                <a:ea typeface="Cambria" pitchFamily="34" charset="-122"/>
+                <a:cs typeface="Cambria" pitchFamily="34" charset="-120"/>
+              </a:rPr>
+              <a:t>Fərdi / regional</a:t>
+            </a:r>
+            <a:endParaRPr lang="en-US" sz="2300" dirty="0"/>
+          </a:p>
+        </p:txBody>
+      </p:sp>
+      <p:sp>
+        <p:nvSpPr>
+          <p:cNvPr id="12" name="Text 10"/>
+          <p:cNvSpPr/>
+          <p:nvPr/>
+        </p:nvSpPr>
+        <p:spPr>
+          <a:xfrm>
+            <a:off x="4681728" y="3831336"/>
+            <a:ext cx="2962656" cy="320040"/>
           </a:xfrm>
           <a:prstGeom prst="rect">
             <a:avLst/>
@@ -5887,170 +6589,374 @@
               <a:buNone/>
             </a:pPr>
             <a:r>
-              <a:rPr lang="en-US" sz="1250" dirty="0">
-                <a:solidFill>
-                  <a:srgbClr val="9AA0A8"/>
+              <a:rPr lang="en-US" sz="1000" i="1" dirty="0">
+                <a:solidFill>
+                  <a:srgbClr val="5B6068"/>
                 </a:solidFill>
                 <a:latin typeface="Calibri" pitchFamily="34" charset="0"/>
                 <a:ea typeface="Calibri" pitchFamily="34" charset="-122"/>
                 <a:cs typeface="Calibri" pitchFamily="34" charset="-120"/>
               </a:rPr>
-              <a:t>Buna hazırıq — sadəcə bu həftəsonu məlumata çata bilmədik.</a:t>
-            </a:r>
-            <a:endParaRPr lang="en-US" sz="1250" dirty="0"/>
-          </a:p>
-        </p:txBody>
-      </p:sp>
-      <p:sp>
-        <p:nvSpPr>
-          <p:cNvPr id="7" name="Text 5"/>
-          <p:cNvSpPr/>
-          <p:nvPr/>
-        </p:nvSpPr>
-        <p:spPr>
-          <a:xfrm>
-            <a:off x="868680" y="4617720"/>
-            <a:ext cx="1005840" cy="914400"/>
-          </a:xfrm>
-          <a:prstGeom prst="rect">
-            <a:avLst/>
-          </a:prstGeom>
-          <a:noFill/>
-          <a:ln/>
-        </p:spPr>
-        <p:txBody>
-          <a:bodyPr wrap="square" lIns="0" tIns="0" rIns="0" bIns="0" rtlCol="0" anchor="ctr"/>
-          <a:lstStyle/>
-          <a:p>
-            <a:pPr indent="0" marL="0">
-              <a:buNone/>
-            </a:pPr>
-            <a:r>
-              <a:rPr lang="en-US" sz="4000" dirty="0">
-                <a:solidFill>
-                  <a:srgbClr val="FF5A2C"/>
+              <a:t>illik, QHT-yə hesablanır</a:t>
+            </a:r>
+            <a:endParaRPr lang="en-US" sz="1000" dirty="0"/>
+          </a:p>
+        </p:txBody>
+      </p:sp>
+      <p:sp>
+        <p:nvSpPr>
+          <p:cNvPr id="13" name="Text 11"/>
+          <p:cNvSpPr/>
+          <p:nvPr/>
+        </p:nvSpPr>
+        <p:spPr>
+          <a:xfrm>
+            <a:off x="4681728" y="4297680"/>
+            <a:ext cx="2962656" cy="1188720"/>
+          </a:xfrm>
+          <a:prstGeom prst="rect">
+            <a:avLst/>
+          </a:prstGeom>
+          <a:noFill/>
+          <a:ln/>
+        </p:spPr>
+        <p:txBody>
+          <a:bodyPr wrap="square" lIns="0" tIns="0" rIns="0" bIns="0" rtlCol="0" anchor="t"/>
+          <a:lstStyle/>
+          <a:p>
+            <a:pPr marL="342900" indent="-342900">
+              <a:lnSpc>
+                <a:spcPct val="120000"/>
+              </a:lnSpc>
+              <a:spcAft>
+                <a:spcPts val="800"/>
+              </a:spcAft>
+              <a:buSzPct val="100000"/>
+              <a:buChar char="•"/>
+            </a:pPr>
+            <a:r>
+              <a:rPr lang="en-US" sz="1100" dirty="0">
+                <a:solidFill>
+                  <a:srgbClr val="141619"/>
+                </a:solidFill>
+                <a:latin typeface="Calibri" pitchFamily="34" charset="0"/>
+                <a:ea typeface="Calibri" pitchFamily="34" charset="-122"/>
+                <a:cs typeface="Calibri" pitchFamily="34" charset="-120"/>
+              </a:rPr>
+              <a:t>Toplu dəst + panel</a:t>
+            </a:r>
+            <a:endParaRPr lang="en-US" sz="1100" dirty="0"/>
+          </a:p>
+          <a:p>
+            <a:pPr marL="342900" indent="-342900">
+              <a:lnSpc>
+                <a:spcPct val="120000"/>
+              </a:lnSpc>
+              <a:spcAft>
+                <a:spcPts val="800"/>
+              </a:spcAft>
+              <a:buSzPct val="100000"/>
+              <a:buChar char="•"/>
+            </a:pPr>
+            <a:r>
+              <a:rPr lang="en-US" sz="1100" dirty="0">
+                <a:solidFill>
+                  <a:srgbClr val="141619"/>
+                </a:solidFill>
+                <a:latin typeface="Calibri" pitchFamily="34" charset="0"/>
+                <a:ea typeface="Calibri" pitchFamily="34" charset="-122"/>
+                <a:cs typeface="Calibri" pitchFamily="34" charset="-120"/>
+              </a:rPr>
+              <a:t>Əhatə hesabatı</a:t>
+            </a:r>
+            <a:endParaRPr lang="en-US" sz="1100" dirty="0"/>
+          </a:p>
+        </p:txBody>
+      </p:sp>
+      <p:sp>
+        <p:nvSpPr>
+          <p:cNvPr id="14" name="Shape 12"/>
+          <p:cNvSpPr/>
+          <p:nvPr/>
+        </p:nvSpPr>
+        <p:spPr>
+          <a:xfrm>
+            <a:off x="8092440" y="2880360"/>
+            <a:ext cx="3364992" cy="2743200"/>
+          </a:xfrm>
+          <a:prstGeom prst="rect">
+            <a:avLst/>
+          </a:prstGeom>
+          <a:solidFill>
+            <a:srgbClr val="FFFFFF"/>
+          </a:solidFill>
+          <a:ln w="12700">
+            <a:solidFill>
+              <a:srgbClr val="C3C2BA"/>
+            </a:solidFill>
+            <a:prstDash val="solid"/>
+          </a:ln>
+        </p:spPr>
+      </p:sp>
+      <p:sp>
+        <p:nvSpPr>
+          <p:cNvPr id="15" name="Text 13"/>
+          <p:cNvSpPr/>
+          <p:nvPr/>
+        </p:nvSpPr>
+        <p:spPr>
+          <a:xfrm>
+            <a:off x="8293608" y="3063240"/>
+            <a:ext cx="2962656" cy="256032"/>
+          </a:xfrm>
+          <a:prstGeom prst="rect">
+            <a:avLst/>
+          </a:prstGeom>
+          <a:noFill/>
+          <a:ln/>
+        </p:spPr>
+        <p:txBody>
+          <a:bodyPr wrap="square" lIns="0" tIns="0" rIns="0" bIns="0" rtlCol="0" anchor="ctr"/>
+          <a:lstStyle/>
+          <a:p>
+            <a:pPr indent="0" marL="0">
+              <a:buNone/>
+            </a:pPr>
+            <a:r>
+              <a:rPr lang="en-US" sz="1100" b="1" spc="100" kern="0" dirty="0">
+                <a:solidFill>
+                  <a:srgbClr val="8E939A"/>
+                </a:solidFill>
+                <a:latin typeface="Courier New" pitchFamily="34" charset="0"/>
+                <a:ea typeface="Courier New" pitchFamily="34" charset="-122"/>
+                <a:cs typeface="Courier New" pitchFamily="34" charset="-120"/>
+              </a:rPr>
+              <a:t>KORPORATIV</a:t>
+            </a:r>
+            <a:endParaRPr lang="en-US" sz="1100" dirty="0"/>
+          </a:p>
+        </p:txBody>
+      </p:sp>
+      <p:sp>
+        <p:nvSpPr>
+          <p:cNvPr id="16" name="Text 14"/>
+          <p:cNvSpPr/>
+          <p:nvPr/>
+        </p:nvSpPr>
+        <p:spPr>
+          <a:xfrm>
+            <a:off x="8293608" y="3374136"/>
+            <a:ext cx="2962656" cy="457200"/>
+          </a:xfrm>
+          <a:prstGeom prst="rect">
+            <a:avLst/>
+          </a:prstGeom>
+          <a:noFill/>
+          <a:ln/>
+        </p:spPr>
+        <p:txBody>
+          <a:bodyPr wrap="square" lIns="0" tIns="0" rIns="0" bIns="0" rtlCol="0" anchor="ctr"/>
+          <a:lstStyle/>
+          <a:p>
+            <a:pPr indent="0" marL="0">
+              <a:buNone/>
+            </a:pPr>
+            <a:r>
+              <a:rPr lang="en-US" sz="2300" dirty="0">
+                <a:solidFill>
+                  <a:srgbClr val="141619"/>
                 </a:solidFill>
                 <a:latin typeface="Cambria" pitchFamily="34" charset="0"/>
                 <a:ea typeface="Cambria" pitchFamily="34" charset="-122"/>
                 <a:cs typeface="Cambria" pitchFamily="34" charset="-120"/>
               </a:rPr>
-              <a:t>02</a:t>
-            </a:r>
-            <a:endParaRPr lang="en-US" sz="4000" dirty="0"/>
-          </a:p>
-        </p:txBody>
-      </p:sp>
-      <p:sp>
-        <p:nvSpPr>
-          <p:cNvPr id="8" name="Text 6"/>
-          <p:cNvSpPr/>
-          <p:nvPr/>
-        </p:nvSpPr>
-        <p:spPr>
-          <a:xfrm>
-            <a:off x="1920240" y="4617720"/>
-            <a:ext cx="9326880" cy="411480"/>
-          </a:xfrm>
-          <a:prstGeom prst="rect">
-            <a:avLst/>
-          </a:prstGeom>
-          <a:noFill/>
-          <a:ln/>
-        </p:spPr>
-        <p:txBody>
-          <a:bodyPr wrap="square" lIns="0" tIns="0" rIns="0" bIns="0" rtlCol="0" anchor="ctr"/>
-          <a:lstStyle/>
-          <a:p>
-            <a:pPr indent="0" marL="0">
-              <a:buNone/>
-            </a:pPr>
-            <a:r>
-              <a:rPr lang="en-US" sz="1450" b="1" dirty="0">
-                <a:solidFill>
-                  <a:srgbClr val="EDEEF0"/>
+              <a:t>Fərdi</a:t>
+            </a:r>
+            <a:endParaRPr lang="en-US" sz="2300" dirty="0"/>
+          </a:p>
+        </p:txBody>
+      </p:sp>
+      <p:sp>
+        <p:nvSpPr>
+          <p:cNvPr id="17" name="Text 15"/>
+          <p:cNvSpPr/>
+          <p:nvPr/>
+        </p:nvSpPr>
+        <p:spPr>
+          <a:xfrm>
+            <a:off x="8293608" y="3831336"/>
+            <a:ext cx="2962656" cy="320040"/>
+          </a:xfrm>
+          <a:prstGeom prst="rect">
+            <a:avLst/>
+          </a:prstGeom>
+          <a:noFill/>
+          <a:ln/>
+        </p:spPr>
+        <p:txBody>
+          <a:bodyPr wrap="square" lIns="0" tIns="0" rIns="0" bIns="0" rtlCol="0" anchor="t"/>
+          <a:lstStyle/>
+          <a:p>
+            <a:pPr indent="0" marL="0">
+              <a:buNone/>
+            </a:pPr>
+            <a:r>
+              <a:rPr lang="en-US" sz="1000" i="1" dirty="0">
+                <a:solidFill>
+                  <a:srgbClr val="5B6068"/>
+                </a:solidFill>
+                <a:latin typeface="Calibri" pitchFamily="34" charset="0"/>
+                <a:ea typeface="Calibri" pitchFamily="34" charset="-122"/>
+                <a:cs typeface="Calibri" pitchFamily="34" charset="-120"/>
+              </a:rPr>
+              <a:t>quraşdırma + dəstək</a:t>
+            </a:r>
+            <a:endParaRPr lang="en-US" sz="1000" dirty="0"/>
+          </a:p>
+        </p:txBody>
+      </p:sp>
+      <p:sp>
+        <p:nvSpPr>
+          <p:cNvPr id="18" name="Text 16"/>
+          <p:cNvSpPr/>
+          <p:nvPr/>
+        </p:nvSpPr>
+        <p:spPr>
+          <a:xfrm>
+            <a:off x="8293608" y="4297680"/>
+            <a:ext cx="2962656" cy="1188720"/>
+          </a:xfrm>
+          <a:prstGeom prst="rect">
+            <a:avLst/>
+          </a:prstGeom>
+          <a:noFill/>
+          <a:ln/>
+        </p:spPr>
+        <p:txBody>
+          <a:bodyPr wrap="square" lIns="0" tIns="0" rIns="0" bIns="0" rtlCol="0" anchor="t"/>
+          <a:lstStyle/>
+          <a:p>
+            <a:pPr marL="342900" indent="-342900">
+              <a:lnSpc>
+                <a:spcPct val="120000"/>
+              </a:lnSpc>
+              <a:spcAft>
+                <a:spcPts val="800"/>
+              </a:spcAft>
+              <a:buSzPct val="100000"/>
+              <a:buChar char="•"/>
+            </a:pPr>
+            <a:r>
+              <a:rPr lang="en-US" sz="1100" dirty="0">
+                <a:solidFill>
+                  <a:srgbClr val="141619"/>
+                </a:solidFill>
+                <a:latin typeface="Calibri" pitchFamily="34" charset="0"/>
+                <a:ea typeface="Calibri" pitchFamily="34" charset="-122"/>
+                <a:cs typeface="Calibri" pitchFamily="34" charset="-120"/>
+              </a:rPr>
+              <a:t>Tətbiq və təlim</a:t>
+            </a:r>
+            <a:endParaRPr lang="en-US" sz="1100" dirty="0"/>
+          </a:p>
+          <a:p>
+            <a:pPr marL="342900" indent="-342900">
+              <a:lnSpc>
+                <a:spcPct val="120000"/>
+              </a:lnSpc>
+              <a:spcAft>
+                <a:spcPts val="800"/>
+              </a:spcAft>
+              <a:buSzPct val="100000"/>
+              <a:buChar char="•"/>
+            </a:pPr>
+            <a:r>
+              <a:rPr lang="en-US" sz="1100" dirty="0">
+                <a:solidFill>
+                  <a:srgbClr val="141619"/>
+                </a:solidFill>
+                <a:latin typeface="Calibri" pitchFamily="34" charset="0"/>
+                <a:ea typeface="Calibri" pitchFamily="34" charset="-122"/>
+                <a:cs typeface="Calibri" pitchFamily="34" charset="-120"/>
+              </a:rPr>
+              <a:t>Səhiyyə sistemi inteqrasiyası</a:t>
+            </a:r>
+            <a:endParaRPr lang="en-US" sz="1100" dirty="0"/>
+          </a:p>
+        </p:txBody>
+      </p:sp>
+      <p:sp>
+        <p:nvSpPr>
+          <p:cNvPr id="19" name="Text 17"/>
+          <p:cNvSpPr/>
+          <p:nvPr/>
+        </p:nvSpPr>
+        <p:spPr>
+          <a:xfrm>
+            <a:off x="868680" y="5806440"/>
+            <a:ext cx="10469880" cy="365760"/>
+          </a:xfrm>
+          <a:prstGeom prst="rect">
+            <a:avLst/>
+          </a:prstGeom>
+          <a:noFill/>
+          <a:ln/>
+        </p:spPr>
+        <p:txBody>
+          <a:bodyPr wrap="square" lIns="0" tIns="0" rIns="0" bIns="0" rtlCol="0" anchor="ctr"/>
+          <a:lstStyle/>
+          <a:p>
+            <a:pPr indent="0" marL="0">
+              <a:buNone/>
+            </a:pPr>
+            <a:r>
+              <a:rPr lang="en-US" sz="1150" i="1" dirty="0">
+                <a:solidFill>
+                  <a:srgbClr val="5B6068"/>
+                </a:solidFill>
+                <a:latin typeface="Calibri" pitchFamily="34" charset="0"/>
+                <a:ea typeface="Calibri" pitchFamily="34" charset="-122"/>
+                <a:cs typeface="Calibri" pitchFamily="34" charset="-120"/>
+              </a:rPr>
+              <a:t>Müqayisə üçün: Eko-nun CORE 500 modeli 379 $ + ildə 119,99 $ — həkimlər üçün, bu işçilər üçün yox.</a:t>
+            </a:r>
+            <a:endParaRPr lang="en-US" sz="1150" dirty="0"/>
+          </a:p>
+        </p:txBody>
+      </p:sp>
+      <p:sp>
+        <p:nvSpPr>
+          <p:cNvPr id="20" name="Text 18"/>
+          <p:cNvSpPr/>
+          <p:nvPr/>
+        </p:nvSpPr>
+        <p:spPr>
+          <a:xfrm>
+            <a:off x="502920" y="6400800"/>
+            <a:ext cx="1828800" cy="274320"/>
+          </a:xfrm>
+          <a:prstGeom prst="rect">
+            <a:avLst/>
+          </a:prstGeom>
+          <a:noFill/>
+          <a:ln/>
+        </p:spPr>
+        <p:txBody>
+          <a:bodyPr wrap="square" lIns="0" tIns="0" rIns="0" bIns="0" rtlCol="0" anchor="ctr"/>
+          <a:lstStyle/>
+          <a:p>
+            <a:pPr indent="0" marL="0">
+              <a:buNone/>
+            </a:pPr>
+            <a:r>
+              <a:rPr lang="en-US" sz="900" spc="200" kern="0" dirty="0">
+                <a:solidFill>
+                  <a:srgbClr val="8E939A"/>
                 </a:solidFill>
                 <a:latin typeface="Courier New" pitchFamily="34" charset="0"/>
                 <a:ea typeface="Courier New" pitchFamily="34" charset="-122"/>
                 <a:cs typeface="Courier New" pitchFamily="34" charset="-120"/>
               </a:rPr>
-              <a:t>Mikrofonu real dəri təması ilə sınaq</a:t>
-            </a:r>
-            <a:endParaRPr lang="en-US" sz="1450" dirty="0"/>
-          </a:p>
-        </p:txBody>
-      </p:sp>
-      <p:sp>
-        <p:nvSpPr>
-          <p:cNvPr id="9" name="Text 7"/>
-          <p:cNvSpPr/>
-          <p:nvPr/>
-        </p:nvSpPr>
-        <p:spPr>
-          <a:xfrm>
-            <a:off x="1920240" y="5038344"/>
-            <a:ext cx="9326880" cy="457200"/>
-          </a:xfrm>
-          <a:prstGeom prst="rect">
-            <a:avLst/>
-          </a:prstGeom>
-          <a:noFill/>
-          <a:ln/>
-        </p:spPr>
-        <p:txBody>
-          <a:bodyPr wrap="square" lIns="0" tIns="0" rIns="0" bIns="0" rtlCol="0" anchor="t"/>
-          <a:lstStyle/>
-          <a:p>
-            <a:pPr indent="0" marL="0">
-              <a:buNone/>
-            </a:pPr>
-            <a:r>
-              <a:rPr lang="en-US" sz="1250" dirty="0">
-                <a:solidFill>
-                  <a:srgbClr val="9AA0A8"/>
-                </a:solidFill>
-                <a:latin typeface="Calibri" pitchFamily="34" charset="0"/>
-                <a:ea typeface="Calibri" pitchFamily="34" charset="-122"/>
-                <a:cs typeface="Calibri" pitchFamily="34" charset="-120"/>
-              </a:rPr>
-              <a:t>Qalan yeganə dürüst naməlumluq. Gizlədilmir, açıq deyilir.</a:t>
-            </a:r>
-            <a:endParaRPr lang="en-US" sz="1250" dirty="0"/>
-          </a:p>
-        </p:txBody>
-      </p:sp>
-      <p:sp>
-        <p:nvSpPr>
-          <p:cNvPr id="10" name="Text 8"/>
-          <p:cNvSpPr/>
-          <p:nvPr/>
-        </p:nvSpPr>
-        <p:spPr>
-          <a:xfrm>
-            <a:off x="502920" y="6400800"/>
-            <a:ext cx="1828800" cy="274320"/>
-          </a:xfrm>
-          <a:prstGeom prst="rect">
-            <a:avLst/>
-          </a:prstGeom>
-          <a:noFill/>
-          <a:ln/>
-        </p:spPr>
-        <p:txBody>
-          <a:bodyPr wrap="square" lIns="0" tIns="0" rIns="0" bIns="0" rtlCol="0" anchor="ctr"/>
-          <a:lstStyle/>
-          <a:p>
-            <a:pPr indent="0" marL="0">
-              <a:buNone/>
-            </a:pPr>
-            <a:r>
-              <a:rPr lang="en-US" sz="900" spc="200" kern="0" dirty="0">
-                <a:solidFill>
-                  <a:srgbClr val="9AA0A8"/>
-                </a:solidFill>
-                <a:latin typeface="Courier New" pitchFamily="34" charset="0"/>
-                <a:ea typeface="Courier New" pitchFamily="34" charset="-122"/>
-                <a:cs typeface="Courier New" pitchFamily="34" charset="-120"/>
-              </a:rPr>
               <a:t>PULSO</a:t>
             </a:r>
             <a:endParaRPr lang="en-US" sz="900" dirty="0"/>
@@ -6059,7 +6965,7 @@
       </p:sp>
       <p:sp>
         <p:nvSpPr>
-          <p:cNvPr id="11" name="Text 9"/>
+          <p:cNvPr id="21" name="Text 19"/>
           <p:cNvSpPr/>
           <p:nvPr/>
         </p:nvSpPr>
@@ -6084,7 +6990,7 @@
             <a:r>
               <a:rPr lang="en-US" sz="900" dirty="0">
                 <a:solidFill>
-                  <a:srgbClr val="9AA0A8"/>
+                  <a:srgbClr val="8E939A"/>
                 </a:solidFill>
                 <a:latin typeface="Courier New" pitchFamily="34" charset="0"/>
                 <a:ea typeface="Courier New" pitchFamily="34" charset="-122"/>

--- a/presentation/Pulso_Pitch_Deck_AZ.pptx
+++ b/presentation/Pulso_Pitch_Deck_AZ.pptx
@@ -1304,7 +1304,7 @@
           <a:p>
             <a:r>
               <a:rPr lang="en-US" dirty="0"/>
-              <a:t>Sondakı tənzimləmə cümləsi çoxlarının deyə bilmədiyi şeydir — açıq de, tələsmə.</a:t>
+              <a:t>İki kanal, bir məhsul — institusional bizə miqyas verir, birbaşa satış isə o bağlanana qədər gəlir verir.</a:t>
             </a:r>
             <a:endParaRPr lang="en-US" dirty="0"/>
           </a:p>
@@ -4411,7 +4411,7 @@
                 <a:ea typeface="Courier New" pitchFamily="34" charset="-122"/>
                 <a:cs typeface="Courier New" pitchFamily="34" charset="-120"/>
               </a:rPr>
-              <a:t>ÜRƏK TEZLIYI</a:t>
+              <a:t>TEZLIK</a:t>
             </a:r>
             <a:endParaRPr lang="en-US" sz="950" dirty="0"/>
           </a:p>
@@ -5760,7 +5760,7 @@
                 <a:ea typeface="Cambria" pitchFamily="34" charset="-122"/>
                 <a:cs typeface="Cambria" pitchFamily="34" charset="-120"/>
               </a:rPr>
-              <a:t>Avadanlığı maya dəyərinə sat.</a:t>
+              <a:t>İki alıcı, iki fərqli sürət.</a:t>
             </a:r>
             <a:endParaRPr lang="en-US" sz="2900" dirty="0"/>
           </a:p>
@@ -5777,7 +5777,7 @@
                 <a:ea typeface="Cambria" pitchFamily="34" charset="-122"/>
                 <a:cs typeface="Cambria" pitchFamily="34" charset="-120"/>
               </a:rPr>
-              <a:t>İşçidən yox, proqramdan pul al.</a:t>
+              <a:t>Avadanlıq maya dəyərinə, hər iki halda.</a:t>
             </a:r>
             <a:endParaRPr lang="en-US" sz="2900" dirty="0"/>
           </a:p>
@@ -5841,7 +5841,7 @@
                 <a:ea typeface="Courier New" pitchFamily="34" charset="-122"/>
                 <a:cs typeface="Courier New" pitchFamily="34" charset="-120"/>
               </a:rPr>
-              <a:t>KİM ÖDƏYİR</a:t>
+              <a:t>İNSTİTUSİONAL — B2B2G</a:t>
             </a:r>
             <a:endParaRPr lang="en-US" sz="1050" dirty="0"/>
           </a:p>
@@ -5883,7 +5883,7 @@
                 <a:ea typeface="Calibri" pitchFamily="34" charset="-122"/>
                 <a:cs typeface="Calibri" pitchFamily="34" charset="-120"/>
               </a:rPr>
-              <a:t>Səhiyyə işçisi yox — onların büdcəsi yoxdur. Alıcı onları artıq maliyyələşdirən QHT və ya nazirlikdir.</a:t>
+              <a:t>İcma səhiyyə işçilərini artıq maliyyələşdirən QHT və nazirliklər. Miqyas kanalı — 3,8 milyon işçi, 98+ ölkə. Bağlanması yavaşdır.</a:t>
             </a:r>
             <a:endParaRPr lang="en-US" sz="1300" dirty="0"/>
           </a:p>
@@ -5947,7 +5947,7 @@
                 <a:ea typeface="Courier New" pitchFamily="34" charset="-122"/>
                 <a:cs typeface="Courier New" pitchFamily="34" charset="-120"/>
               </a:rPr>
-              <a:t>NECƏ PUL QAZANIRIQ</a:t>
+              <a:t>BİRBAŞA — B2B</a:t>
             </a:r>
             <a:endParaRPr lang="en-US" sz="1050" dirty="0"/>
           </a:p>
@@ -5989,7 +5989,7 @@
                 <a:ea typeface="Calibri" pitchFamily="34" charset="-122"/>
                 <a:cs typeface="Calibri" pitchFamily="34" charset="-120"/>
               </a:rPr>
-              <a:t>Maya dəyərinə yaxın avadanlıq, geniş əhatə. QHT və ya nazirliyə hesablanan proqram səviyyəli abunəlik.</a:t>
+              <a:t>Öz büdcəsi olan klinikalar və aptek­lər, aradan institut olmadan. Miqyası kiçikdir, amma bu gün bağlanır.</a:t>
             </a:r>
             <a:endParaRPr lang="en-US" sz="1300" dirty="0"/>
           </a:p>
@@ -6031,7 +6031,7 @@
                 <a:ea typeface="Cambria" pitchFamily="34" charset="-122"/>
                 <a:cs typeface="Cambria" pitchFamily="34" charset="-120"/>
               </a:rPr>
-              <a:t>3,8 milyon icma səhiyyə işçisi, 98+ ölkə (ÜST) — “tibbi cihaz deyil” statusu bizə onlara indi çatmaq imkanı verir, üç ildən sonra yox.</a:t>
+              <a:t>Hər iki kanalda avadanlıq maya dəyərinə yaxındır. Marja hesabat abunəliyindən gəlir — institutlara proqram səviyyəsində, birbaşa alıcılara klinika səviyyəsində hesablanır.</a:t>
             </a:r>
             <a:endParaRPr lang="en-US" sz="1450" dirty="0"/>
           </a:p>
@@ -6307,7 +6307,7 @@
                 <a:ea typeface="Courier New" pitchFamily="34" charset="-122"/>
                 <a:cs typeface="Courier New" pitchFamily="34" charset="-120"/>
               </a:rPr>
-              <a:t>PILOT</a:t>
+              <a:t>KLINIKA (BIRBAŞA)</a:t>
             </a:r>
             <a:endParaRPr lang="en-US" sz="1100" dirty="0"/>
           </a:p>
@@ -6346,7 +6346,7 @@
                 <a:ea typeface="Cambria" pitchFamily="34" charset="-122"/>
                 <a:cs typeface="Cambria" pitchFamily="34" charset="-120"/>
               </a:rPr>
-              <a:t>~45–60 $</a:t>
+              <a:t>149–199 $</a:t>
             </a:r>
             <a:endParaRPr lang="en-US" sz="2300" dirty="0"/>
           </a:p>
@@ -6385,7 +6385,7 @@
                 <a:ea typeface="Calibri" pitchFamily="34" charset="-122"/>
                 <a:cs typeface="Calibri" pitchFamily="34" charset="-120"/>
               </a:rPr>
-              <a:t>hər dəst, maya dəyərinə yaxın</a:t>
+              <a:t>hər dəst + 15 $/ay proqram</a:t>
             </a:r>
             <a:endParaRPr lang="en-US" sz="1000" dirty="0"/>
           </a:p>
@@ -6431,7 +6431,7 @@
                 <a:ea typeface="Calibri" pitchFamily="34" charset="-122"/>
                 <a:cs typeface="Calibri" pitchFamily="34" charset="-120"/>
               </a:rPr>
-              <a:t>Bir avadanlıq dəsti</a:t>
+              <a:t>İnstitut olmadan bu gün al</a:t>
             </a:r>
             <a:endParaRPr lang="en-US" sz="1100" dirty="0"/>
           </a:p>
@@ -6455,7 +6455,7 @@
                 <a:ea typeface="Calibri" pitchFamily="34" charset="-122"/>
                 <a:cs typeface="Calibri" pitchFamily="34" charset="-120"/>
               </a:rPr>
-              <a:t>Bir məntəqə sınamaq üçün</a:t>
+              <a:t>Bir dəst + klinika tətbiqi</a:t>
             </a:r>
             <a:endParaRPr lang="en-US" sz="1100" dirty="0"/>
           </a:p>
